--- a/matome/articles-2/articles-2-slides.pptx
+++ b/matome/articles-2/articles-2-slides.pptx
@@ -8117,18 +8117,29 @@
         <p:spPr>
           <a:xfrm>
             <a:off x="685800" y="1885950"/>
-            <a:ext cx="5381625" cy="314325"/>
-          </a:xfrm>
-          <a:prstGeom prst="rect">
-            <a:avLst/>
-          </a:prstGeom>
-          <a:noFill/>
-          <a:ln/>
-        </p:spPr>
-        <p:txBody>
-          <a:bodyPr wrap="square" lIns="0" tIns="0" rIns="0" bIns="0" anchor="ctr"/>
-          <a:lstStyle/>
-          <a:p>
+            <a:ext cx="7791450" cy="314325"/>
+          </a:xfrm>
+          <a:prstGeom prst="rect">
+            <a:avLst/>
+          </a:prstGeom>
+          <a:noFill/>
+          <a:ln/>
+        </p:spPr>
+        <p:txBody>
+          <a:bodyPr wrap="square" lIns="0" tIns="0" rIns="0" bIns="0" anchor="ctr"/>
+          <a:lstStyle/>
+          <a:p>
+            <a:pPr/>
+            <a:r>
+              <a:rPr sz="1650">
+                <a:solidFill>
+                  <a:srgbClr val="4A5270"/>
+                </a:solidFill>
+                <a:latin typeface="Noto Sans JP"/>
+                <a:ea typeface="Noto Sans JP"/>
+              </a:rPr>
+              <a:t>ここまでは </a:t>
+            </a:r>
             <a:pPr/>
             <a:r>
               <a:rPr sz="1650" b="1">
@@ -8149,7 +8160,7 @@
                 <a:latin typeface="Noto Sans JP"/>
                 <a:ea typeface="Noto Sans JP"/>
               </a:rPr>
-              <a:t> も </a:t>
+              <a:t> と </a:t>
             </a:r>
             <a:pPr/>
             <a:r>
@@ -8171,7 +8182,7 @@
                 <a:latin typeface="Noto Sans JP"/>
                 <a:ea typeface="Noto Sans JP"/>
               </a:rPr>
-              <a:t> もつけないパターンを見ていこう</a:t>
+              <a:t>。ここからは「どちらもつけない」パターン</a:t>
             </a:r>
           </a:p>
         </p:txBody>
@@ -8184,12 +8195,12 @@
         </p:nvSpPr>
         <p:spPr>
           <a:xfrm>
-            <a:off x="685800" y="2371725"/>
-            <a:ext cx="3505200" cy="1952625"/>
+            <a:off x="685800" y="2390775"/>
+            <a:ext cx="3467100" cy="4048125"/>
           </a:xfrm>
           <a:prstGeom prst="roundRect">
             <a:avLst>
-              <a:gd name="adj" fmla="val 13659"/>
+              <a:gd name="adj" fmla="val 7692"/>
             </a:avLst>
           </a:prstGeom>
           <a:solidFill>
@@ -8205,9 +8216,101 @@
           </a:effectLst>
         </p:spPr>
       </p:sp>
+      <p:sp>
+        <p:nvSpPr>
+          <p:cNvPr id="8" name=""/>
+          <p:cNvSpPr/>
+          <p:nvPr/>
+        </p:nvSpPr>
+        <p:spPr>
+          <a:xfrm>
+            <a:off x="1857375" y="2619375"/>
+            <a:ext cx="1123950" cy="609600"/>
+          </a:xfrm>
+          <a:prstGeom prst="roundRect">
+            <a:avLst>
+              <a:gd name="adj" fmla="val 28125"/>
+            </a:avLst>
+          </a:prstGeom>
+          <a:solidFill>
+            <a:srgbClr val="E8461E"/>
+          </a:solidFill>
+          <a:ln/>
+        </p:spPr>
+      </p:sp>
+      <p:sp>
+        <p:nvSpPr>
+          <p:cNvPr id="9" name=""/>
+          <p:cNvSpPr txBox="1"/>
+          <p:nvPr/>
+        </p:nvSpPr>
+        <p:spPr>
+          <a:xfrm>
+            <a:off x="2028825" y="2743200"/>
+            <a:ext cx="1238250" cy="371475"/>
+          </a:xfrm>
+          <a:prstGeom prst="rect">
+            <a:avLst/>
+          </a:prstGeom>
+          <a:noFill/>
+          <a:ln/>
+        </p:spPr>
+        <p:txBody>
+          <a:bodyPr wrap="square" lIns="0" tIns="0" rIns="0" bIns="0" anchor="ctr"/>
+          <a:lstStyle/>
+          <a:p>
+            <a:pPr/>
+            <a:r>
+              <a:rPr sz="2250" b="1">
+                <a:solidFill>
+                  <a:srgbClr val="FFFFFF"/>
+                </a:solidFill>
+                <a:latin typeface="DM Sans"/>
+                <a:ea typeface="DM Sans"/>
+              </a:rPr>
+              <a:t>a / an</a:t>
+            </a:r>
+          </a:p>
+        </p:txBody>
+      </p:sp>
+      <p:sp>
+        <p:nvSpPr>
+          <p:cNvPr id="10" name=""/>
+          <p:cNvSpPr txBox="1"/>
+          <p:nvPr/>
+        </p:nvSpPr>
+        <p:spPr>
+          <a:xfrm>
+            <a:off x="2047875" y="3305175"/>
+            <a:ext cx="1209675" cy="304800"/>
+          </a:xfrm>
+          <a:prstGeom prst="rect">
+            <a:avLst/>
+          </a:prstGeom>
+          <a:noFill/>
+          <a:ln/>
+        </p:spPr>
+        <p:txBody>
+          <a:bodyPr wrap="square" lIns="0" tIns="0" rIns="0" bIns="0" anchor="ctr"/>
+          <a:lstStyle/>
+          <a:p>
+            <a:pPr/>
+            <a:r>
+              <a:rPr sz="1650" b="1">
+                <a:solidFill>
+                  <a:srgbClr val="1C2340"/>
+                </a:solidFill>
+                <a:latin typeface="Noto Sans JP"/>
+                <a:ea typeface="Noto Sans JP"/>
+              </a:rPr>
+              <a:t>1つの〜</a:t>
+            </a:r>
+          </a:p>
+        </p:txBody>
+      </p:sp>
       <p:pic>
         <p:nvPicPr>
-          <p:cNvPr id="8" name="Image 0" descr="映画">    </p:cNvPr>
+          <p:cNvPr id="11" name="Image 0" descr="映画">    </p:cNvPr>
           <p:cNvPicPr>
             <a:picLocks noChangeAspect="1"/>
           </p:cNvPicPr>
@@ -8221,8 +8324,8 @@
         </p:blipFill>
         <p:spPr>
           <a:xfrm>
-            <a:off x="914400" y="2762250"/>
-            <a:ext cx="1181100" cy="1181100"/>
+            <a:off x="1847850" y="4114800"/>
+            <a:ext cx="1143000" cy="1143000"/>
           </a:xfrm>
           <a:prstGeom prst="rect">
             <a:avLst/>
@@ -8231,88 +8334,64 @@
       </p:pic>
       <p:sp>
         <p:nvSpPr>
-          <p:cNvPr id="9" name=""/>
-          <p:cNvSpPr txBox="1"/>
-          <p:nvPr/>
-        </p:nvSpPr>
-        <p:spPr>
-          <a:xfrm>
-            <a:off x="2266950" y="3057525"/>
-            <a:ext cx="1419225" cy="352425"/>
-          </a:xfrm>
-          <a:prstGeom prst="rect">
-            <a:avLst/>
-          </a:prstGeom>
-          <a:noFill/>
-          <a:ln/>
-        </p:spPr>
-        <p:txBody>
-          <a:bodyPr wrap="square" lIns="0" tIns="0" rIns="0" bIns="0" anchor="ctr"/>
-          <a:lstStyle/>
-          <a:p>
-            <a:pPr/>
-            <a:r>
-              <a:rPr sz="2100" b="1">
-                <a:solidFill>
-                  <a:srgbClr val="1C2340"/>
-                </a:solidFill>
-                <a:latin typeface="DM Sans"/>
-                <a:ea typeface="DM Sans"/>
-              </a:rPr>
-              <a:t>movies</a:t>
-            </a:r>
-          </a:p>
-        </p:txBody>
-      </p:sp>
-      <p:sp>
-        <p:nvSpPr>
-          <p:cNvPr id="10" name=""/>
-          <p:cNvSpPr txBox="1"/>
-          <p:nvPr/>
-        </p:nvSpPr>
-        <p:spPr>
-          <a:xfrm>
-            <a:off x="2266950" y="3409950"/>
-            <a:ext cx="1171575" cy="257175"/>
-          </a:xfrm>
-          <a:prstGeom prst="rect">
-            <a:avLst/>
-          </a:prstGeom>
-          <a:noFill/>
-          <a:ln/>
-        </p:spPr>
-        <p:txBody>
-          <a:bodyPr wrap="square" lIns="0" tIns="0" rIns="0" bIns="0" anchor="ctr"/>
-          <a:lstStyle/>
-          <a:p>
-            <a:pPr/>
-            <a:r>
-              <a:rPr sz="1450">
-                <a:solidFill>
-                  <a:srgbClr val="4A5270"/>
-                </a:solidFill>
-                <a:latin typeface="Noto Sans JP"/>
-                <a:ea typeface="Noto Sans JP"/>
-              </a:rPr>
-              <a:t>複数名詞</a:t>
-            </a:r>
-          </a:p>
-        </p:txBody>
-      </p:sp>
-      <p:sp>
-        <p:nvSpPr>
-          <p:cNvPr id="11" name=""/>
+          <p:cNvPr id="12" name=""/>
+          <p:cNvSpPr txBox="1"/>
+          <p:nvPr/>
+        </p:nvSpPr>
+        <p:spPr>
+          <a:xfrm>
+            <a:off x="1771650" y="5762625"/>
+            <a:ext cx="1828800" cy="447675"/>
+          </a:xfrm>
+          <a:prstGeom prst="rect">
+            <a:avLst/>
+          </a:prstGeom>
+          <a:noFill/>
+          <a:ln/>
+        </p:spPr>
+        <p:txBody>
+          <a:bodyPr wrap="square" lIns="0" tIns="0" rIns="0" bIns="0" anchor="ctr"/>
+          <a:lstStyle/>
+          <a:p>
+            <a:pPr/>
+            <a:r>
+              <a:rPr sz="2700" b="1">
+                <a:solidFill>
+                  <a:srgbClr val="E8461E"/>
+                </a:solidFill>
+                <a:latin typeface="DM Sans"/>
+                <a:ea typeface="DM Sans"/>
+              </a:rPr>
+              <a:t>a</a:t>
+            </a:r>
+            <a:pPr/>
+            <a:r>
+              <a:rPr sz="2700" b="1">
+                <a:solidFill>
+                  <a:srgbClr val="1C2340"/>
+                </a:solidFill>
+                <a:latin typeface="DM Sans"/>
+                <a:ea typeface="DM Sans"/>
+              </a:rPr>
+              <a:t> movie</a:t>
+            </a:r>
+          </a:p>
+        </p:txBody>
+      </p:sp>
+      <p:sp>
+        <p:nvSpPr>
+          <p:cNvPr id="13" name=""/>
           <p:cNvSpPr/>
           <p:nvPr/>
         </p:nvSpPr>
         <p:spPr>
           <a:xfrm>
-            <a:off x="4343400" y="2371725"/>
-            <a:ext cx="3505200" cy="1952625"/>
+            <a:off x="4362450" y="2390775"/>
+            <a:ext cx="3467100" cy="4048125"/>
           </a:xfrm>
           <a:prstGeom prst="roundRect">
             <a:avLst>
-              <a:gd name="adj" fmla="val 13659"/>
+              <a:gd name="adj" fmla="val 7692"/>
             </a:avLst>
           </a:prstGeom>
           <a:solidFill>
@@ -8328,9 +8407,126 @@
           </a:effectLst>
         </p:spPr>
       </p:sp>
+      <p:sp>
+        <p:nvSpPr>
+          <p:cNvPr id="14" name=""/>
+          <p:cNvSpPr/>
+          <p:nvPr/>
+        </p:nvSpPr>
+        <p:spPr>
+          <a:xfrm>
+            <a:off x="5686425" y="2619375"/>
+            <a:ext cx="819150" cy="609600"/>
+          </a:xfrm>
+          <a:prstGeom prst="roundRect">
+            <a:avLst>
+              <a:gd name="adj" fmla="val 28125"/>
+            </a:avLst>
+          </a:prstGeom>
+          <a:solidFill>
+            <a:srgbClr val="2F86CF"/>
+          </a:solidFill>
+          <a:ln/>
+        </p:spPr>
+      </p:sp>
+      <p:sp>
+        <p:nvSpPr>
+          <p:cNvPr id="15" name=""/>
+          <p:cNvSpPr txBox="1"/>
+          <p:nvPr/>
+        </p:nvSpPr>
+        <p:spPr>
+          <a:xfrm>
+            <a:off x="5857875" y="2743200"/>
+            <a:ext cx="895350" cy="371475"/>
+          </a:xfrm>
+          <a:prstGeom prst="rect">
+            <a:avLst/>
+          </a:prstGeom>
+          <a:noFill/>
+          <a:ln/>
+        </p:spPr>
+        <p:txBody>
+          <a:bodyPr wrap="square" lIns="0" tIns="0" rIns="0" bIns="0" anchor="ctr"/>
+          <a:lstStyle/>
+          <a:p>
+            <a:pPr/>
+            <a:r>
+              <a:rPr sz="2250" b="1">
+                <a:solidFill>
+                  <a:srgbClr val="FFFFFF"/>
+                </a:solidFill>
+                <a:latin typeface="DM Sans"/>
+                <a:ea typeface="DM Sans"/>
+              </a:rPr>
+              <a:t>the</a:t>
+            </a:r>
+          </a:p>
+        </p:txBody>
+      </p:sp>
+      <p:sp>
+        <p:nvSpPr>
+          <p:cNvPr id="16" name=""/>
+          <p:cNvSpPr txBox="1"/>
+          <p:nvPr/>
+        </p:nvSpPr>
+        <p:spPr>
+          <a:xfrm>
+            <a:off x="5781675" y="3305175"/>
+            <a:ext cx="1066800" cy="304800"/>
+          </a:xfrm>
+          <a:prstGeom prst="rect">
+            <a:avLst/>
+          </a:prstGeom>
+          <a:noFill/>
+          <a:ln/>
+        </p:spPr>
+        <p:txBody>
+          <a:bodyPr wrap="square" lIns="0" tIns="0" rIns="0" bIns="0" anchor="ctr"/>
+          <a:lstStyle/>
+          <a:p>
+            <a:pPr/>
+            <a:r>
+              <a:rPr sz="1650" b="1">
+                <a:solidFill>
+                  <a:srgbClr val="1C2340"/>
+                </a:solidFill>
+                <a:latin typeface="Noto Sans JP"/>
+                <a:ea typeface="Noto Sans JP"/>
+              </a:rPr>
+              <a:t>それ！</a:t>
+            </a:r>
+          </a:p>
+        </p:txBody>
+      </p:sp>
+      <p:sp>
+        <p:nvSpPr>
+          <p:cNvPr id="17" name=""/>
+          <p:cNvSpPr/>
+          <p:nvPr/>
+        </p:nvSpPr>
+        <p:spPr>
+          <a:xfrm>
+            <a:off x="5429250" y="4019550"/>
+            <a:ext cx="1333500" cy="1333500"/>
+          </a:xfrm>
+          <a:prstGeom prst="ellipse">
+            <a:avLst/>
+          </a:prstGeom>
+          <a:solidFill>
+            <a:srgbClr val="DDEFFC"/>
+          </a:solidFill>
+          <a:ln w="38100">
+            <a:solidFill>
+              <a:srgbClr val="2F86CF"/>
+            </a:solidFill>
+            <a:prstDash val="solid"/>
+          </a:ln>
+        </p:spPr>
+      </p:sp>
       <p:pic>
         <p:nvPicPr>
-          <p:cNvPr id="12" name="Image 1" descr="家具">    </p:cNvPr>
+          <p:cNvPr id="18" name="Image 1" descr="映画">    </p:cNvPr>
           <p:cNvPicPr>
             <a:picLocks noChangeAspect="1"/>
           </p:cNvPicPr>
@@ -8344,8 +8540,8 @@
         </p:blipFill>
         <p:spPr>
           <a:xfrm>
-            <a:off x="4572000" y="2762250"/>
-            <a:ext cx="1181100" cy="1181100"/>
+            <a:off x="5600700" y="4191000"/>
+            <a:ext cx="990600" cy="990600"/>
           </a:xfrm>
           <a:prstGeom prst="rect">
             <a:avLst/>
@@ -8354,94 +8550,132 @@
       </p:pic>
       <p:sp>
         <p:nvSpPr>
-          <p:cNvPr id="13" name=""/>
-          <p:cNvSpPr txBox="1"/>
-          <p:nvPr/>
-        </p:nvSpPr>
-        <p:spPr>
-          <a:xfrm>
-            <a:off x="5924550" y="3057525"/>
-            <a:ext cx="1657350" cy="352425"/>
-          </a:xfrm>
-          <a:prstGeom prst="rect">
-            <a:avLst/>
-          </a:prstGeom>
-          <a:noFill/>
-          <a:ln/>
-        </p:spPr>
-        <p:txBody>
-          <a:bodyPr wrap="square" lIns="0" tIns="0" rIns="0" bIns="0" anchor="ctr"/>
-          <a:lstStyle/>
-          <a:p>
-            <a:pPr/>
-            <a:r>
-              <a:rPr sz="2100" b="1">
-                <a:solidFill>
-                  <a:srgbClr val="1C2340"/>
-                </a:solidFill>
-                <a:latin typeface="DM Sans"/>
-                <a:ea typeface="DM Sans"/>
-              </a:rPr>
-              <a:t>furniture</a:t>
-            </a:r>
-          </a:p>
-        </p:txBody>
-      </p:sp>
-      <p:sp>
-        <p:nvSpPr>
-          <p:cNvPr id="14" name=""/>
-          <p:cNvSpPr txBox="1"/>
-          <p:nvPr/>
-        </p:nvSpPr>
-        <p:spPr>
-          <a:xfrm>
-            <a:off x="5924550" y="3409950"/>
-            <a:ext cx="2219325" cy="257175"/>
-          </a:xfrm>
-          <a:prstGeom prst="rect">
-            <a:avLst/>
-          </a:prstGeom>
-          <a:noFill/>
-          <a:ln/>
-        </p:spPr>
-        <p:txBody>
-          <a:bodyPr wrap="square" lIns="0" tIns="0" rIns="0" bIns="0" anchor="ctr"/>
-          <a:lstStyle/>
-          <a:p>
-            <a:pPr/>
-            <a:r>
-              <a:rPr sz="1450">
-                <a:solidFill>
-                  <a:srgbClr val="4A5270"/>
-                </a:solidFill>
-                <a:latin typeface="Noto Sans JP"/>
-                <a:ea typeface="Noto Sans JP"/>
-              </a:rPr>
-              <a:t>不特定の不可算名詞</a:t>
-            </a:r>
-          </a:p>
-        </p:txBody>
-      </p:sp>
-      <p:sp>
-        <p:nvSpPr>
-          <p:cNvPr id="15" name=""/>
+          <p:cNvPr id="19" name=""/>
           <p:cNvSpPr/>
           <p:nvPr/>
         </p:nvSpPr>
         <p:spPr>
           <a:xfrm>
-            <a:off x="8001000" y="2371725"/>
-            <a:ext cx="3505200" cy="1952625"/>
+            <a:off x="5734050" y="5124450"/>
+            <a:ext cx="723900" cy="323850"/>
           </a:xfrm>
           <a:prstGeom prst="roundRect">
             <a:avLst>
-              <a:gd name="adj" fmla="val 13659"/>
+              <a:gd name="adj" fmla="val 50000"/>
+            </a:avLst>
+          </a:prstGeom>
+          <a:solidFill>
+            <a:srgbClr val="2F86CF"/>
+          </a:solidFill>
+          <a:ln/>
+        </p:spPr>
+      </p:sp>
+      <p:sp>
+        <p:nvSpPr>
+          <p:cNvPr id="20" name=""/>
+          <p:cNvSpPr txBox="1"/>
+          <p:nvPr/>
+        </p:nvSpPr>
+        <p:spPr>
+          <a:xfrm>
+            <a:off x="5610225" y="5153025"/>
+            <a:ext cx="971550" cy="257175"/>
+          </a:xfrm>
+          <a:prstGeom prst="rect">
+            <a:avLst/>
+          </a:prstGeom>
+          <a:noFill/>
+          <a:ln/>
+        </p:spPr>
+        <p:txBody>
+          <a:bodyPr wrap="square" lIns="0" tIns="0" rIns="0" bIns="0" anchor="ctr"/>
+          <a:lstStyle/>
+          <a:p>
+            <a:pPr algn="ctr"/>
+            <a:r>
+              <a:rPr sz="1450" b="1">
+                <a:solidFill>
+                  <a:srgbClr val="FFFFFF"/>
+                </a:solidFill>
+                <a:latin typeface="Noto Sans JP"/>
+                <a:ea typeface="Noto Sans JP"/>
+              </a:rPr>
+              <a:t>それ！</a:t>
+            </a:r>
+          </a:p>
+        </p:txBody>
+      </p:sp>
+      <p:sp>
+        <p:nvSpPr>
+          <p:cNvPr id="21" name=""/>
+          <p:cNvSpPr txBox="1"/>
+          <p:nvPr/>
+        </p:nvSpPr>
+        <p:spPr>
+          <a:xfrm>
+            <a:off x="5267325" y="5762625"/>
+            <a:ext cx="2247900" cy="447675"/>
+          </a:xfrm>
+          <a:prstGeom prst="rect">
+            <a:avLst/>
+          </a:prstGeom>
+          <a:noFill/>
+          <a:ln/>
+        </p:spPr>
+        <p:txBody>
+          <a:bodyPr wrap="square" lIns="0" tIns="0" rIns="0" bIns="0" anchor="ctr"/>
+          <a:lstStyle/>
+          <a:p>
+            <a:pPr/>
+            <a:r>
+              <a:rPr sz="2700" b="1">
+                <a:solidFill>
+                  <a:srgbClr val="2F86CF"/>
+                </a:solidFill>
+                <a:latin typeface="DM Sans"/>
+                <a:ea typeface="DM Sans"/>
+              </a:rPr>
+              <a:t>the</a:t>
+            </a:r>
+            <a:pPr/>
+            <a:r>
+              <a:rPr sz="2700" b="1">
+                <a:solidFill>
+                  <a:srgbClr val="1C2340"/>
+                </a:solidFill>
+                <a:latin typeface="DM Sans"/>
+                <a:ea typeface="DM Sans"/>
+              </a:rPr>
+              <a:t> movie</a:t>
+            </a:r>
+          </a:p>
+        </p:txBody>
+      </p:sp>
+      <p:sp>
+        <p:nvSpPr>
+          <p:cNvPr id="22" name=""/>
+          <p:cNvSpPr/>
+          <p:nvPr/>
+        </p:nvSpPr>
+        <p:spPr>
+          <a:xfrm>
+            <a:off x="8039100" y="2390775"/>
+            <a:ext cx="3467100" cy="4048125"/>
+          </a:xfrm>
+          <a:prstGeom prst="roundRect">
+            <a:avLst>
+              <a:gd name="adj" fmla="val 7692"/>
             </a:avLst>
           </a:prstGeom>
           <a:solidFill>
             <a:srgbClr val="FFFFFF"/>
           </a:solidFill>
-          <a:ln/>
+          <a:ln w="38100">
+            <a:solidFill>
+              <a:srgbClr val="E8461E"/>
+            </a:solidFill>
+            <a:prstDash val="solid"/>
+          </a:ln>
           <a:effectLst>
             <a:outerShdw sx="100000" sy="100000" kx="0" ky="0" algn="bl" rotWithShape="0" blurRad="152400" dist="50800" dir="5400000">
               <a:srgbClr val="22304A">
@@ -8451,9 +8685,115 @@
           </a:effectLst>
         </p:spPr>
       </p:sp>
+      <p:sp>
+        <p:nvSpPr>
+          <p:cNvPr id="23" name=""/>
+          <p:cNvSpPr/>
+          <p:nvPr/>
+        </p:nvSpPr>
+        <p:spPr>
+          <a:xfrm>
+            <a:off x="9334500" y="2657475"/>
+            <a:ext cx="876300" cy="609600"/>
+          </a:xfrm>
+          <a:prstGeom prst="roundRect">
+            <a:avLst>
+              <a:gd name="adj" fmla="val 28125"/>
+            </a:avLst>
+          </a:prstGeom>
+          <a:solidFill>
+            <a:srgbClr val="9AA1B6"/>
+          </a:solidFill>
+          <a:ln/>
+        </p:spPr>
+      </p:sp>
+      <p:sp>
+        <p:nvSpPr>
+          <p:cNvPr id="24" name=""/>
+          <p:cNvSpPr txBox="1"/>
+          <p:nvPr/>
+        </p:nvSpPr>
+        <p:spPr>
+          <a:xfrm>
+            <a:off x="9505950" y="2771775"/>
+            <a:ext cx="952500" cy="381000"/>
+          </a:xfrm>
+          <a:prstGeom prst="rect">
+            <a:avLst/>
+          </a:prstGeom>
+          <a:noFill/>
+          <a:ln/>
+        </p:spPr>
+        <p:txBody>
+          <a:bodyPr wrap="square" lIns="0" tIns="0" rIns="0" bIns="0" anchor="ctr"/>
+          <a:lstStyle/>
+          <a:p>
+            <a:pPr/>
+            <a:r>
+              <a:rPr sz="2100" b="1">
+                <a:solidFill>
+                  <a:srgbClr val="FFFFFF"/>
+                </a:solidFill>
+                <a:latin typeface="Noto Sans JP"/>
+                <a:ea typeface="Noto Sans JP"/>
+              </a:rPr>
+              <a:t>なし</a:t>
+            </a:r>
+          </a:p>
+        </p:txBody>
+      </p:sp>
+      <p:sp>
+        <p:nvSpPr>
+          <p:cNvPr id="25" name=""/>
+          <p:cNvSpPr txBox="1"/>
+          <p:nvPr/>
+        </p:nvSpPr>
+        <p:spPr>
+          <a:xfrm>
+            <a:off x="8524875" y="3343275"/>
+            <a:ext cx="3219450" cy="304800"/>
+          </a:xfrm>
+          <a:prstGeom prst="rect">
+            <a:avLst/>
+          </a:prstGeom>
+          <a:noFill/>
+          <a:ln/>
+        </p:spPr>
+        <p:txBody>
+          <a:bodyPr wrap="square" lIns="0" tIns="0" rIns="0" bIns="0" anchor="ctr"/>
+          <a:lstStyle/>
+          <a:p>
+            <a:pPr/>
+            <a:r>
+              <a:rPr sz="1650" b="1">
+                <a:solidFill>
+                  <a:srgbClr val="1C2340"/>
+                </a:solidFill>
+                <a:latin typeface="Noto Sans JP"/>
+                <a:ea typeface="Noto Sans JP"/>
+              </a:rPr>
+              <a:t>どちらもつけない＝</a:t>
+            </a:r>
+            <a:pPr/>
+            <a:r>
+              <a:rPr sz="1650" b="1">
+                <a:solidFill>
+                  <a:srgbClr val="1C2340"/>
+                </a:solidFill>
+                <a:highlight>
+                  <a:srgbClr val="FFD9C9"/>
+                </a:highlight>
+                <a:latin typeface="Noto Sans JP"/>
+                <a:ea typeface="Noto Sans JP"/>
+              </a:rPr>
+              <a:t>無冠詞</a:t>
+            </a:r>
+          </a:p>
+        </p:txBody>
+      </p:sp>
       <p:pic>
         <p:nvPicPr>
-          <p:cNvPr id="16" name="Image 2" descr="鳥居">    </p:cNvPr>
+          <p:cNvPr id="26" name="Image 2" descr="映画">    </p:cNvPr>
           <p:cNvPicPr>
             <a:picLocks noChangeAspect="1"/>
           </p:cNvPicPr>
@@ -8467,116 +8807,17 @@
         </p:blipFill>
         <p:spPr>
           <a:xfrm>
-            <a:off x="8229600" y="2762250"/>
-            <a:ext cx="1181100" cy="1181100"/>
+            <a:off x="8601075" y="4114800"/>
+            <a:ext cx="1143000" cy="1143000"/>
           </a:xfrm>
           <a:prstGeom prst="rect">
             <a:avLst/>
           </a:prstGeom>
         </p:spPr>
       </p:pic>
-      <p:sp>
-        <p:nvSpPr>
-          <p:cNvPr id="17" name=""/>
-          <p:cNvSpPr txBox="1"/>
-          <p:nvPr/>
-        </p:nvSpPr>
-        <p:spPr>
-          <a:xfrm>
-            <a:off x="9582150" y="3057525"/>
-            <a:ext cx="1200150" cy="352425"/>
-          </a:xfrm>
-          <a:prstGeom prst="rect">
-            <a:avLst/>
-          </a:prstGeom>
-          <a:noFill/>
-          <a:ln/>
-        </p:spPr>
-        <p:txBody>
-          <a:bodyPr wrap="square" lIns="0" tIns="0" rIns="0" bIns="0" anchor="ctr"/>
-          <a:lstStyle/>
-          <a:p>
-            <a:pPr/>
-            <a:r>
-              <a:rPr sz="2100" b="1">
-                <a:solidFill>
-                  <a:srgbClr val="1C2340"/>
-                </a:solidFill>
-                <a:latin typeface="DM Sans"/>
-                <a:ea typeface="DM Sans"/>
-              </a:rPr>
-              <a:t>Kyoto</a:t>
-            </a:r>
-          </a:p>
-        </p:txBody>
-      </p:sp>
-      <p:sp>
-        <p:nvSpPr>
-          <p:cNvPr id="18" name=""/>
-          <p:cNvSpPr txBox="1"/>
-          <p:nvPr/>
-        </p:nvSpPr>
-        <p:spPr>
-          <a:xfrm>
-            <a:off x="9582150" y="3409950"/>
-            <a:ext cx="1171575" cy="257175"/>
-          </a:xfrm>
-          <a:prstGeom prst="rect">
-            <a:avLst/>
-          </a:prstGeom>
-          <a:noFill/>
-          <a:ln/>
-        </p:spPr>
-        <p:txBody>
-          <a:bodyPr wrap="square" lIns="0" tIns="0" rIns="0" bIns="0" anchor="ctr"/>
-          <a:lstStyle/>
-          <a:p>
-            <a:pPr/>
-            <a:r>
-              <a:rPr sz="1450">
-                <a:solidFill>
-                  <a:srgbClr val="4A5270"/>
-                </a:solidFill>
-                <a:latin typeface="Noto Sans JP"/>
-                <a:ea typeface="Noto Sans JP"/>
-              </a:rPr>
-              <a:t>固有名詞</a:t>
-            </a:r>
-          </a:p>
-        </p:txBody>
-      </p:sp>
-      <p:sp>
-        <p:nvSpPr>
-          <p:cNvPr id="19" name=""/>
-          <p:cNvSpPr/>
-          <p:nvPr/>
-        </p:nvSpPr>
-        <p:spPr>
-          <a:xfrm>
-            <a:off x="685800" y="4486275"/>
-            <a:ext cx="3505200" cy="1952625"/>
-          </a:xfrm>
-          <a:prstGeom prst="roundRect">
-            <a:avLst>
-              <a:gd name="adj" fmla="val 13659"/>
-            </a:avLst>
-          </a:prstGeom>
-          <a:solidFill>
-            <a:srgbClr val="FFFFFF"/>
-          </a:solidFill>
-          <a:ln/>
-          <a:effectLst>
-            <a:outerShdw sx="100000" sy="100000" kx="0" ky="0" algn="bl" rotWithShape="0" blurRad="152400" dist="50800" dir="5400000">
-              <a:srgbClr val="22304A">
-                <a:alpha val="10000"/>
-              </a:srgbClr>
-            </a:outerShdw>
-          </a:effectLst>
-        </p:spPr>
-      </p:sp>
       <p:pic>
         <p:nvPicPr>
-          <p:cNvPr id="20" name="Image 3" descr="英語">    </p:cNvPr>
+          <p:cNvPr id="27" name="Image 3" descr="映画">    </p:cNvPr>
           <p:cNvPicPr>
             <a:picLocks noChangeAspect="1"/>
           </p:cNvPicPr>
@@ -8590,8 +8831,8 @@
         </p:blipFill>
         <p:spPr>
           <a:xfrm>
-            <a:off x="914400" y="4867275"/>
-            <a:ext cx="1181100" cy="1181100"/>
+            <a:off x="9801225" y="4114800"/>
+            <a:ext cx="1143000" cy="1143000"/>
           </a:xfrm>
           <a:prstGeom prst="rect">
             <a:avLst/>
@@ -8600,316 +8841,35 @@
       </p:pic>
       <p:sp>
         <p:nvSpPr>
-          <p:cNvPr id="21" name=""/>
-          <p:cNvSpPr txBox="1"/>
-          <p:nvPr/>
-        </p:nvSpPr>
-        <p:spPr>
-          <a:xfrm>
-            <a:off x="2266950" y="5162550"/>
-            <a:ext cx="1409700" cy="352425"/>
-          </a:xfrm>
-          <a:prstGeom prst="rect">
-            <a:avLst/>
-          </a:prstGeom>
-          <a:noFill/>
-          <a:ln/>
-        </p:spPr>
-        <p:txBody>
-          <a:bodyPr wrap="square" lIns="0" tIns="0" rIns="0" bIns="0" anchor="ctr"/>
-          <a:lstStyle/>
-          <a:p>
-            <a:pPr/>
-            <a:r>
-              <a:rPr sz="2100" b="1">
-                <a:solidFill>
-                  <a:srgbClr val="1C2340"/>
-                </a:solidFill>
-                <a:latin typeface="DM Sans"/>
-                <a:ea typeface="DM Sans"/>
-              </a:rPr>
-              <a:t>English</a:t>
-            </a:r>
-          </a:p>
-        </p:txBody>
-      </p:sp>
-      <p:sp>
-        <p:nvSpPr>
-          <p:cNvPr id="22" name=""/>
-          <p:cNvSpPr txBox="1"/>
-          <p:nvPr/>
-        </p:nvSpPr>
-        <p:spPr>
-          <a:xfrm>
-            <a:off x="2266950" y="5524500"/>
-            <a:ext cx="762000" cy="257175"/>
-          </a:xfrm>
-          <a:prstGeom prst="rect">
-            <a:avLst/>
-          </a:prstGeom>
-          <a:noFill/>
-          <a:ln/>
-        </p:spPr>
-        <p:txBody>
-          <a:bodyPr wrap="square" lIns="0" tIns="0" rIns="0" bIns="0" anchor="ctr"/>
-          <a:lstStyle/>
-          <a:p>
-            <a:pPr/>
-            <a:r>
-              <a:rPr sz="1450">
-                <a:solidFill>
-                  <a:srgbClr val="4A5270"/>
-                </a:solidFill>
-                <a:latin typeface="Noto Sans JP"/>
-                <a:ea typeface="Noto Sans JP"/>
-              </a:rPr>
-              <a:t>言語</a:t>
-            </a:r>
-          </a:p>
-        </p:txBody>
-      </p:sp>
-      <p:sp>
-        <p:nvSpPr>
-          <p:cNvPr id="23" name=""/>
-          <p:cNvSpPr/>
-          <p:nvPr/>
-        </p:nvSpPr>
-        <p:spPr>
-          <a:xfrm>
-            <a:off x="4343400" y="4486275"/>
-            <a:ext cx="3505200" cy="1952625"/>
-          </a:xfrm>
-          <a:prstGeom prst="roundRect">
-            <a:avLst>
-              <a:gd name="adj" fmla="val 13659"/>
-            </a:avLst>
-          </a:prstGeom>
-          <a:solidFill>
-            <a:srgbClr val="FFFFFF"/>
-          </a:solidFill>
-          <a:ln/>
-          <a:effectLst>
-            <a:outerShdw sx="100000" sy="100000" kx="0" ky="0" algn="bl" rotWithShape="0" blurRad="152400" dist="50800" dir="5400000">
-              <a:srgbClr val="22304A">
-                <a:alpha val="10000"/>
-              </a:srgbClr>
-            </a:outerShdw>
-          </a:effectLst>
-        </p:spPr>
-      </p:sp>
-      <p:pic>
-        <p:nvPicPr>
-          <p:cNvPr id="24" name="Image 4" descr="朝食">    </p:cNvPr>
-          <p:cNvPicPr>
-            <a:picLocks noChangeAspect="1"/>
-          </p:cNvPicPr>
-          <p:nvPr/>
-        </p:nvPicPr>
-        <p:blipFill>
-          <a:blip r:embed="rId5"/>
-          <a:stretch>
-            <a:fillRect/>
-          </a:stretch>
-        </p:blipFill>
-        <p:spPr>
-          <a:xfrm>
-            <a:off x="4572000" y="4867275"/>
-            <a:ext cx="1181100" cy="1181100"/>
-          </a:xfrm>
-          <a:prstGeom prst="rect">
-            <a:avLst/>
-          </a:prstGeom>
-        </p:spPr>
-      </p:pic>
-      <p:sp>
-        <p:nvSpPr>
-          <p:cNvPr id="25" name=""/>
-          <p:cNvSpPr txBox="1"/>
-          <p:nvPr/>
-        </p:nvSpPr>
-        <p:spPr>
-          <a:xfrm>
-            <a:off x="5924550" y="5162550"/>
-            <a:ext cx="1771650" cy="352425"/>
-          </a:xfrm>
-          <a:prstGeom prst="rect">
-            <a:avLst/>
-          </a:prstGeom>
-          <a:noFill/>
-          <a:ln/>
-        </p:spPr>
-        <p:txBody>
-          <a:bodyPr wrap="square" lIns="0" tIns="0" rIns="0" bIns="0" anchor="ctr"/>
-          <a:lstStyle/>
-          <a:p>
-            <a:pPr/>
-            <a:r>
-              <a:rPr sz="2100" b="1">
-                <a:solidFill>
-                  <a:srgbClr val="1C2340"/>
-                </a:solidFill>
-                <a:latin typeface="DM Sans"/>
-                <a:ea typeface="DM Sans"/>
-              </a:rPr>
-              <a:t>breakfast</a:t>
-            </a:r>
-          </a:p>
-        </p:txBody>
-      </p:sp>
-      <p:sp>
-        <p:nvSpPr>
-          <p:cNvPr id="26" name=""/>
-          <p:cNvSpPr txBox="1"/>
-          <p:nvPr/>
-        </p:nvSpPr>
-        <p:spPr>
-          <a:xfrm>
-            <a:off x="5924550" y="5524500"/>
-            <a:ext cx="762000" cy="257175"/>
-          </a:xfrm>
-          <a:prstGeom prst="rect">
-            <a:avLst/>
-          </a:prstGeom>
-          <a:noFill/>
-          <a:ln/>
-        </p:spPr>
-        <p:txBody>
-          <a:bodyPr wrap="square" lIns="0" tIns="0" rIns="0" bIns="0" anchor="ctr"/>
-          <a:lstStyle/>
-          <a:p>
-            <a:pPr/>
-            <a:r>
-              <a:rPr sz="1450">
-                <a:solidFill>
-                  <a:srgbClr val="4A5270"/>
-                </a:solidFill>
-                <a:latin typeface="Noto Sans JP"/>
-                <a:ea typeface="Noto Sans JP"/>
-              </a:rPr>
-              <a:t>食事</a:t>
-            </a:r>
-          </a:p>
-        </p:txBody>
-      </p:sp>
-      <p:sp>
-        <p:nvSpPr>
-          <p:cNvPr id="27" name=""/>
-          <p:cNvSpPr/>
-          <p:nvPr/>
-        </p:nvSpPr>
-        <p:spPr>
-          <a:xfrm>
-            <a:off x="8001000" y="4486275"/>
-            <a:ext cx="3505200" cy="1952625"/>
-          </a:xfrm>
-          <a:prstGeom prst="roundRect">
-            <a:avLst>
-              <a:gd name="adj" fmla="val 13659"/>
-            </a:avLst>
-          </a:prstGeom>
-          <a:solidFill>
-            <a:srgbClr val="FFFFFF"/>
-          </a:solidFill>
-          <a:ln/>
-          <a:effectLst>
-            <a:outerShdw sx="100000" sy="100000" kx="0" ky="0" algn="bl" rotWithShape="0" blurRad="152400" dist="50800" dir="5400000">
-              <a:srgbClr val="22304A">
-                <a:alpha val="10000"/>
-              </a:srgbClr>
-            </a:outerShdw>
-          </a:effectLst>
-        </p:spPr>
-      </p:sp>
-      <p:pic>
-        <p:nvPicPr>
-          <p:cNvPr id="28" name="Image 5" descr="ハロウィン">    </p:cNvPr>
-          <p:cNvPicPr>
-            <a:picLocks noChangeAspect="1"/>
-          </p:cNvPicPr>
-          <p:nvPr/>
-        </p:nvPicPr>
-        <p:blipFill>
-          <a:blip r:embed="rId6"/>
-          <a:stretch>
-            <a:fillRect/>
-          </a:stretch>
-        </p:blipFill>
-        <p:spPr>
-          <a:xfrm>
-            <a:off x="8229600" y="4867275"/>
-            <a:ext cx="1181100" cy="1181100"/>
-          </a:xfrm>
-          <a:prstGeom prst="rect">
-            <a:avLst/>
-          </a:prstGeom>
-        </p:spPr>
-      </p:pic>
-      <p:sp>
-        <p:nvSpPr>
-          <p:cNvPr id="29" name=""/>
-          <p:cNvSpPr txBox="1"/>
-          <p:nvPr/>
-        </p:nvSpPr>
-        <p:spPr>
-          <a:xfrm>
-            <a:off x="9582150" y="5162550"/>
-            <a:ext cx="1885950" cy="352425"/>
-          </a:xfrm>
-          <a:prstGeom prst="rect">
-            <a:avLst/>
-          </a:prstGeom>
-          <a:noFill/>
-          <a:ln/>
-        </p:spPr>
-        <p:txBody>
-          <a:bodyPr wrap="square" lIns="0" tIns="0" rIns="0" bIns="0" anchor="ctr"/>
-          <a:lstStyle/>
-          <a:p>
-            <a:pPr/>
-            <a:r>
-              <a:rPr sz="2100" b="1">
-                <a:solidFill>
-                  <a:srgbClr val="1C2340"/>
-                </a:solidFill>
-                <a:latin typeface="DM Sans"/>
-                <a:ea typeface="DM Sans"/>
-              </a:rPr>
-              <a:t>Halloween</a:t>
-            </a:r>
-          </a:p>
-        </p:txBody>
-      </p:sp>
-      <p:sp>
-        <p:nvSpPr>
-          <p:cNvPr id="30" name=""/>
-          <p:cNvSpPr txBox="1"/>
-          <p:nvPr/>
-        </p:nvSpPr>
-        <p:spPr>
-          <a:xfrm>
-            <a:off x="9582150" y="5524500"/>
-            <a:ext cx="1800225" cy="257175"/>
-          </a:xfrm>
-          <a:prstGeom prst="rect">
-            <a:avLst/>
-          </a:prstGeom>
-          <a:noFill/>
-          <a:ln/>
-        </p:spPr>
-        <p:txBody>
-          <a:bodyPr wrap="square" lIns="0" tIns="0" rIns="0" bIns="0" anchor="ctr"/>
-          <a:lstStyle/>
-          <a:p>
-            <a:pPr/>
-            <a:r>
-              <a:rPr sz="1450">
-                <a:solidFill>
-                  <a:srgbClr val="4A5270"/>
-                </a:solidFill>
-                <a:latin typeface="Noto Sans JP"/>
-                <a:ea typeface="Noto Sans JP"/>
-              </a:rPr>
-              <a:t>祝日・ホリデー</a:t>
+          <p:cNvPr id="28" name=""/>
+          <p:cNvSpPr txBox="1"/>
+          <p:nvPr/>
+        </p:nvSpPr>
+        <p:spPr>
+          <a:xfrm>
+            <a:off x="9172575" y="5724525"/>
+            <a:ext cx="1724025" cy="447675"/>
+          </a:xfrm>
+          <a:prstGeom prst="rect">
+            <a:avLst/>
+          </a:prstGeom>
+          <a:noFill/>
+          <a:ln/>
+        </p:spPr>
+        <p:txBody>
+          <a:bodyPr wrap="square" lIns="0" tIns="0" rIns="0" bIns="0" anchor="ctr"/>
+          <a:lstStyle/>
+          <a:p>
+            <a:pPr/>
+            <a:r>
+              <a:rPr sz="2700" b="1">
+                <a:solidFill>
+                  <a:srgbClr val="1C2340"/>
+                </a:solidFill>
+                <a:latin typeface="DM Sans"/>
+                <a:ea typeface="DM Sans"/>
+              </a:rPr>
+              <a:t>movies</a:t>
             </a:r>
           </a:p>
         </p:txBody>
@@ -9013,7 +8973,7 @@
         <p:spPr>
           <a:xfrm>
             <a:off x="685800" y="952500"/>
-            <a:ext cx="876300" cy="200025"/>
+            <a:ext cx="1685925" cy="200025"/>
           </a:xfrm>
           <a:prstGeom prst="rect">
             <a:avLst/>
@@ -9034,7 +8994,7 @@
                 <a:latin typeface="DM Sans"/>
                 <a:ea typeface="DM Sans"/>
               </a:rPr>
-              <a:t>QUIZ</a:t>
+              <a:t>NO ARTICLE</a:t>
             </a:r>
           </a:p>
         </p:txBody>
@@ -9048,7 +9008,7 @@
         <p:spPr>
           <a:xfrm>
             <a:off x="685800" y="1171575"/>
-            <a:ext cx="7477125" cy="619125"/>
+            <a:ext cx="6867525" cy="609600"/>
           </a:xfrm>
           <a:prstGeom prst="rect">
             <a:avLst/>
@@ -9069,51 +9029,7 @@
                 <a:latin typeface="Noto Sans JP"/>
                 <a:ea typeface="Noto Sans JP"/>
               </a:rPr>
-              <a:t>（ ）に入るのは </a:t>
-            </a:r>
-            <a:pPr/>
-            <a:r>
-              <a:rPr sz="3300" b="1">
-                <a:solidFill>
-                  <a:srgbClr val="E8461E"/>
-                </a:solidFill>
-                <a:latin typeface="DM Sans"/>
-                <a:ea typeface="DM Sans"/>
-              </a:rPr>
-              <a:t>a / an</a:t>
-            </a:r>
-            <a:pPr/>
-            <a:r>
-              <a:rPr sz="3300" b="1">
-                <a:solidFill>
-                  <a:srgbClr val="1C2340"/>
-                </a:solidFill>
-                <a:latin typeface="Noto Sans JP"/>
-                <a:ea typeface="Noto Sans JP"/>
-              </a:rPr>
-              <a:t>？ </a:t>
-            </a:r>
-            <a:pPr/>
-            <a:r>
-              <a:rPr sz="3300" b="1">
-                <a:solidFill>
-                  <a:srgbClr val="2F86CF"/>
-                </a:solidFill>
-                <a:latin typeface="DM Sans"/>
-                <a:ea typeface="DM Sans"/>
-              </a:rPr>
-              <a:t>the</a:t>
-            </a:r>
-            <a:pPr/>
-            <a:r>
-              <a:rPr sz="3300" b="1">
-                <a:solidFill>
-                  <a:srgbClr val="1C2340"/>
-                </a:solidFill>
-                <a:latin typeface="Noto Sans JP"/>
-                <a:ea typeface="Noto Sans JP"/>
-              </a:rPr>
-              <a:t>？</a:t>
+              <a:t>無冠詞になる、6つのパターン</a:t>
             </a:r>
           </a:p>
         </p:txBody>
@@ -9126,12 +9042,12 @@
         </p:nvSpPr>
         <p:spPr>
           <a:xfrm>
-            <a:off x="685800" y="2000250"/>
-            <a:ext cx="10820400" cy="2857500"/>
+            <a:off x="685800" y="1924050"/>
+            <a:ext cx="3505200" cy="2181225"/>
           </a:xfrm>
           <a:prstGeom prst="roundRect">
             <a:avLst>
-              <a:gd name="adj" fmla="val 9333"/>
+              <a:gd name="adj" fmla="val 12227"/>
             </a:avLst>
           </a:prstGeom>
           <a:solidFill>
@@ -9147,9 +9063,64 @@
           </a:effectLst>
         </p:spPr>
       </p:sp>
+      <p:sp>
+        <p:nvSpPr>
+          <p:cNvPr id="7" name=""/>
+          <p:cNvSpPr/>
+          <p:nvPr/>
+        </p:nvSpPr>
+        <p:spPr>
+          <a:xfrm>
+            <a:off x="819150" y="2057400"/>
+            <a:ext cx="323850" cy="323850"/>
+          </a:xfrm>
+          <a:prstGeom prst="ellipse">
+            <a:avLst/>
+          </a:prstGeom>
+          <a:solidFill>
+            <a:srgbClr val="E8461E"/>
+          </a:solidFill>
+          <a:ln/>
+        </p:spPr>
+      </p:sp>
+      <p:sp>
+        <p:nvSpPr>
+          <p:cNvPr id="8" name=""/>
+          <p:cNvSpPr txBox="1"/>
+          <p:nvPr/>
+        </p:nvSpPr>
+        <p:spPr>
+          <a:xfrm>
+            <a:off x="781050" y="2114550"/>
+            <a:ext cx="409575" cy="209550"/>
+          </a:xfrm>
+          <a:prstGeom prst="rect">
+            <a:avLst/>
+          </a:prstGeom>
+          <a:noFill/>
+          <a:ln/>
+        </p:spPr>
+        <p:txBody>
+          <a:bodyPr wrap="square" lIns="0" tIns="0" rIns="0" bIns="0" anchor="ctr"/>
+          <a:lstStyle/>
+          <a:p>
+            <a:pPr algn="ctr"/>
+            <a:r>
+              <a:rPr sz="1300" b="1">
+                <a:solidFill>
+                  <a:srgbClr val="FFFFFF"/>
+                </a:solidFill>
+                <a:latin typeface="DM Sans"/>
+                <a:ea typeface="DM Sans"/>
+              </a:rPr>
+              <a:t>1</a:t>
+            </a:r>
+          </a:p>
+        </p:txBody>
+      </p:sp>
       <p:pic>
         <p:nvPicPr>
-          <p:cNvPr id="7" name="Image 0" descr="映画">    </p:cNvPr>
+          <p:cNvPr id="9" name="Image 0" descr="映画">    </p:cNvPr>
           <p:cNvPicPr>
             <a:picLocks noChangeAspect="1"/>
           </p:cNvPicPr>
@@ -9163,8 +9134,8 @@
         </p:blipFill>
         <p:spPr>
           <a:xfrm>
-            <a:off x="971550" y="2476500"/>
-            <a:ext cx="1905000" cy="1905000"/>
+            <a:off x="952500" y="2543175"/>
+            <a:ext cx="952500" cy="952500"/>
           </a:xfrm>
           <a:prstGeom prst="rect">
             <a:avLst/>
@@ -9173,213 +9144,116 @@
       </p:pic>
       <p:sp>
         <p:nvSpPr>
-          <p:cNvPr id="8" name=""/>
-          <p:cNvSpPr txBox="1"/>
-          <p:nvPr/>
-        </p:nvSpPr>
-        <p:spPr>
-          <a:xfrm>
-            <a:off x="3162300" y="2638425"/>
-            <a:ext cx="2743200" cy="571500"/>
-          </a:xfrm>
-          <a:prstGeom prst="rect">
-            <a:avLst/>
-          </a:prstGeom>
-          <a:noFill/>
-          <a:ln/>
-        </p:spPr>
-        <p:txBody>
-          <a:bodyPr wrap="square" lIns="0" tIns="0" rIns="0" bIns="0" anchor="ctr"/>
-          <a:lstStyle/>
-          <a:p>
-            <a:pPr/>
-            <a:r>
-              <a:rPr sz="3450" b="1">
-                <a:solidFill>
-                  <a:srgbClr val="1C2340"/>
-                </a:solidFill>
-                <a:latin typeface="DM Sans"/>
-                <a:ea typeface="DM Sans"/>
-              </a:rPr>
-              <a:t>I watched</a:t>
-            </a:r>
-          </a:p>
-        </p:txBody>
-      </p:sp>
-      <p:sp>
-        <p:nvSpPr>
-          <p:cNvPr id="9" name=""/>
+          <p:cNvPr id="10" name=""/>
+          <p:cNvSpPr txBox="1"/>
+          <p:nvPr/>
+        </p:nvSpPr>
+        <p:spPr>
+          <a:xfrm>
+            <a:off x="2057400" y="2705100"/>
+            <a:ext cx="1438275" cy="342900"/>
+          </a:xfrm>
+          <a:prstGeom prst="rect">
+            <a:avLst/>
+          </a:prstGeom>
+          <a:noFill/>
+          <a:ln/>
+        </p:spPr>
+        <p:txBody>
+          <a:bodyPr wrap="square" lIns="0" tIns="0" rIns="0" bIns="0" anchor="ctr"/>
+          <a:lstStyle/>
+          <a:p>
+            <a:pPr/>
+            <a:r>
+              <a:rPr sz="1900" b="1">
+                <a:solidFill>
+                  <a:srgbClr val="1C2340"/>
+                </a:solidFill>
+                <a:latin typeface="Noto Sans JP"/>
+                <a:ea typeface="Noto Sans JP"/>
+              </a:rPr>
+              <a:t>複数名詞</a:t>
+            </a:r>
+          </a:p>
+        </p:txBody>
+      </p:sp>
+      <p:sp>
+        <p:nvSpPr>
+          <p:cNvPr id="11" name=""/>
+          <p:cNvSpPr txBox="1"/>
+          <p:nvPr/>
+        </p:nvSpPr>
+        <p:spPr>
+          <a:xfrm>
+            <a:off x="2057400" y="3057525"/>
+            <a:ext cx="1114425" cy="247650"/>
+          </a:xfrm>
+          <a:prstGeom prst="rect">
+            <a:avLst/>
+          </a:prstGeom>
+          <a:noFill/>
+          <a:ln/>
+        </p:spPr>
+        <p:txBody>
+          <a:bodyPr wrap="square" lIns="0" tIns="0" rIns="0" bIns="0" anchor="ctr"/>
+          <a:lstStyle/>
+          <a:p>
+            <a:pPr/>
+            <a:r>
+              <a:rPr sz="1500" b="1">
+                <a:solidFill>
+                  <a:srgbClr val="4A5270"/>
+                </a:solidFill>
+                <a:latin typeface="DM Sans"/>
+                <a:ea typeface="DM Sans"/>
+              </a:rPr>
+              <a:t>movies</a:t>
+            </a:r>
+          </a:p>
+        </p:txBody>
+      </p:sp>
+      <p:sp>
+        <p:nvSpPr>
+          <p:cNvPr id="12" name=""/>
           <p:cNvSpPr/>
           <p:nvPr/>
         </p:nvSpPr>
         <p:spPr>
           <a:xfrm>
-            <a:off x="5400675" y="2562225"/>
-            <a:ext cx="1333500" cy="723900"/>
+            <a:off x="4343400" y="1924050"/>
+            <a:ext cx="3505200" cy="2181225"/>
           </a:xfrm>
           <a:prstGeom prst="roundRect">
             <a:avLst>
-              <a:gd name="adj" fmla="val 21053"/>
+              <a:gd name="adj" fmla="val 12227"/>
             </a:avLst>
           </a:prstGeom>
           <a:solidFill>
-            <a:srgbClr val="FFF8F5"/>
+            <a:srgbClr val="FFFFFF"/>
           </a:solidFill>
-          <a:ln w="28575">
-            <a:solidFill>
-              <a:srgbClr val="F3A88F"/>
-            </a:solidFill>
-            <a:prstDash val="dash"/>
-          </a:ln>
-        </p:spPr>
-      </p:sp>
-      <p:sp>
-        <p:nvSpPr>
-          <p:cNvPr id="10" name=""/>
-          <p:cNvSpPr txBox="1"/>
-          <p:nvPr/>
-        </p:nvSpPr>
-        <p:spPr>
-          <a:xfrm>
-            <a:off x="6886575" y="2638425"/>
-            <a:ext cx="4371975" cy="571500"/>
-          </a:xfrm>
-          <a:prstGeom prst="rect">
-            <a:avLst/>
-          </a:prstGeom>
-          <a:noFill/>
-          <a:ln/>
-        </p:spPr>
-        <p:txBody>
-          <a:bodyPr wrap="square" lIns="0" tIns="0" rIns="0" bIns="0" anchor="ctr"/>
-          <a:lstStyle/>
-          <a:p>
-            <a:pPr/>
-            <a:r>
-              <a:rPr sz="3450" b="1">
-                <a:solidFill>
-                  <a:srgbClr val="1C2340"/>
-                </a:solidFill>
-                <a:latin typeface="DM Sans"/>
-                <a:ea typeface="DM Sans"/>
-              </a:rPr>
-              <a:t>movie last night.</a:t>
-            </a:r>
-          </a:p>
-        </p:txBody>
-      </p:sp>
-      <p:sp>
-        <p:nvSpPr>
-          <p:cNvPr id="11" name=""/>
-          <p:cNvSpPr txBox="1"/>
-          <p:nvPr/>
-        </p:nvSpPr>
-        <p:spPr>
-          <a:xfrm>
-            <a:off x="3162300" y="3648075"/>
-            <a:ext cx="1781175" cy="571500"/>
-          </a:xfrm>
-          <a:prstGeom prst="rect">
-            <a:avLst/>
-          </a:prstGeom>
-          <a:noFill/>
-          <a:ln/>
-        </p:spPr>
-        <p:txBody>
-          <a:bodyPr wrap="square" lIns="0" tIns="0" rIns="0" bIns="0" anchor="ctr"/>
-          <a:lstStyle/>
-          <a:p>
-            <a:pPr/>
-            <a:r>
-              <a:rPr sz="3450" b="1">
-                <a:solidFill>
-                  <a:srgbClr val="1C2340"/>
-                </a:solidFill>
-                <a:latin typeface="DM Sans"/>
-                <a:ea typeface="DM Sans"/>
-              </a:rPr>
-              <a:t>I liked</a:t>
-            </a:r>
-          </a:p>
-        </p:txBody>
-      </p:sp>
-      <p:sp>
-        <p:nvSpPr>
-          <p:cNvPr id="12" name=""/>
+          <a:ln/>
+          <a:effectLst>
+            <a:outerShdw sx="100000" sy="100000" kx="0" ky="0" algn="bl" rotWithShape="0" blurRad="152400" dist="50800" dir="5400000">
+              <a:srgbClr val="22304A">
+                <a:alpha val="10000"/>
+              </a:srgbClr>
+            </a:outerShdw>
+          </a:effectLst>
+        </p:spPr>
+      </p:sp>
+      <p:sp>
+        <p:nvSpPr>
+          <p:cNvPr id="13" name=""/>
           <p:cNvSpPr/>
           <p:nvPr/>
         </p:nvSpPr>
         <p:spPr>
           <a:xfrm>
-            <a:off x="4562475" y="3571875"/>
-            <a:ext cx="1333500" cy="723900"/>
-          </a:xfrm>
-          <a:prstGeom prst="roundRect">
-            <a:avLst>
-              <a:gd name="adj" fmla="val 21053"/>
-            </a:avLst>
-          </a:prstGeom>
-          <a:solidFill>
-            <a:srgbClr val="FFF8F5"/>
-          </a:solidFill>
-          <a:ln w="28575">
-            <a:solidFill>
-              <a:srgbClr val="F3A88F"/>
-            </a:solidFill>
-            <a:prstDash val="dash"/>
-          </a:ln>
-        </p:spPr>
-      </p:sp>
-      <p:sp>
-        <p:nvSpPr>
-          <p:cNvPr id="13" name=""/>
-          <p:cNvSpPr txBox="1"/>
-          <p:nvPr/>
-        </p:nvSpPr>
-        <p:spPr>
-          <a:xfrm>
-            <a:off x="6048375" y="3648075"/>
-            <a:ext cx="1962150" cy="571500"/>
-          </a:xfrm>
-          <a:prstGeom prst="rect">
-            <a:avLst/>
-          </a:prstGeom>
-          <a:noFill/>
-          <a:ln/>
-        </p:spPr>
-        <p:txBody>
-          <a:bodyPr wrap="square" lIns="0" tIns="0" rIns="0" bIns="0" anchor="ctr"/>
-          <a:lstStyle/>
-          <a:p>
-            <a:pPr/>
-            <a:r>
-              <a:rPr sz="3450" b="1">
-                <a:solidFill>
-                  <a:srgbClr val="1C2340"/>
-                </a:solidFill>
-                <a:latin typeface="DM Sans"/>
-                <a:ea typeface="DM Sans"/>
-              </a:rPr>
-              <a:t>movie.</a:t>
-            </a:r>
-          </a:p>
-        </p:txBody>
-      </p:sp>
-      <p:sp>
-        <p:nvSpPr>
-          <p:cNvPr id="14" name=""/>
-          <p:cNvSpPr/>
-          <p:nvPr/>
-        </p:nvSpPr>
-        <p:spPr>
-          <a:xfrm>
-            <a:off x="685800" y="5324475"/>
-            <a:ext cx="914400" cy="914400"/>
-          </a:xfrm>
-          <a:prstGeom prst="roundRect">
-            <a:avLst>
-              <a:gd name="adj" fmla="val 22917"/>
-            </a:avLst>
+            <a:off x="4476750" y="2057400"/>
+            <a:ext cx="323850" cy="323850"/>
+          </a:xfrm>
+          <a:prstGeom prst="ellipse">
+            <a:avLst/>
           </a:prstGeom>
           <a:solidFill>
             <a:srgbClr val="E8461E"/>
@@ -9389,14 +9263,14 @@
       </p:sp>
       <p:sp>
         <p:nvSpPr>
-          <p:cNvPr id="15" name=""/>
-          <p:cNvSpPr txBox="1"/>
-          <p:nvPr/>
-        </p:nvSpPr>
-        <p:spPr>
-          <a:xfrm>
-            <a:off x="838200" y="5524500"/>
-            <a:ext cx="619125" cy="523875"/>
+          <p:cNvPr id="14" name=""/>
+          <p:cNvSpPr txBox="1"/>
+          <p:nvPr/>
+        </p:nvSpPr>
+        <p:spPr>
+          <a:xfrm>
+            <a:off x="4410075" y="2114550"/>
+            <a:ext cx="457200" cy="209550"/>
           </a:xfrm>
           <a:prstGeom prst="rect">
             <a:avLst/>
@@ -9410,18 +9284,42 @@
           <a:p>
             <a:pPr algn="ctr"/>
             <a:r>
-              <a:rPr sz="3150" b="1">
+              <a:rPr sz="1300" b="1">
                 <a:solidFill>
                   <a:srgbClr val="FFFFFF"/>
                 </a:solidFill>
                 <a:latin typeface="DM Sans"/>
                 <a:ea typeface="DM Sans"/>
               </a:rPr>
-              <a:t>a</a:t>
-            </a:r>
-          </a:p>
-        </p:txBody>
-      </p:sp>
+              <a:t>2</a:t>
+            </a:r>
+          </a:p>
+        </p:txBody>
+      </p:sp>
+      <p:pic>
+        <p:nvPicPr>
+          <p:cNvPr id="15" name="Image 1" descr="家具">    </p:cNvPr>
+          <p:cNvPicPr>
+            <a:picLocks noChangeAspect="1"/>
+          </p:cNvPicPr>
+          <p:nvPr/>
+        </p:nvPicPr>
+        <p:blipFill>
+          <a:blip r:embed="rId2"/>
+          <a:stretch>
+            <a:fillRect/>
+          </a:stretch>
+        </p:blipFill>
+        <p:spPr>
+          <a:xfrm>
+            <a:off x="4610100" y="2543175"/>
+            <a:ext cx="952500" cy="952500"/>
+          </a:xfrm>
+          <a:prstGeom prst="rect">
+            <a:avLst/>
+          </a:prstGeom>
+        </p:spPr>
+      </p:pic>
       <p:sp>
         <p:nvSpPr>
           <p:cNvPr id="16" name=""/>
@@ -9430,29 +9328,29 @@
         </p:nvSpPr>
         <p:spPr>
           <a:xfrm>
-            <a:off x="1771650" y="5638800"/>
-            <a:ext cx="590550" cy="295275"/>
-          </a:xfrm>
-          <a:prstGeom prst="rect">
-            <a:avLst/>
-          </a:prstGeom>
-          <a:noFill/>
-          <a:ln/>
-        </p:spPr>
-        <p:txBody>
-          <a:bodyPr wrap="square" lIns="0" tIns="0" rIns="0" bIns="0" anchor="ctr"/>
-          <a:lstStyle/>
-          <a:p>
-            <a:pPr/>
-            <a:r>
-              <a:rPr sz="1800">
-                <a:solidFill>
-                  <a:srgbClr val="8A90A8"/>
-                </a:solidFill>
-                <a:latin typeface="DM Sans"/>
-                <a:ea typeface="DM Sans"/>
-              </a:rPr>
-              <a:t>or</a:t>
+            <a:off x="5715000" y="2705100"/>
+            <a:ext cx="2533650" cy="342900"/>
+          </a:xfrm>
+          <a:prstGeom prst="rect">
+            <a:avLst/>
+          </a:prstGeom>
+          <a:noFill/>
+          <a:ln/>
+        </p:spPr>
+        <p:txBody>
+          <a:bodyPr wrap="square" lIns="0" tIns="0" rIns="0" bIns="0" anchor="ctr"/>
+          <a:lstStyle/>
+          <a:p>
+            <a:pPr/>
+            <a:r>
+              <a:rPr sz="1900" b="1">
+                <a:solidFill>
+                  <a:srgbClr val="1C2340"/>
+                </a:solidFill>
+                <a:latin typeface="Noto Sans JP"/>
+                <a:ea typeface="Noto Sans JP"/>
+              </a:rPr>
+              <a:t>まとめて指す名詞</a:t>
             </a:r>
           </a:p>
         </p:txBody>
@@ -9460,35 +9358,97 @@
       <p:sp>
         <p:nvSpPr>
           <p:cNvPr id="17" name=""/>
+          <p:cNvSpPr txBox="1"/>
+          <p:nvPr/>
+        </p:nvSpPr>
+        <p:spPr>
+          <a:xfrm>
+            <a:off x="5715000" y="3057525"/>
+            <a:ext cx="1276350" cy="247650"/>
+          </a:xfrm>
+          <a:prstGeom prst="rect">
+            <a:avLst/>
+          </a:prstGeom>
+          <a:noFill/>
+          <a:ln/>
+        </p:spPr>
+        <p:txBody>
+          <a:bodyPr wrap="square" lIns="0" tIns="0" rIns="0" bIns="0" anchor="ctr"/>
+          <a:lstStyle/>
+          <a:p>
+            <a:pPr/>
+            <a:r>
+              <a:rPr sz="1500" b="1">
+                <a:solidFill>
+                  <a:srgbClr val="4A5270"/>
+                </a:solidFill>
+                <a:latin typeface="DM Sans"/>
+                <a:ea typeface="DM Sans"/>
+              </a:rPr>
+              <a:t>furniture</a:t>
+            </a:r>
+          </a:p>
+        </p:txBody>
+      </p:sp>
+      <p:sp>
+        <p:nvSpPr>
+          <p:cNvPr id="18" name=""/>
           <p:cNvSpPr/>
           <p:nvPr/>
         </p:nvSpPr>
         <p:spPr>
           <a:xfrm>
-            <a:off x="2162175" y="5324475"/>
-            <a:ext cx="914400" cy="914400"/>
+            <a:off x="8001000" y="1924050"/>
+            <a:ext cx="3505200" cy="2181225"/>
           </a:xfrm>
           <a:prstGeom prst="roundRect">
             <a:avLst>
-              <a:gd name="adj" fmla="val 22917"/>
+              <a:gd name="adj" fmla="val 12227"/>
             </a:avLst>
           </a:prstGeom>
           <a:solidFill>
-            <a:srgbClr val="2F86CF"/>
+            <a:srgbClr val="FFFFFF"/>
           </a:solidFill>
           <a:ln/>
-        </p:spPr>
-      </p:sp>
-      <p:sp>
-        <p:nvSpPr>
-          <p:cNvPr id="18" name=""/>
-          <p:cNvSpPr txBox="1"/>
-          <p:nvPr/>
-        </p:nvSpPr>
-        <p:spPr>
-          <a:xfrm>
-            <a:off x="2066925" y="5524500"/>
-            <a:ext cx="1095375" cy="523875"/>
+          <a:effectLst>
+            <a:outerShdw sx="100000" sy="100000" kx="0" ky="0" algn="bl" rotWithShape="0" blurRad="152400" dist="50800" dir="5400000">
+              <a:srgbClr val="22304A">
+                <a:alpha val="10000"/>
+              </a:srgbClr>
+            </a:outerShdw>
+          </a:effectLst>
+        </p:spPr>
+      </p:sp>
+      <p:sp>
+        <p:nvSpPr>
+          <p:cNvPr id="19" name=""/>
+          <p:cNvSpPr/>
+          <p:nvPr/>
+        </p:nvSpPr>
+        <p:spPr>
+          <a:xfrm>
+            <a:off x="8134350" y="2057400"/>
+            <a:ext cx="323850" cy="323850"/>
+          </a:xfrm>
+          <a:prstGeom prst="ellipse">
+            <a:avLst/>
+          </a:prstGeom>
+          <a:solidFill>
+            <a:srgbClr val="E8461E"/>
+          </a:solidFill>
+          <a:ln/>
+        </p:spPr>
+      </p:sp>
+      <p:sp>
+        <p:nvSpPr>
+          <p:cNvPr id="20" name=""/>
+          <p:cNvSpPr txBox="1"/>
+          <p:nvPr/>
+        </p:nvSpPr>
+        <p:spPr>
+          <a:xfrm>
+            <a:off x="8067675" y="2114550"/>
+            <a:ext cx="457200" cy="209550"/>
           </a:xfrm>
           <a:prstGeom prst="rect">
             <a:avLst/>
@@ -9502,49 +9462,642 @@
           <a:p>
             <a:pPr algn="ctr"/>
             <a:r>
-              <a:rPr sz="3150" b="1">
+              <a:rPr sz="1300" b="1">
                 <a:solidFill>
                   <a:srgbClr val="FFFFFF"/>
                 </a:solidFill>
                 <a:latin typeface="DM Sans"/>
                 <a:ea typeface="DM Sans"/>
               </a:rPr>
-              <a:t>the</a:t>
-            </a:r>
-          </a:p>
-        </p:txBody>
-      </p:sp>
-      <p:sp>
-        <p:nvSpPr>
-          <p:cNvPr id="19" name=""/>
-          <p:cNvSpPr txBox="1"/>
-          <p:nvPr/>
-        </p:nvSpPr>
-        <p:spPr>
-          <a:xfrm>
-            <a:off x="3381375" y="5591175"/>
-            <a:ext cx="5295900" cy="381000"/>
-          </a:xfrm>
-          <a:prstGeom prst="rect">
-            <a:avLst/>
-          </a:prstGeom>
-          <a:noFill/>
-          <a:ln/>
-        </p:spPr>
-        <p:txBody>
-          <a:bodyPr wrap="square" lIns="0" tIns="0" rIns="0" bIns="0" anchor="ctr"/>
-          <a:lstStyle/>
-          <a:p>
-            <a:pPr/>
-            <a:r>
-              <a:rPr sz="2100" b="1">
-                <a:solidFill>
-                  <a:srgbClr val="1C2340"/>
-                </a:solidFill>
-                <a:latin typeface="Noto Sans JP"/>
-                <a:ea typeface="Noto Sans JP"/>
-              </a:rPr>
-              <a:t>どっち？ 声に出して答えてみよう！</a:t>
+              <a:t>3</a:t>
+            </a:r>
+          </a:p>
+        </p:txBody>
+      </p:sp>
+      <p:pic>
+        <p:nvPicPr>
+          <p:cNvPr id="21" name="Image 2" descr="鳥居">    </p:cNvPr>
+          <p:cNvPicPr>
+            <a:picLocks noChangeAspect="1"/>
+          </p:cNvPicPr>
+          <p:nvPr/>
+        </p:nvPicPr>
+        <p:blipFill>
+          <a:blip r:embed="rId3"/>
+          <a:stretch>
+            <a:fillRect/>
+          </a:stretch>
+        </p:blipFill>
+        <p:spPr>
+          <a:xfrm>
+            <a:off x="8267700" y="2543175"/>
+            <a:ext cx="952500" cy="952500"/>
+          </a:xfrm>
+          <a:prstGeom prst="rect">
+            <a:avLst/>
+          </a:prstGeom>
+        </p:spPr>
+      </p:pic>
+      <p:sp>
+        <p:nvSpPr>
+          <p:cNvPr id="22" name=""/>
+          <p:cNvSpPr txBox="1"/>
+          <p:nvPr/>
+        </p:nvSpPr>
+        <p:spPr>
+          <a:xfrm>
+            <a:off x="9372600" y="2705100"/>
+            <a:ext cx="1438275" cy="342900"/>
+          </a:xfrm>
+          <a:prstGeom prst="rect">
+            <a:avLst/>
+          </a:prstGeom>
+          <a:noFill/>
+          <a:ln/>
+        </p:spPr>
+        <p:txBody>
+          <a:bodyPr wrap="square" lIns="0" tIns="0" rIns="0" bIns="0" anchor="ctr"/>
+          <a:lstStyle/>
+          <a:p>
+            <a:pPr/>
+            <a:r>
+              <a:rPr sz="1900" b="1">
+                <a:solidFill>
+                  <a:srgbClr val="1C2340"/>
+                </a:solidFill>
+                <a:latin typeface="Noto Sans JP"/>
+                <a:ea typeface="Noto Sans JP"/>
+              </a:rPr>
+              <a:t>固有名詞</a:t>
+            </a:r>
+          </a:p>
+        </p:txBody>
+      </p:sp>
+      <p:sp>
+        <p:nvSpPr>
+          <p:cNvPr id="23" name=""/>
+          <p:cNvSpPr txBox="1"/>
+          <p:nvPr/>
+        </p:nvSpPr>
+        <p:spPr>
+          <a:xfrm>
+            <a:off x="9372600" y="3057525"/>
+            <a:ext cx="952500" cy="247650"/>
+          </a:xfrm>
+          <a:prstGeom prst="rect">
+            <a:avLst/>
+          </a:prstGeom>
+          <a:noFill/>
+          <a:ln/>
+        </p:spPr>
+        <p:txBody>
+          <a:bodyPr wrap="square" lIns="0" tIns="0" rIns="0" bIns="0" anchor="ctr"/>
+          <a:lstStyle/>
+          <a:p>
+            <a:pPr/>
+            <a:r>
+              <a:rPr sz="1500" b="1">
+                <a:solidFill>
+                  <a:srgbClr val="4A5270"/>
+                </a:solidFill>
+                <a:latin typeface="DM Sans"/>
+                <a:ea typeface="DM Sans"/>
+              </a:rPr>
+              <a:t>Kyoto</a:t>
+            </a:r>
+          </a:p>
+        </p:txBody>
+      </p:sp>
+      <p:sp>
+        <p:nvSpPr>
+          <p:cNvPr id="24" name=""/>
+          <p:cNvSpPr/>
+          <p:nvPr/>
+        </p:nvSpPr>
+        <p:spPr>
+          <a:xfrm>
+            <a:off x="685800" y="4257675"/>
+            <a:ext cx="3505200" cy="2181225"/>
+          </a:xfrm>
+          <a:prstGeom prst="roundRect">
+            <a:avLst>
+              <a:gd name="adj" fmla="val 12227"/>
+            </a:avLst>
+          </a:prstGeom>
+          <a:solidFill>
+            <a:srgbClr val="FFFFFF"/>
+          </a:solidFill>
+          <a:ln/>
+          <a:effectLst>
+            <a:outerShdw sx="100000" sy="100000" kx="0" ky="0" algn="bl" rotWithShape="0" blurRad="152400" dist="50800" dir="5400000">
+              <a:srgbClr val="22304A">
+                <a:alpha val="10000"/>
+              </a:srgbClr>
+            </a:outerShdw>
+          </a:effectLst>
+        </p:spPr>
+      </p:sp>
+      <p:sp>
+        <p:nvSpPr>
+          <p:cNvPr id="25" name=""/>
+          <p:cNvSpPr/>
+          <p:nvPr/>
+        </p:nvSpPr>
+        <p:spPr>
+          <a:xfrm>
+            <a:off x="819150" y="4391025"/>
+            <a:ext cx="323850" cy="323850"/>
+          </a:xfrm>
+          <a:prstGeom prst="ellipse">
+            <a:avLst/>
+          </a:prstGeom>
+          <a:solidFill>
+            <a:srgbClr val="E8461E"/>
+          </a:solidFill>
+          <a:ln/>
+        </p:spPr>
+      </p:sp>
+      <p:sp>
+        <p:nvSpPr>
+          <p:cNvPr id="26" name=""/>
+          <p:cNvSpPr txBox="1"/>
+          <p:nvPr/>
+        </p:nvSpPr>
+        <p:spPr>
+          <a:xfrm>
+            <a:off x="752475" y="4448175"/>
+            <a:ext cx="466725" cy="209550"/>
+          </a:xfrm>
+          <a:prstGeom prst="rect">
+            <a:avLst/>
+          </a:prstGeom>
+          <a:noFill/>
+          <a:ln/>
+        </p:spPr>
+        <p:txBody>
+          <a:bodyPr wrap="square" lIns="0" tIns="0" rIns="0" bIns="0" anchor="ctr"/>
+          <a:lstStyle/>
+          <a:p>
+            <a:pPr algn="ctr"/>
+            <a:r>
+              <a:rPr sz="1300" b="1">
+                <a:solidFill>
+                  <a:srgbClr val="FFFFFF"/>
+                </a:solidFill>
+                <a:latin typeface="DM Sans"/>
+                <a:ea typeface="DM Sans"/>
+              </a:rPr>
+              <a:t>4</a:t>
+            </a:r>
+          </a:p>
+        </p:txBody>
+      </p:sp>
+      <p:pic>
+        <p:nvPicPr>
+          <p:cNvPr id="27" name="Image 3" descr="英語">    </p:cNvPr>
+          <p:cNvPicPr>
+            <a:picLocks noChangeAspect="1"/>
+          </p:cNvPicPr>
+          <p:nvPr/>
+        </p:nvPicPr>
+        <p:blipFill>
+          <a:blip r:embed="rId4"/>
+          <a:stretch>
+            <a:fillRect/>
+          </a:stretch>
+        </p:blipFill>
+        <p:spPr>
+          <a:xfrm>
+            <a:off x="952500" y="4876800"/>
+            <a:ext cx="952500" cy="952500"/>
+          </a:xfrm>
+          <a:prstGeom prst="rect">
+            <a:avLst/>
+          </a:prstGeom>
+        </p:spPr>
+      </p:pic>
+      <p:sp>
+        <p:nvSpPr>
+          <p:cNvPr id="28" name=""/>
+          <p:cNvSpPr txBox="1"/>
+          <p:nvPr/>
+        </p:nvSpPr>
+        <p:spPr>
+          <a:xfrm>
+            <a:off x="2057400" y="5038725"/>
+            <a:ext cx="895350" cy="342900"/>
+          </a:xfrm>
+          <a:prstGeom prst="rect">
+            <a:avLst/>
+          </a:prstGeom>
+          <a:noFill/>
+          <a:ln/>
+        </p:spPr>
+        <p:txBody>
+          <a:bodyPr wrap="square" lIns="0" tIns="0" rIns="0" bIns="0" anchor="ctr"/>
+          <a:lstStyle/>
+          <a:p>
+            <a:pPr/>
+            <a:r>
+              <a:rPr sz="1900" b="1">
+                <a:solidFill>
+                  <a:srgbClr val="1C2340"/>
+                </a:solidFill>
+                <a:latin typeface="Noto Sans JP"/>
+                <a:ea typeface="Noto Sans JP"/>
+              </a:rPr>
+              <a:t>言語</a:t>
+            </a:r>
+          </a:p>
+        </p:txBody>
+      </p:sp>
+      <p:sp>
+        <p:nvSpPr>
+          <p:cNvPr id="29" name=""/>
+          <p:cNvSpPr txBox="1"/>
+          <p:nvPr/>
+        </p:nvSpPr>
+        <p:spPr>
+          <a:xfrm>
+            <a:off x="2057400" y="5391150"/>
+            <a:ext cx="1095375" cy="247650"/>
+          </a:xfrm>
+          <a:prstGeom prst="rect">
+            <a:avLst/>
+          </a:prstGeom>
+          <a:noFill/>
+          <a:ln/>
+        </p:spPr>
+        <p:txBody>
+          <a:bodyPr wrap="square" lIns="0" tIns="0" rIns="0" bIns="0" anchor="ctr"/>
+          <a:lstStyle/>
+          <a:p>
+            <a:pPr/>
+            <a:r>
+              <a:rPr sz="1500" b="1">
+                <a:solidFill>
+                  <a:srgbClr val="4A5270"/>
+                </a:solidFill>
+                <a:latin typeface="DM Sans"/>
+                <a:ea typeface="DM Sans"/>
+              </a:rPr>
+              <a:t>English</a:t>
+            </a:r>
+          </a:p>
+        </p:txBody>
+      </p:sp>
+      <p:sp>
+        <p:nvSpPr>
+          <p:cNvPr id="30" name=""/>
+          <p:cNvSpPr/>
+          <p:nvPr/>
+        </p:nvSpPr>
+        <p:spPr>
+          <a:xfrm>
+            <a:off x="4343400" y="4257675"/>
+            <a:ext cx="3505200" cy="2181225"/>
+          </a:xfrm>
+          <a:prstGeom prst="roundRect">
+            <a:avLst>
+              <a:gd name="adj" fmla="val 12227"/>
+            </a:avLst>
+          </a:prstGeom>
+          <a:solidFill>
+            <a:srgbClr val="FFFFFF"/>
+          </a:solidFill>
+          <a:ln/>
+          <a:effectLst>
+            <a:outerShdw sx="100000" sy="100000" kx="0" ky="0" algn="bl" rotWithShape="0" blurRad="152400" dist="50800" dir="5400000">
+              <a:srgbClr val="22304A">
+                <a:alpha val="10000"/>
+              </a:srgbClr>
+            </a:outerShdw>
+          </a:effectLst>
+        </p:spPr>
+      </p:sp>
+      <p:sp>
+        <p:nvSpPr>
+          <p:cNvPr id="31" name=""/>
+          <p:cNvSpPr/>
+          <p:nvPr/>
+        </p:nvSpPr>
+        <p:spPr>
+          <a:xfrm>
+            <a:off x="4476750" y="4391025"/>
+            <a:ext cx="323850" cy="323850"/>
+          </a:xfrm>
+          <a:prstGeom prst="ellipse">
+            <a:avLst/>
+          </a:prstGeom>
+          <a:solidFill>
+            <a:srgbClr val="E8461E"/>
+          </a:solidFill>
+          <a:ln/>
+        </p:spPr>
+      </p:sp>
+      <p:sp>
+        <p:nvSpPr>
+          <p:cNvPr id="32" name=""/>
+          <p:cNvSpPr txBox="1"/>
+          <p:nvPr/>
+        </p:nvSpPr>
+        <p:spPr>
+          <a:xfrm>
+            <a:off x="4410075" y="4448175"/>
+            <a:ext cx="466725" cy="209550"/>
+          </a:xfrm>
+          <a:prstGeom prst="rect">
+            <a:avLst/>
+          </a:prstGeom>
+          <a:noFill/>
+          <a:ln/>
+        </p:spPr>
+        <p:txBody>
+          <a:bodyPr wrap="square" lIns="0" tIns="0" rIns="0" bIns="0" anchor="ctr"/>
+          <a:lstStyle/>
+          <a:p>
+            <a:pPr algn="ctr"/>
+            <a:r>
+              <a:rPr sz="1300" b="1">
+                <a:solidFill>
+                  <a:srgbClr val="FFFFFF"/>
+                </a:solidFill>
+                <a:latin typeface="DM Sans"/>
+                <a:ea typeface="DM Sans"/>
+              </a:rPr>
+              <a:t>5</a:t>
+            </a:r>
+          </a:p>
+        </p:txBody>
+      </p:sp>
+      <p:pic>
+        <p:nvPicPr>
+          <p:cNvPr id="33" name="Image 4" descr="朝食">    </p:cNvPr>
+          <p:cNvPicPr>
+            <a:picLocks noChangeAspect="1"/>
+          </p:cNvPicPr>
+          <p:nvPr/>
+        </p:nvPicPr>
+        <p:blipFill>
+          <a:blip r:embed="rId5"/>
+          <a:stretch>
+            <a:fillRect/>
+          </a:stretch>
+        </p:blipFill>
+        <p:spPr>
+          <a:xfrm>
+            <a:off x="4610100" y="4876800"/>
+            <a:ext cx="952500" cy="952500"/>
+          </a:xfrm>
+          <a:prstGeom prst="rect">
+            <a:avLst/>
+          </a:prstGeom>
+        </p:spPr>
+      </p:pic>
+      <p:sp>
+        <p:nvSpPr>
+          <p:cNvPr id="34" name=""/>
+          <p:cNvSpPr txBox="1"/>
+          <p:nvPr/>
+        </p:nvSpPr>
+        <p:spPr>
+          <a:xfrm>
+            <a:off x="5715000" y="5038725"/>
+            <a:ext cx="895350" cy="342900"/>
+          </a:xfrm>
+          <a:prstGeom prst="rect">
+            <a:avLst/>
+          </a:prstGeom>
+          <a:noFill/>
+          <a:ln/>
+        </p:spPr>
+        <p:txBody>
+          <a:bodyPr wrap="square" lIns="0" tIns="0" rIns="0" bIns="0" anchor="ctr"/>
+          <a:lstStyle/>
+          <a:p>
+            <a:pPr/>
+            <a:r>
+              <a:rPr sz="1900" b="1">
+                <a:solidFill>
+                  <a:srgbClr val="1C2340"/>
+                </a:solidFill>
+                <a:latin typeface="Noto Sans JP"/>
+                <a:ea typeface="Noto Sans JP"/>
+              </a:rPr>
+              <a:t>食事</a:t>
+            </a:r>
+          </a:p>
+        </p:txBody>
+      </p:sp>
+      <p:sp>
+        <p:nvSpPr>
+          <p:cNvPr id="35" name=""/>
+          <p:cNvSpPr txBox="1"/>
+          <p:nvPr/>
+        </p:nvSpPr>
+        <p:spPr>
+          <a:xfrm>
+            <a:off x="5715000" y="5391150"/>
+            <a:ext cx="1390650" cy="247650"/>
+          </a:xfrm>
+          <a:prstGeom prst="rect">
+            <a:avLst/>
+          </a:prstGeom>
+          <a:noFill/>
+          <a:ln/>
+        </p:spPr>
+        <p:txBody>
+          <a:bodyPr wrap="square" lIns="0" tIns="0" rIns="0" bIns="0" anchor="ctr"/>
+          <a:lstStyle/>
+          <a:p>
+            <a:pPr/>
+            <a:r>
+              <a:rPr sz="1500" b="1">
+                <a:solidFill>
+                  <a:srgbClr val="4A5270"/>
+                </a:solidFill>
+                <a:latin typeface="DM Sans"/>
+                <a:ea typeface="DM Sans"/>
+              </a:rPr>
+              <a:t>breakfast</a:t>
+            </a:r>
+          </a:p>
+        </p:txBody>
+      </p:sp>
+      <p:sp>
+        <p:nvSpPr>
+          <p:cNvPr id="36" name=""/>
+          <p:cNvSpPr/>
+          <p:nvPr/>
+        </p:nvSpPr>
+        <p:spPr>
+          <a:xfrm>
+            <a:off x="8001000" y="4257675"/>
+            <a:ext cx="3505200" cy="2181225"/>
+          </a:xfrm>
+          <a:prstGeom prst="roundRect">
+            <a:avLst>
+              <a:gd name="adj" fmla="val 12227"/>
+            </a:avLst>
+          </a:prstGeom>
+          <a:solidFill>
+            <a:srgbClr val="FFFFFF"/>
+          </a:solidFill>
+          <a:ln/>
+          <a:effectLst>
+            <a:outerShdw sx="100000" sy="100000" kx="0" ky="0" algn="bl" rotWithShape="0" blurRad="152400" dist="50800" dir="5400000">
+              <a:srgbClr val="22304A">
+                <a:alpha val="10000"/>
+              </a:srgbClr>
+            </a:outerShdw>
+          </a:effectLst>
+        </p:spPr>
+      </p:sp>
+      <p:sp>
+        <p:nvSpPr>
+          <p:cNvPr id="37" name=""/>
+          <p:cNvSpPr/>
+          <p:nvPr/>
+        </p:nvSpPr>
+        <p:spPr>
+          <a:xfrm>
+            <a:off x="8134350" y="4391025"/>
+            <a:ext cx="323850" cy="323850"/>
+          </a:xfrm>
+          <a:prstGeom prst="ellipse">
+            <a:avLst/>
+          </a:prstGeom>
+          <a:solidFill>
+            <a:srgbClr val="E8461E"/>
+          </a:solidFill>
+          <a:ln/>
+        </p:spPr>
+      </p:sp>
+      <p:sp>
+        <p:nvSpPr>
+          <p:cNvPr id="38" name=""/>
+          <p:cNvSpPr txBox="1"/>
+          <p:nvPr/>
+        </p:nvSpPr>
+        <p:spPr>
+          <a:xfrm>
+            <a:off x="8067675" y="4448175"/>
+            <a:ext cx="466725" cy="209550"/>
+          </a:xfrm>
+          <a:prstGeom prst="rect">
+            <a:avLst/>
+          </a:prstGeom>
+          <a:noFill/>
+          <a:ln/>
+        </p:spPr>
+        <p:txBody>
+          <a:bodyPr wrap="square" lIns="0" tIns="0" rIns="0" bIns="0" anchor="ctr"/>
+          <a:lstStyle/>
+          <a:p>
+            <a:pPr algn="ctr"/>
+            <a:r>
+              <a:rPr sz="1300" b="1">
+                <a:solidFill>
+                  <a:srgbClr val="FFFFFF"/>
+                </a:solidFill>
+                <a:latin typeface="DM Sans"/>
+                <a:ea typeface="DM Sans"/>
+              </a:rPr>
+              <a:t>6</a:t>
+            </a:r>
+          </a:p>
+        </p:txBody>
+      </p:sp>
+      <p:pic>
+        <p:nvPicPr>
+          <p:cNvPr id="39" name="Image 5" descr="ハロウィン">    </p:cNvPr>
+          <p:cNvPicPr>
+            <a:picLocks noChangeAspect="1"/>
+          </p:cNvPicPr>
+          <p:nvPr/>
+        </p:nvPicPr>
+        <p:blipFill>
+          <a:blip r:embed="rId6"/>
+          <a:stretch>
+            <a:fillRect/>
+          </a:stretch>
+        </p:blipFill>
+        <p:spPr>
+          <a:xfrm>
+            <a:off x="8267700" y="4876800"/>
+            <a:ext cx="952500" cy="952500"/>
+          </a:xfrm>
+          <a:prstGeom prst="rect">
+            <a:avLst/>
+          </a:prstGeom>
+        </p:spPr>
+      </p:pic>
+      <p:sp>
+        <p:nvSpPr>
+          <p:cNvPr id="40" name=""/>
+          <p:cNvSpPr txBox="1"/>
+          <p:nvPr/>
+        </p:nvSpPr>
+        <p:spPr>
+          <a:xfrm>
+            <a:off x="9372600" y="5038725"/>
+            <a:ext cx="2257425" cy="342900"/>
+          </a:xfrm>
+          <a:prstGeom prst="rect">
+            <a:avLst/>
+          </a:prstGeom>
+          <a:noFill/>
+          <a:ln/>
+        </p:spPr>
+        <p:txBody>
+          <a:bodyPr wrap="square" lIns="0" tIns="0" rIns="0" bIns="0" anchor="ctr"/>
+          <a:lstStyle/>
+          <a:p>
+            <a:pPr/>
+            <a:r>
+              <a:rPr sz="1900" b="1">
+                <a:solidFill>
+                  <a:srgbClr val="1C2340"/>
+                </a:solidFill>
+                <a:latin typeface="Noto Sans JP"/>
+                <a:ea typeface="Noto Sans JP"/>
+              </a:rPr>
+              <a:t>祝日・ホリデー</a:t>
+            </a:r>
+          </a:p>
+        </p:txBody>
+      </p:sp>
+      <p:sp>
+        <p:nvSpPr>
+          <p:cNvPr id="41" name=""/>
+          <p:cNvSpPr txBox="1"/>
+          <p:nvPr/>
+        </p:nvSpPr>
+        <p:spPr>
+          <a:xfrm>
+            <a:off x="9372600" y="5391150"/>
+            <a:ext cx="1438275" cy="247650"/>
+          </a:xfrm>
+          <a:prstGeom prst="rect">
+            <a:avLst/>
+          </a:prstGeom>
+          <a:noFill/>
+          <a:ln/>
+        </p:spPr>
+        <p:txBody>
+          <a:bodyPr wrap="square" lIns="0" tIns="0" rIns="0" bIns="0" anchor="ctr"/>
+          <a:lstStyle/>
+          <a:p>
+            <a:pPr/>
+            <a:r>
+              <a:rPr sz="1500" b="1">
+                <a:solidFill>
+                  <a:srgbClr val="4A5270"/>
+                </a:solidFill>
+                <a:latin typeface="DM Sans"/>
+                <a:ea typeface="DM Sans"/>
+              </a:rPr>
+              <a:t>Halloween</a:t>
             </a:r>
           </a:p>
         </p:txBody>
@@ -9648,7 +10201,7 @@
         <p:spPr>
           <a:xfrm>
             <a:off x="685800" y="981075"/>
-            <a:ext cx="2162175" cy="200025"/>
+            <a:ext cx="2143125" cy="200025"/>
           </a:xfrm>
           <a:prstGeom prst="rect">
             <a:avLst/>
@@ -9669,7 +10222,7 @@
                 <a:latin typeface="DM Sans"/>
                 <a:ea typeface="DM Sans"/>
               </a:rPr>
-              <a:t>QUIZ </a:t>
+              <a:t>NO ARTICLE </a:t>
             </a:r>
             <a:pPr/>
             <a:r>
@@ -9691,7 +10244,7 @@
                 <a:latin typeface="DM Sans"/>
                 <a:ea typeface="DM Sans"/>
               </a:rPr>
-              <a:t> ANSWER</a:t>
+              <a:t> 1</a:t>
             </a:r>
           </a:p>
         </p:txBody>
@@ -9705,7 +10258,7 @@
         <p:spPr>
           <a:xfrm>
             <a:off x="685800" y="1200150"/>
-            <a:ext cx="7477125" cy="619125"/>
+            <a:ext cx="8601075" cy="609600"/>
           </a:xfrm>
           <a:prstGeom prst="rect">
             <a:avLst/>
@@ -9726,51 +10279,7 @@
                 <a:latin typeface="Noto Sans JP"/>
                 <a:ea typeface="Noto Sans JP"/>
               </a:rPr>
-              <a:t>（ ）に入るのは </a:t>
-            </a:r>
-            <a:pPr/>
-            <a:r>
-              <a:rPr sz="3300" b="1">
-                <a:solidFill>
-                  <a:srgbClr val="E8461E"/>
-                </a:solidFill>
-                <a:latin typeface="DM Sans"/>
-                <a:ea typeface="DM Sans"/>
-              </a:rPr>
-              <a:t>a / an</a:t>
-            </a:r>
-            <a:pPr/>
-            <a:r>
-              <a:rPr sz="3300" b="1">
-                <a:solidFill>
-                  <a:srgbClr val="1C2340"/>
-                </a:solidFill>
-                <a:latin typeface="Noto Sans JP"/>
-                <a:ea typeface="Noto Sans JP"/>
-              </a:rPr>
-              <a:t>？ </a:t>
-            </a:r>
-            <a:pPr/>
-            <a:r>
-              <a:rPr sz="3300" b="1">
-                <a:solidFill>
-                  <a:srgbClr val="2F86CF"/>
-                </a:solidFill>
-                <a:latin typeface="DM Sans"/>
-                <a:ea typeface="DM Sans"/>
-              </a:rPr>
-              <a:t>the</a:t>
-            </a:r>
-            <a:pPr/>
-            <a:r>
-              <a:rPr sz="3300" b="1">
-                <a:solidFill>
-                  <a:srgbClr val="1C2340"/>
-                </a:solidFill>
-                <a:latin typeface="Noto Sans JP"/>
-                <a:ea typeface="Noto Sans JP"/>
-              </a:rPr>
-              <a:t>？</a:t>
+              <a:t>1. 複数名詞のときは、冠詞をつけない</a:t>
             </a:r>
           </a:p>
         </p:txBody>
@@ -9783,12 +10292,576 @@
         </p:nvSpPr>
         <p:spPr>
           <a:xfrm>
-            <a:off x="685800" y="2028825"/>
-            <a:ext cx="10820400" cy="2857500"/>
+            <a:off x="685800" y="1990725"/>
+            <a:ext cx="5286375" cy="3524250"/>
           </a:xfrm>
           <a:prstGeom prst="roundRect">
             <a:avLst>
-              <a:gd name="adj" fmla="val 9333"/>
+              <a:gd name="adj" fmla="val 7568"/>
+            </a:avLst>
+          </a:prstGeom>
+          <a:solidFill>
+            <a:srgbClr val="FFE8DC"/>
+          </a:solidFill>
+          <a:ln/>
+        </p:spPr>
+      </p:sp>
+      <p:sp>
+        <p:nvSpPr>
+          <p:cNvPr id="7" name=""/>
+          <p:cNvSpPr/>
+          <p:nvPr/>
+        </p:nvSpPr>
+        <p:spPr>
+          <a:xfrm>
+            <a:off x="971550" y="2200275"/>
+            <a:ext cx="619125" cy="371475"/>
+          </a:xfrm>
+          <a:prstGeom prst="roundRect">
+            <a:avLst>
+              <a:gd name="adj" fmla="val 50000"/>
+            </a:avLst>
+          </a:prstGeom>
+          <a:solidFill>
+            <a:srgbClr val="FFE3D8"/>
+          </a:solidFill>
+          <a:ln/>
+        </p:spPr>
+      </p:sp>
+      <p:sp>
+        <p:nvSpPr>
+          <p:cNvPr id="8" name=""/>
+          <p:cNvSpPr txBox="1"/>
+          <p:nvPr/>
+        </p:nvSpPr>
+        <p:spPr>
+          <a:xfrm>
+            <a:off x="1143000" y="2257425"/>
+            <a:ext cx="657225" cy="247650"/>
+          </a:xfrm>
+          <a:prstGeom prst="rect">
+            <a:avLst/>
+          </a:prstGeom>
+          <a:noFill/>
+          <a:ln/>
+        </p:spPr>
+        <p:txBody>
+          <a:bodyPr wrap="square" lIns="0" tIns="0" rIns="0" bIns="0" anchor="ctr"/>
+          <a:lstStyle/>
+          <a:p>
+            <a:pPr/>
+            <a:r>
+              <a:rPr sz="1350" b="1">
+                <a:solidFill>
+                  <a:srgbClr val="C8401A"/>
+                </a:solidFill>
+                <a:latin typeface="Noto Sans JP"/>
+                <a:ea typeface="Noto Sans JP"/>
+              </a:rPr>
+              <a:t>1つ</a:t>
+            </a:r>
+          </a:p>
+        </p:txBody>
+      </p:sp>
+      <p:pic>
+        <p:nvPicPr>
+          <p:cNvPr id="9" name="Image 0" descr="映画">    </p:cNvPr>
+          <p:cNvPicPr>
+            <a:picLocks noChangeAspect="1"/>
+          </p:cNvPicPr>
+          <p:nvPr/>
+        </p:nvPicPr>
+        <p:blipFill>
+          <a:blip r:embed="rId1"/>
+          <a:stretch>
+            <a:fillRect/>
+          </a:stretch>
+        </p:blipFill>
+        <p:spPr>
+          <a:xfrm>
+            <a:off x="2714625" y="2647950"/>
+            <a:ext cx="1238250" cy="1238250"/>
+          </a:xfrm>
+          <a:prstGeom prst="rect">
+            <a:avLst/>
+          </a:prstGeom>
+        </p:spPr>
+      </p:pic>
+      <p:sp>
+        <p:nvSpPr>
+          <p:cNvPr id="10" name=""/>
+          <p:cNvSpPr txBox="1"/>
+          <p:nvPr/>
+        </p:nvSpPr>
+        <p:spPr>
+          <a:xfrm>
+            <a:off x="971550" y="3962400"/>
+            <a:ext cx="4848225" cy="371475"/>
+          </a:xfrm>
+          <a:prstGeom prst="rect">
+            <a:avLst/>
+          </a:prstGeom>
+          <a:noFill/>
+          <a:ln/>
+        </p:spPr>
+        <p:txBody>
+          <a:bodyPr wrap="square" lIns="0" tIns="0" rIns="0" bIns="0" anchor="ctr"/>
+          <a:lstStyle/>
+          <a:p>
+            <a:pPr/>
+            <a:r>
+              <a:rPr sz="2250" b="1">
+                <a:solidFill>
+                  <a:srgbClr val="1C2340"/>
+                </a:solidFill>
+                <a:latin typeface="DM Sans"/>
+                <a:ea typeface="DM Sans"/>
+              </a:rPr>
+              <a:t>I watched </a:t>
+            </a:r>
+            <a:pPr/>
+            <a:r>
+              <a:rPr sz="2250" b="1">
+                <a:solidFill>
+                  <a:srgbClr val="E8461E"/>
+                </a:solidFill>
+                <a:latin typeface="DM Sans"/>
+                <a:ea typeface="DM Sans"/>
+              </a:rPr>
+              <a:t>a</a:t>
+            </a:r>
+            <a:pPr/>
+            <a:r>
+              <a:rPr sz="2250" b="1">
+                <a:solidFill>
+                  <a:srgbClr val="1C2340"/>
+                </a:solidFill>
+                <a:latin typeface="DM Sans"/>
+                <a:ea typeface="DM Sans"/>
+              </a:rPr>
+              <a:t> movie last night.</a:t>
+            </a:r>
+          </a:p>
+        </p:txBody>
+      </p:sp>
+      <p:sp>
+        <p:nvSpPr>
+          <p:cNvPr id="11" name=""/>
+          <p:cNvSpPr txBox="1"/>
+          <p:nvPr/>
+        </p:nvSpPr>
+        <p:spPr>
+          <a:xfrm>
+            <a:off x="971550" y="4410075"/>
+            <a:ext cx="3048000" cy="257175"/>
+          </a:xfrm>
+          <a:prstGeom prst="rect">
+            <a:avLst/>
+          </a:prstGeom>
+          <a:noFill/>
+          <a:ln/>
+        </p:spPr>
+        <p:txBody>
+          <a:bodyPr wrap="square" lIns="0" tIns="0" rIns="0" bIns="0" anchor="ctr"/>
+          <a:lstStyle/>
+          <a:p>
+            <a:pPr/>
+            <a:r>
+              <a:rPr sz="1450">
+                <a:solidFill>
+                  <a:srgbClr val="4A5270"/>
+                </a:solidFill>
+                <a:latin typeface="Noto Sans JP"/>
+                <a:ea typeface="Noto Sans JP"/>
+              </a:rPr>
+              <a:t>昨日の夜、映画を観ました。</a:t>
+            </a:r>
+          </a:p>
+        </p:txBody>
+      </p:sp>
+      <p:sp>
+        <p:nvSpPr>
+          <p:cNvPr id="12" name=""/>
+          <p:cNvSpPr/>
+          <p:nvPr/>
+        </p:nvSpPr>
+        <p:spPr>
+          <a:xfrm>
+            <a:off x="971550" y="4819650"/>
+            <a:ext cx="4714875" cy="485775"/>
+          </a:xfrm>
+          <a:prstGeom prst="roundRect">
+            <a:avLst>
+              <a:gd name="adj" fmla="val 27451"/>
+            </a:avLst>
+          </a:prstGeom>
+          <a:solidFill>
+            <a:srgbClr val="FFFFFF"/>
+          </a:solidFill>
+          <a:ln/>
+        </p:spPr>
+      </p:sp>
+      <p:sp>
+        <p:nvSpPr>
+          <p:cNvPr id="13" name=""/>
+          <p:cNvSpPr txBox="1"/>
+          <p:nvPr/>
+        </p:nvSpPr>
+        <p:spPr>
+          <a:xfrm>
+            <a:off x="1143000" y="4914900"/>
+            <a:ext cx="3600450" cy="295275"/>
+          </a:xfrm>
+          <a:prstGeom prst="rect">
+            <a:avLst/>
+          </a:prstGeom>
+          <a:noFill/>
+          <a:ln/>
+        </p:spPr>
+        <p:txBody>
+          <a:bodyPr wrap="square" lIns="0" tIns="0" rIns="0" bIns="0" anchor="ctr"/>
+          <a:lstStyle/>
+          <a:p>
+            <a:pPr/>
+            <a:r>
+              <a:rPr sz="1600" b="1">
+                <a:solidFill>
+                  <a:srgbClr val="1C2340"/>
+                </a:solidFill>
+                <a:latin typeface="Noto Sans JP"/>
+                <a:ea typeface="Noto Sans JP"/>
+              </a:rPr>
+              <a:t>「1つの映画」と分かる → </a:t>
+            </a:r>
+            <a:pPr/>
+            <a:r>
+              <a:rPr sz="1600" b="1">
+                <a:solidFill>
+                  <a:srgbClr val="E8461E"/>
+                </a:solidFill>
+                <a:latin typeface="DM Sans"/>
+                <a:ea typeface="DM Sans"/>
+              </a:rPr>
+              <a:t>a</a:t>
+            </a:r>
+          </a:p>
+        </p:txBody>
+      </p:sp>
+      <p:sp>
+        <p:nvSpPr>
+          <p:cNvPr id="14" name=""/>
+          <p:cNvSpPr/>
+          <p:nvPr/>
+        </p:nvSpPr>
+        <p:spPr>
+          <a:xfrm>
+            <a:off x="6219825" y="1990725"/>
+            <a:ext cx="5286375" cy="3524250"/>
+          </a:xfrm>
+          <a:prstGeom prst="roundRect">
+            <a:avLst>
+              <a:gd name="adj" fmla="val 7568"/>
+            </a:avLst>
+          </a:prstGeom>
+          <a:solidFill>
+            <a:srgbClr val="DDEFFC"/>
+          </a:solidFill>
+          <a:ln/>
+        </p:spPr>
+      </p:sp>
+      <p:sp>
+        <p:nvSpPr>
+          <p:cNvPr id="15" name=""/>
+          <p:cNvSpPr/>
+          <p:nvPr/>
+        </p:nvSpPr>
+        <p:spPr>
+          <a:xfrm>
+            <a:off x="6505575" y="2200275"/>
+            <a:ext cx="685800" cy="371475"/>
+          </a:xfrm>
+          <a:prstGeom prst="roundRect">
+            <a:avLst>
+              <a:gd name="adj" fmla="val 50000"/>
+            </a:avLst>
+          </a:prstGeom>
+          <a:solidFill>
+            <a:srgbClr val="DCEFFC"/>
+          </a:solidFill>
+          <a:ln/>
+        </p:spPr>
+      </p:sp>
+      <p:sp>
+        <p:nvSpPr>
+          <p:cNvPr id="16" name=""/>
+          <p:cNvSpPr txBox="1"/>
+          <p:nvPr/>
+        </p:nvSpPr>
+        <p:spPr>
+          <a:xfrm>
+            <a:off x="6677025" y="2257425"/>
+            <a:ext cx="733425" cy="247650"/>
+          </a:xfrm>
+          <a:prstGeom prst="rect">
+            <a:avLst/>
+          </a:prstGeom>
+          <a:noFill/>
+          <a:ln/>
+        </p:spPr>
+        <p:txBody>
+          <a:bodyPr wrap="square" lIns="0" tIns="0" rIns="0" bIns="0" anchor="ctr"/>
+          <a:lstStyle/>
+          <a:p>
+            <a:pPr/>
+            <a:r>
+              <a:rPr sz="1350" b="1">
+                <a:solidFill>
+                  <a:srgbClr val="1F6FB2"/>
+                </a:solidFill>
+                <a:latin typeface="Noto Sans JP"/>
+                <a:ea typeface="Noto Sans JP"/>
+              </a:rPr>
+              <a:t>複数</a:t>
+            </a:r>
+          </a:p>
+        </p:txBody>
+      </p:sp>
+      <p:pic>
+        <p:nvPicPr>
+          <p:cNvPr id="17" name="Image 1" descr="映画">    </p:cNvPr>
+          <p:cNvPicPr>
+            <a:picLocks noChangeAspect="1"/>
+          </p:cNvPicPr>
+          <p:nvPr/>
+        </p:nvPicPr>
+        <p:blipFill>
+          <a:blip r:embed="rId2"/>
+          <a:stretch>
+            <a:fillRect/>
+          </a:stretch>
+        </p:blipFill>
+        <p:spPr>
+          <a:xfrm>
+            <a:off x="7600950" y="2647950"/>
+            <a:ext cx="1238250" cy="1238250"/>
+          </a:xfrm>
+          <a:prstGeom prst="rect">
+            <a:avLst/>
+          </a:prstGeom>
+        </p:spPr>
+      </p:pic>
+      <p:pic>
+        <p:nvPicPr>
+          <p:cNvPr id="18" name="Image 2" descr="映画">    </p:cNvPr>
+          <p:cNvPicPr>
+            <a:picLocks noChangeAspect="1"/>
+          </p:cNvPicPr>
+          <p:nvPr/>
+        </p:nvPicPr>
+        <p:blipFill>
+          <a:blip r:embed="rId3"/>
+          <a:stretch>
+            <a:fillRect/>
+          </a:stretch>
+        </p:blipFill>
+        <p:spPr>
+          <a:xfrm>
+            <a:off x="8896350" y="2647950"/>
+            <a:ext cx="1238250" cy="1238250"/>
+          </a:xfrm>
+          <a:prstGeom prst="rect">
+            <a:avLst/>
+          </a:prstGeom>
+        </p:spPr>
+      </p:pic>
+      <p:sp>
+        <p:nvSpPr>
+          <p:cNvPr id="19" name=""/>
+          <p:cNvSpPr txBox="1"/>
+          <p:nvPr/>
+        </p:nvSpPr>
+        <p:spPr>
+          <a:xfrm>
+            <a:off x="6505575" y="3962400"/>
+            <a:ext cx="2343150" cy="371475"/>
+          </a:xfrm>
+          <a:prstGeom prst="rect">
+            <a:avLst/>
+          </a:prstGeom>
+          <a:noFill/>
+          <a:ln/>
+        </p:spPr>
+        <p:txBody>
+          <a:bodyPr wrap="square" lIns="0" tIns="0" rIns="0" bIns="0" anchor="ctr"/>
+          <a:lstStyle/>
+          <a:p>
+            <a:pPr/>
+            <a:r>
+              <a:rPr sz="2250" b="1">
+                <a:solidFill>
+                  <a:srgbClr val="1C2340"/>
+                </a:solidFill>
+                <a:latin typeface="DM Sans"/>
+                <a:ea typeface="DM Sans"/>
+              </a:rPr>
+              <a:t>I like </a:t>
+            </a:r>
+            <a:pPr/>
+            <a:r>
+              <a:rPr sz="2250" b="1">
+                <a:solidFill>
+                  <a:srgbClr val="1C2340"/>
+                </a:solidFill>
+                <a:highlight>
+                  <a:srgbClr val="FFD9C9"/>
+                </a:highlight>
+                <a:latin typeface="DM Sans"/>
+                <a:ea typeface="DM Sans"/>
+              </a:rPr>
+              <a:t>movies</a:t>
+            </a:r>
+            <a:pPr/>
+            <a:r>
+              <a:rPr sz="2250" b="1">
+                <a:solidFill>
+                  <a:srgbClr val="1C2340"/>
+                </a:solidFill>
+                <a:latin typeface="DM Sans"/>
+                <a:ea typeface="DM Sans"/>
+              </a:rPr>
+              <a:t>.</a:t>
+            </a:r>
+          </a:p>
+        </p:txBody>
+      </p:sp>
+      <p:sp>
+        <p:nvSpPr>
+          <p:cNvPr id="20" name=""/>
+          <p:cNvSpPr txBox="1"/>
+          <p:nvPr/>
+        </p:nvSpPr>
+        <p:spPr>
+          <a:xfrm>
+            <a:off x="6505575" y="4410075"/>
+            <a:ext cx="2400300" cy="257175"/>
+          </a:xfrm>
+          <a:prstGeom prst="rect">
+            <a:avLst/>
+          </a:prstGeom>
+          <a:noFill/>
+          <a:ln/>
+        </p:spPr>
+        <p:txBody>
+          <a:bodyPr wrap="square" lIns="0" tIns="0" rIns="0" bIns="0" anchor="ctr"/>
+          <a:lstStyle/>
+          <a:p>
+            <a:pPr/>
+            <a:r>
+              <a:rPr sz="1450">
+                <a:solidFill>
+                  <a:srgbClr val="4A5270"/>
+                </a:solidFill>
+                <a:latin typeface="Noto Sans JP"/>
+                <a:ea typeface="Noto Sans JP"/>
+              </a:rPr>
+              <a:t>私は映画が好きです。</a:t>
+            </a:r>
+          </a:p>
+        </p:txBody>
+      </p:sp>
+      <p:sp>
+        <p:nvSpPr>
+          <p:cNvPr id="21" name=""/>
+          <p:cNvSpPr/>
+          <p:nvPr/>
+        </p:nvSpPr>
+        <p:spPr>
+          <a:xfrm>
+            <a:off x="6505575" y="4819650"/>
+            <a:ext cx="4714875" cy="485775"/>
+          </a:xfrm>
+          <a:prstGeom prst="roundRect">
+            <a:avLst>
+              <a:gd name="adj" fmla="val 27451"/>
+            </a:avLst>
+          </a:prstGeom>
+          <a:solidFill>
+            <a:srgbClr val="FFFFFF"/>
+          </a:solidFill>
+          <a:ln/>
+        </p:spPr>
+      </p:sp>
+      <p:sp>
+        <p:nvSpPr>
+          <p:cNvPr id="22" name=""/>
+          <p:cNvSpPr txBox="1"/>
+          <p:nvPr/>
+        </p:nvSpPr>
+        <p:spPr>
+          <a:xfrm>
+            <a:off x="6677025" y="4914900"/>
+            <a:ext cx="3752850" cy="295275"/>
+          </a:xfrm>
+          <a:prstGeom prst="rect">
+            <a:avLst/>
+          </a:prstGeom>
+          <a:noFill/>
+          <a:ln/>
+        </p:spPr>
+        <p:txBody>
+          <a:bodyPr wrap="square" lIns="0" tIns="0" rIns="0" bIns="0" anchor="ctr"/>
+          <a:lstStyle/>
+          <a:p>
+            <a:pPr/>
+            <a:r>
+              <a:rPr sz="1600" b="1">
+                <a:solidFill>
+                  <a:srgbClr val="1C2340"/>
+                </a:solidFill>
+                <a:latin typeface="Noto Sans JP"/>
+                <a:ea typeface="Noto Sans JP"/>
+              </a:rPr>
+              <a:t>複数名詞 </a:t>
+            </a:r>
+            <a:pPr/>
+            <a:r>
+              <a:rPr sz="1600" b="1">
+                <a:solidFill>
+                  <a:srgbClr val="1C2340"/>
+                </a:solidFill>
+                <a:latin typeface="DM Sans"/>
+                <a:ea typeface="DM Sans"/>
+              </a:rPr>
+              <a:t>movies</a:t>
+            </a:r>
+            <a:pPr/>
+            <a:r>
+              <a:rPr sz="1600" b="1">
+                <a:solidFill>
+                  <a:srgbClr val="1C2340"/>
+                </a:solidFill>
+                <a:latin typeface="Noto Sans JP"/>
+                <a:ea typeface="Noto Sans JP"/>
+              </a:rPr>
+              <a:t> → 冠詞なし</a:t>
+            </a:r>
+          </a:p>
+        </p:txBody>
+      </p:sp>
+      <p:sp>
+        <p:nvSpPr>
+          <p:cNvPr id="23" name=""/>
+          <p:cNvSpPr/>
+          <p:nvPr/>
+        </p:nvSpPr>
+        <p:spPr>
+          <a:xfrm>
+            <a:off x="685800" y="5724525"/>
+            <a:ext cx="10820400" cy="714375"/>
+          </a:xfrm>
+          <a:prstGeom prst="roundRect">
+            <a:avLst>
+              <a:gd name="adj" fmla="val 26667"/>
             </a:avLst>
           </a:prstGeom>
           <a:solidFill>
@@ -9804,323 +10877,16 @@
           </a:effectLst>
         </p:spPr>
       </p:sp>
-      <p:pic>
-        <p:nvPicPr>
-          <p:cNvPr id="7" name="Image 0" descr="映画">    </p:cNvPr>
-          <p:cNvPicPr>
-            <a:picLocks noChangeAspect="1"/>
-          </p:cNvPicPr>
-          <p:nvPr/>
-        </p:nvPicPr>
-        <p:blipFill>
-          <a:blip r:embed="rId1"/>
-          <a:stretch>
-            <a:fillRect/>
-          </a:stretch>
-        </p:blipFill>
-        <p:spPr>
-          <a:xfrm>
-            <a:off x="971550" y="2505075"/>
-            <a:ext cx="1905000" cy="1905000"/>
-          </a:xfrm>
-          <a:prstGeom prst="rect">
-            <a:avLst/>
-          </a:prstGeom>
-        </p:spPr>
-      </p:pic>
-      <p:sp>
-        <p:nvSpPr>
-          <p:cNvPr id="8" name=""/>
-          <p:cNvSpPr txBox="1"/>
-          <p:nvPr/>
-        </p:nvSpPr>
-        <p:spPr>
-          <a:xfrm>
-            <a:off x="3162300" y="2667000"/>
-            <a:ext cx="2743200" cy="571500"/>
-          </a:xfrm>
-          <a:prstGeom prst="rect">
-            <a:avLst/>
-          </a:prstGeom>
-          <a:noFill/>
-          <a:ln/>
-        </p:spPr>
-        <p:txBody>
-          <a:bodyPr wrap="square" lIns="0" tIns="0" rIns="0" bIns="0" anchor="ctr"/>
-          <a:lstStyle/>
-          <a:p>
-            <a:pPr/>
-            <a:r>
-              <a:rPr sz="3450" b="1">
-                <a:solidFill>
-                  <a:srgbClr val="1C2340"/>
-                </a:solidFill>
-                <a:latin typeface="DM Sans"/>
-                <a:ea typeface="DM Sans"/>
-              </a:rPr>
-              <a:t>I watched</a:t>
-            </a:r>
-          </a:p>
-        </p:txBody>
-      </p:sp>
-      <p:sp>
-        <p:nvSpPr>
-          <p:cNvPr id="9" name=""/>
+      <p:sp>
+        <p:nvSpPr>
+          <p:cNvPr id="24" name=""/>
           <p:cNvSpPr/>
           <p:nvPr/>
         </p:nvSpPr>
         <p:spPr>
           <a:xfrm>
-            <a:off x="5400675" y="2590800"/>
-            <a:ext cx="1333500" cy="723900"/>
-          </a:xfrm>
-          <a:prstGeom prst="roundRect">
-            <a:avLst>
-              <a:gd name="adj" fmla="val 21053"/>
-            </a:avLst>
-          </a:prstGeom>
-          <a:solidFill>
-            <a:srgbClr val="E8461E"/>
-          </a:solidFill>
-          <a:ln/>
-        </p:spPr>
-      </p:sp>
-      <p:sp>
-        <p:nvSpPr>
-          <p:cNvPr id="10" name=""/>
-          <p:cNvSpPr txBox="1"/>
-          <p:nvPr/>
-        </p:nvSpPr>
-        <p:spPr>
-          <a:xfrm>
-            <a:off x="5753100" y="2676525"/>
-            <a:ext cx="628650" cy="552450"/>
-          </a:xfrm>
-          <a:prstGeom prst="rect">
-            <a:avLst/>
-          </a:prstGeom>
-          <a:noFill/>
-          <a:ln/>
-        </p:spPr>
-        <p:txBody>
-          <a:bodyPr wrap="square" lIns="0" tIns="0" rIns="0" bIns="0" anchor="ctr"/>
-          <a:lstStyle/>
-          <a:p>
-            <a:pPr algn="ctr"/>
-            <a:r>
-              <a:rPr sz="3300" b="1">
-                <a:solidFill>
-                  <a:srgbClr val="FFFFFF"/>
-                </a:solidFill>
-                <a:latin typeface="DM Sans"/>
-                <a:ea typeface="DM Sans"/>
-              </a:rPr>
-              <a:t>a</a:t>
-            </a:r>
-          </a:p>
-        </p:txBody>
-      </p:sp>
-      <p:sp>
-        <p:nvSpPr>
-          <p:cNvPr id="11" name=""/>
-          <p:cNvSpPr txBox="1"/>
-          <p:nvPr/>
-        </p:nvSpPr>
-        <p:spPr>
-          <a:xfrm>
-            <a:off x="6886575" y="2667000"/>
-            <a:ext cx="4371975" cy="571500"/>
-          </a:xfrm>
-          <a:prstGeom prst="rect">
-            <a:avLst/>
-          </a:prstGeom>
-          <a:noFill/>
-          <a:ln/>
-        </p:spPr>
-        <p:txBody>
-          <a:bodyPr wrap="square" lIns="0" tIns="0" rIns="0" bIns="0" anchor="ctr"/>
-          <a:lstStyle/>
-          <a:p>
-            <a:pPr/>
-            <a:r>
-              <a:rPr sz="3450" b="1">
-                <a:solidFill>
-                  <a:srgbClr val="1C2340"/>
-                </a:solidFill>
-                <a:latin typeface="DM Sans"/>
-                <a:ea typeface="DM Sans"/>
-              </a:rPr>
-              <a:t>movie last night.</a:t>
-            </a:r>
-          </a:p>
-        </p:txBody>
-      </p:sp>
-      <p:sp>
-        <p:nvSpPr>
-          <p:cNvPr id="12" name=""/>
-          <p:cNvSpPr txBox="1"/>
-          <p:nvPr/>
-        </p:nvSpPr>
-        <p:spPr>
-          <a:xfrm>
-            <a:off x="3162300" y="3676650"/>
-            <a:ext cx="1781175" cy="571500"/>
-          </a:xfrm>
-          <a:prstGeom prst="rect">
-            <a:avLst/>
-          </a:prstGeom>
-          <a:noFill/>
-          <a:ln/>
-        </p:spPr>
-        <p:txBody>
-          <a:bodyPr wrap="square" lIns="0" tIns="0" rIns="0" bIns="0" anchor="ctr"/>
-          <a:lstStyle/>
-          <a:p>
-            <a:pPr/>
-            <a:r>
-              <a:rPr sz="3450" b="1">
-                <a:solidFill>
-                  <a:srgbClr val="1C2340"/>
-                </a:solidFill>
-                <a:latin typeface="DM Sans"/>
-                <a:ea typeface="DM Sans"/>
-              </a:rPr>
-              <a:t>I liked</a:t>
-            </a:r>
-          </a:p>
-        </p:txBody>
-      </p:sp>
-      <p:sp>
-        <p:nvSpPr>
-          <p:cNvPr id="13" name=""/>
-          <p:cNvSpPr/>
-          <p:nvPr/>
-        </p:nvSpPr>
-        <p:spPr>
-          <a:xfrm>
-            <a:off x="4562475" y="3600450"/>
-            <a:ext cx="1333500" cy="723900"/>
-          </a:xfrm>
-          <a:prstGeom prst="roundRect">
-            <a:avLst>
-              <a:gd name="adj" fmla="val 21053"/>
-            </a:avLst>
-          </a:prstGeom>
-          <a:solidFill>
-            <a:srgbClr val="2F86CF"/>
-          </a:solidFill>
-          <a:ln/>
-        </p:spPr>
-      </p:sp>
-      <p:sp>
-        <p:nvSpPr>
-          <p:cNvPr id="14" name=""/>
-          <p:cNvSpPr txBox="1"/>
-          <p:nvPr/>
-        </p:nvSpPr>
-        <p:spPr>
-          <a:xfrm>
-            <a:off x="4657725" y="3686175"/>
-            <a:ext cx="1143000" cy="552450"/>
-          </a:xfrm>
-          <a:prstGeom prst="rect">
-            <a:avLst/>
-          </a:prstGeom>
-          <a:noFill/>
-          <a:ln/>
-        </p:spPr>
-        <p:txBody>
-          <a:bodyPr wrap="square" lIns="0" tIns="0" rIns="0" bIns="0" anchor="ctr"/>
-          <a:lstStyle/>
-          <a:p>
-            <a:pPr algn="ctr"/>
-            <a:r>
-              <a:rPr sz="3300" b="1">
-                <a:solidFill>
-                  <a:srgbClr val="FFFFFF"/>
-                </a:solidFill>
-                <a:latin typeface="DM Sans"/>
-                <a:ea typeface="DM Sans"/>
-              </a:rPr>
-              <a:t>the</a:t>
-            </a:r>
-          </a:p>
-        </p:txBody>
-      </p:sp>
-      <p:sp>
-        <p:nvSpPr>
-          <p:cNvPr id="15" name=""/>
-          <p:cNvSpPr txBox="1"/>
-          <p:nvPr/>
-        </p:nvSpPr>
-        <p:spPr>
-          <a:xfrm>
-            <a:off x="6048375" y="3676650"/>
-            <a:ext cx="1962150" cy="571500"/>
-          </a:xfrm>
-          <a:prstGeom prst="rect">
-            <a:avLst/>
-          </a:prstGeom>
-          <a:noFill/>
-          <a:ln/>
-        </p:spPr>
-        <p:txBody>
-          <a:bodyPr wrap="square" lIns="0" tIns="0" rIns="0" bIns="0" anchor="ctr"/>
-          <a:lstStyle/>
-          <a:p>
-            <a:pPr/>
-            <a:r>
-              <a:rPr sz="3450" b="1">
-                <a:solidFill>
-                  <a:srgbClr val="1C2340"/>
-                </a:solidFill>
-                <a:latin typeface="DM Sans"/>
-                <a:ea typeface="DM Sans"/>
-              </a:rPr>
-              <a:t>movie.</a:t>
-            </a:r>
-          </a:p>
-        </p:txBody>
-      </p:sp>
-      <p:sp>
-        <p:nvSpPr>
-          <p:cNvPr id="16" name=""/>
-          <p:cNvSpPr/>
-          <p:nvPr/>
-        </p:nvSpPr>
-        <p:spPr>
-          <a:xfrm>
-            <a:off x="685800" y="5095875"/>
-            <a:ext cx="10820400" cy="1428750"/>
-          </a:xfrm>
-          <a:prstGeom prst="roundRect">
-            <a:avLst>
-              <a:gd name="adj" fmla="val 18667"/>
-            </a:avLst>
-          </a:prstGeom>
-          <a:solidFill>
-            <a:srgbClr val="FFFFFF"/>
-          </a:solidFill>
-          <a:ln/>
-          <a:effectLst>
-            <a:outerShdw sx="100000" sy="100000" kx="0" ky="0" algn="bl" rotWithShape="0" blurRad="152400" dist="50800" dir="5400000">
-              <a:srgbClr val="22304A">
-                <a:alpha val="10000"/>
-              </a:srgbClr>
-            </a:outerShdw>
-          </a:effectLst>
-        </p:spPr>
-      </p:sp>
-      <p:sp>
-        <p:nvSpPr>
-          <p:cNvPr id="17" name=""/>
-          <p:cNvSpPr/>
-          <p:nvPr/>
-        </p:nvSpPr>
-        <p:spPr>
-          <a:xfrm>
-            <a:off x="990600" y="5210175"/>
-            <a:ext cx="790575" cy="371475"/>
+            <a:off x="933450" y="5895975"/>
+            <a:ext cx="1028700" cy="371475"/>
           </a:xfrm>
           <a:prstGeom prst="roundRect">
             <a:avLst>
@@ -10135,14 +10901,14 @@
       </p:sp>
       <p:sp>
         <p:nvSpPr>
-          <p:cNvPr id="18" name=""/>
-          <p:cNvSpPr txBox="1"/>
-          <p:nvPr/>
-        </p:nvSpPr>
-        <p:spPr>
-          <a:xfrm>
-            <a:off x="1162050" y="5267325"/>
-            <a:ext cx="857250" cy="247650"/>
+          <p:cNvPr id="25" name=""/>
+          <p:cNvSpPr txBox="1"/>
+          <p:nvPr/>
+        </p:nvSpPr>
+        <p:spPr>
+          <a:xfrm>
+            <a:off x="1104900" y="5953125"/>
+            <a:ext cx="1133475" cy="247650"/>
           </a:xfrm>
           <a:prstGeom prst="rect">
             <a:avLst/>
@@ -10163,235 +10929,53 @@
                 <a:latin typeface="Noto Sans JP"/>
                 <a:ea typeface="Noto Sans JP"/>
               </a:rPr>
-              <a:t>1回目</a:t>
-            </a:r>
-          </a:p>
-        </p:txBody>
-      </p:sp>
-      <p:sp>
-        <p:nvSpPr>
-          <p:cNvPr id="19" name=""/>
-          <p:cNvSpPr txBox="1"/>
-          <p:nvPr/>
-        </p:nvSpPr>
-        <p:spPr>
-          <a:xfrm>
-            <a:off x="1914525" y="5229225"/>
-            <a:ext cx="6334125" cy="333375"/>
-          </a:xfrm>
-          <a:prstGeom prst="rect">
-            <a:avLst/>
-          </a:prstGeom>
-          <a:noFill/>
-          <a:ln/>
-        </p:spPr>
-        <p:txBody>
-          <a:bodyPr wrap="square" lIns="0" tIns="0" rIns="0" bIns="0" anchor="ctr"/>
-          <a:lstStyle/>
-          <a:p>
-            <a:pPr/>
-            <a:r>
-              <a:rPr sz="1800">
-                <a:solidFill>
-                  <a:srgbClr val="1C2340"/>
-                </a:solidFill>
-                <a:latin typeface="Noto Sans JP"/>
-                <a:ea typeface="Noto Sans JP"/>
-              </a:rPr>
-              <a:t>数えられる「1つの映画」と分かるので → </a:t>
-            </a:r>
-            <a:pPr/>
-            <a:r>
-              <a:rPr sz="1800" b="1">
+              <a:t>ポイント</a:t>
+            </a:r>
+          </a:p>
+        </p:txBody>
+      </p:sp>
+      <p:sp>
+        <p:nvSpPr>
+          <p:cNvPr id="26" name=""/>
+          <p:cNvSpPr txBox="1"/>
+          <p:nvPr/>
+        </p:nvSpPr>
+        <p:spPr>
+          <a:xfrm>
+            <a:off x="2114550" y="5924550"/>
+            <a:ext cx="5991225" cy="314325"/>
+          </a:xfrm>
+          <a:prstGeom prst="rect">
+            <a:avLst/>
+          </a:prstGeom>
+          <a:noFill/>
+          <a:ln/>
+        </p:spPr>
+        <p:txBody>
+          <a:bodyPr wrap="square" lIns="0" tIns="0" rIns="0" bIns="0" anchor="ctr"/>
+          <a:lstStyle/>
+          <a:p>
+            <a:pPr/>
+            <a:r>
+              <a:rPr sz="1650" b="1">
                 <a:solidFill>
                   <a:srgbClr val="E8461E"/>
                 </a:solidFill>
                 <a:latin typeface="DM Sans"/>
                 <a:ea typeface="DM Sans"/>
               </a:rPr>
-              <a:t>a</a:t>
-            </a:r>
-            <a:pPr/>
-            <a:r>
-              <a:rPr sz="1800">
-                <a:solidFill>
-                  <a:srgbClr val="1C2340"/>
-                </a:solidFill>
-                <a:latin typeface="Noto Sans JP"/>
-                <a:ea typeface="Noto Sans JP"/>
-              </a:rPr>
-              <a:t> </a:t>
-            </a:r>
-            <a:pPr/>
-            <a:r>
-              <a:rPr sz="1800" b="1">
-                <a:solidFill>
-                  <a:srgbClr val="1C2340"/>
-                </a:solidFill>
-                <a:latin typeface="DM Sans"/>
-                <a:ea typeface="DM Sans"/>
-              </a:rPr>
-              <a:t>movie</a:t>
-            </a:r>
-          </a:p>
-        </p:txBody>
-      </p:sp>
-      <p:sp>
-        <p:nvSpPr>
-          <p:cNvPr id="20" name=""/>
-          <p:cNvSpPr/>
-          <p:nvPr/>
-        </p:nvSpPr>
-        <p:spPr>
-          <a:xfrm>
-            <a:off x="990600" y="5676900"/>
-            <a:ext cx="790575" cy="371475"/>
-          </a:xfrm>
-          <a:prstGeom prst="roundRect">
-            <a:avLst>
-              <a:gd name="adj" fmla="val 50000"/>
-            </a:avLst>
-          </a:prstGeom>
-          <a:solidFill>
-            <a:srgbClr val="DCEFFC"/>
-          </a:solidFill>
-          <a:ln/>
-        </p:spPr>
-      </p:sp>
-      <p:sp>
-        <p:nvSpPr>
-          <p:cNvPr id="21" name=""/>
-          <p:cNvSpPr txBox="1"/>
-          <p:nvPr/>
-        </p:nvSpPr>
-        <p:spPr>
-          <a:xfrm>
-            <a:off x="1162050" y="5734050"/>
-            <a:ext cx="857250" cy="247650"/>
-          </a:xfrm>
-          <a:prstGeom prst="rect">
-            <a:avLst/>
-          </a:prstGeom>
-          <a:noFill/>
-          <a:ln/>
-        </p:spPr>
-        <p:txBody>
-          <a:bodyPr wrap="square" lIns="0" tIns="0" rIns="0" bIns="0" anchor="ctr"/>
-          <a:lstStyle/>
-          <a:p>
-            <a:pPr/>
-            <a:r>
-              <a:rPr sz="1350" b="1">
-                <a:solidFill>
-                  <a:srgbClr val="1F6FB2"/>
-                </a:solidFill>
-                <a:latin typeface="Noto Sans JP"/>
-                <a:ea typeface="Noto Sans JP"/>
-              </a:rPr>
-              <a:t>2回目</a:t>
-            </a:r>
-          </a:p>
-        </p:txBody>
-      </p:sp>
-      <p:sp>
-        <p:nvSpPr>
-          <p:cNvPr id="22" name=""/>
-          <p:cNvSpPr txBox="1"/>
-          <p:nvPr/>
-        </p:nvSpPr>
-        <p:spPr>
-          <a:xfrm>
-            <a:off x="1914525" y="5695950"/>
-            <a:ext cx="5676900" cy="333375"/>
-          </a:xfrm>
-          <a:prstGeom prst="rect">
-            <a:avLst/>
-          </a:prstGeom>
-          <a:noFill/>
-          <a:ln/>
-        </p:spPr>
-        <p:txBody>
-          <a:bodyPr wrap="square" lIns="0" tIns="0" rIns="0" bIns="0" anchor="ctr"/>
-          <a:lstStyle/>
-          <a:p>
-            <a:pPr/>
-            <a:r>
-              <a:rPr sz="1800">
-                <a:solidFill>
-                  <a:srgbClr val="1C2340"/>
-                </a:solidFill>
-                <a:latin typeface="Noto Sans JP"/>
-                <a:ea typeface="Noto Sans JP"/>
-              </a:rPr>
-              <a:t>「さっきの映画」と分かるので → </a:t>
-            </a:r>
-            <a:pPr/>
-            <a:r>
-              <a:rPr sz="1800" b="1">
-                <a:solidFill>
-                  <a:srgbClr val="2F86CF"/>
-                </a:solidFill>
-                <a:latin typeface="DM Sans"/>
-                <a:ea typeface="DM Sans"/>
-              </a:rPr>
-              <a:t>the</a:t>
-            </a:r>
-            <a:pPr/>
-            <a:r>
-              <a:rPr sz="1800">
-                <a:solidFill>
-                  <a:srgbClr val="1C2340"/>
-                </a:solidFill>
-                <a:latin typeface="Noto Sans JP"/>
-                <a:ea typeface="Noto Sans JP"/>
-              </a:rPr>
-              <a:t> </a:t>
-            </a:r>
-            <a:pPr/>
-            <a:r>
-              <a:rPr sz="1800" b="1">
-                <a:solidFill>
-                  <a:srgbClr val="1C2340"/>
-                </a:solidFill>
-                <a:latin typeface="DM Sans"/>
-                <a:ea typeface="DM Sans"/>
-              </a:rPr>
-              <a:t>movie</a:t>
-            </a:r>
-          </a:p>
-        </p:txBody>
-      </p:sp>
-      <p:sp>
-        <p:nvSpPr>
-          <p:cNvPr id="23" name=""/>
-          <p:cNvSpPr txBox="1"/>
-          <p:nvPr/>
-        </p:nvSpPr>
-        <p:spPr>
-          <a:xfrm>
-            <a:off x="990600" y="6162675"/>
-            <a:ext cx="5753100" cy="257175"/>
-          </a:xfrm>
-          <a:prstGeom prst="rect">
-            <a:avLst/>
-          </a:prstGeom>
-          <a:noFill/>
-          <a:ln/>
-        </p:spPr>
-        <p:txBody>
-          <a:bodyPr wrap="square" lIns="0" tIns="0" rIns="0" bIns="0" anchor="ctr"/>
-          <a:lstStyle/>
-          <a:p>
-            <a:pPr/>
-            <a:r>
-              <a:rPr sz="1450">
-                <a:solidFill>
-                  <a:srgbClr val="4A5270"/>
-                </a:solidFill>
-                <a:latin typeface="Noto Sans JP"/>
-                <a:ea typeface="Noto Sans JP"/>
-              </a:rPr>
-              <a:t>昨日の夜、映画を観ました。その映画が気に入りました。</a:t>
+              <a:t>a / an</a:t>
+            </a:r>
+            <a:pPr/>
+            <a:r>
+              <a:rPr sz="1650">
+                <a:solidFill>
+                  <a:srgbClr val="1C2340"/>
+                </a:solidFill>
+                <a:latin typeface="Noto Sans JP"/>
+                <a:ea typeface="Noto Sans JP"/>
+              </a:rPr>
+              <a:t> は「1つ」のときだけ。複数名詞にはつけない</a:t>
             </a:r>
           </a:p>
         </p:txBody>
@@ -11364,7 +11948,7 @@
         <p:spPr>
           <a:xfrm>
             <a:off x="685800" y="981075"/>
-            <a:ext cx="2143125" cy="200025"/>
+            <a:ext cx="3067050" cy="200025"/>
           </a:xfrm>
           <a:prstGeom prst="rect">
             <a:avLst/>
@@ -11407,7 +11991,29 @@
                 <a:latin typeface="DM Sans"/>
                 <a:ea typeface="DM Sans"/>
               </a:rPr>
-              <a:t> 1</a:t>
+              <a:t> 2 </a:t>
+            </a:r>
+            <a:pPr/>
+            <a:r>
+              <a:rPr sz="1200" b="1">
+                <a:solidFill>
+                  <a:srgbClr val="E8461E"/>
+                </a:solidFill>
+                <a:latin typeface="Noto Sans JP"/>
+                <a:ea typeface="Noto Sans JP"/>
+              </a:rPr>
+              <a:t>・</a:t>
+            </a:r>
+            <a:pPr/>
+            <a:r>
+              <a:rPr sz="1200" b="1">
+                <a:solidFill>
+                  <a:srgbClr val="E8461E"/>
+                </a:solidFill>
+                <a:latin typeface="DM Sans"/>
+                <a:ea typeface="DM Sans"/>
+              </a:rPr>
+              <a:t> QUIZ</a:t>
             </a:r>
           </a:p>
         </p:txBody>
@@ -11421,7 +12027,7 @@
         <p:spPr>
           <a:xfrm>
             <a:off x="685800" y="1200150"/>
-            <a:ext cx="8058150" cy="609600"/>
+            <a:ext cx="3714750" cy="609600"/>
           </a:xfrm>
           <a:prstGeom prst="rect">
             <a:avLst/>
@@ -11442,7 +12048,7 @@
                 <a:latin typeface="Noto Sans JP"/>
                 <a:ea typeface="Noto Sans JP"/>
               </a:rPr>
-              <a:t>複数名詞のときは、冠詞をつけない</a:t>
+              <a:t>英語で言うと？</a:t>
             </a:r>
           </a:p>
         </p:txBody>
@@ -11456,22 +12062,29 @@
         <p:spPr>
           <a:xfrm>
             <a:off x="685800" y="1990725"/>
-            <a:ext cx="5286375" cy="3524250"/>
+            <a:ext cx="10820400" cy="2857500"/>
           </a:xfrm>
           <a:prstGeom prst="roundRect">
             <a:avLst>
-              <a:gd name="adj" fmla="val 7568"/>
+              <a:gd name="adj" fmla="val 9333"/>
             </a:avLst>
           </a:prstGeom>
           <a:solidFill>
-            <a:srgbClr val="FFE8DC"/>
+            <a:srgbClr val="FFFFFF"/>
           </a:solidFill>
           <a:ln/>
+          <a:effectLst>
+            <a:outerShdw sx="100000" sy="100000" kx="0" ky="0" algn="bl" rotWithShape="0" blurRad="152400" dist="50800" dir="5400000">
+              <a:srgbClr val="22304A">
+                <a:alpha val="10000"/>
+              </a:srgbClr>
+            </a:outerShdw>
+          </a:effectLst>
         </p:spPr>
       </p:sp>
       <p:pic>
         <p:nvPicPr>
-          <p:cNvPr id="7" name="Image 0" descr="映画">    </p:cNvPr>
+          <p:cNvPr id="7" name="Image 0" descr="家具">    </p:cNvPr>
           <p:cNvPicPr>
             <a:picLocks noChangeAspect="1"/>
           </p:cNvPicPr>
@@ -11485,8 +12098,8 @@
         </p:blipFill>
         <p:spPr>
           <a:xfrm>
-            <a:off x="971550" y="2219325"/>
-            <a:ext cx="1066800" cy="1066800"/>
+            <a:off x="971550" y="2466975"/>
+            <a:ext cx="1905000" cy="1905000"/>
           </a:xfrm>
           <a:prstGeom prst="rect">
             <a:avLst/>
@@ -11501,40 +12114,29 @@
         </p:nvSpPr>
         <p:spPr>
           <a:xfrm>
-            <a:off x="2209800" y="2390775"/>
-            <a:ext cx="1828800" cy="447675"/>
-          </a:xfrm>
-          <a:prstGeom prst="rect">
-            <a:avLst/>
-          </a:prstGeom>
-          <a:noFill/>
-          <a:ln/>
-        </p:spPr>
-        <p:txBody>
-          <a:bodyPr wrap="square" lIns="0" tIns="0" rIns="0" bIns="0" anchor="ctr"/>
-          <a:lstStyle/>
-          <a:p>
-            <a:pPr/>
-            <a:r>
-              <a:rPr sz="2700" b="1">
-                <a:solidFill>
-                  <a:srgbClr val="E8461E"/>
-                </a:solidFill>
-                <a:latin typeface="DM Sans"/>
-                <a:ea typeface="DM Sans"/>
-              </a:rPr>
-              <a:t>a</a:t>
-            </a:r>
-            <a:pPr/>
-            <a:r>
-              <a:rPr sz="2700" b="1">
-                <a:solidFill>
-                  <a:srgbClr val="1C2340"/>
-                </a:solidFill>
-                <a:latin typeface="DM Sans"/>
-                <a:ea typeface="DM Sans"/>
-              </a:rPr>
-              <a:t> movie</a:t>
+            <a:off x="3162300" y="2667000"/>
+            <a:ext cx="5600700" cy="419100"/>
+          </a:xfrm>
+          <a:prstGeom prst="rect">
+            <a:avLst/>
+          </a:prstGeom>
+          <a:noFill/>
+          <a:ln/>
+        </p:spPr>
+        <p:txBody>
+          <a:bodyPr wrap="square" lIns="0" tIns="0" rIns="0" bIns="0" anchor="ctr"/>
+          <a:lstStyle/>
+          <a:p>
+            <a:pPr/>
+            <a:r>
+              <a:rPr sz="2250" b="1">
+                <a:solidFill>
+                  <a:srgbClr val="1C2340"/>
+                </a:solidFill>
+                <a:latin typeface="Noto Sans JP"/>
+                <a:ea typeface="Noto Sans JP"/>
+              </a:rPr>
+              <a:t>「オンラインで家具を買ったんだ」</a:t>
             </a:r>
           </a:p>
         </p:txBody>
@@ -11547,29 +12149,29 @@
         </p:nvSpPr>
         <p:spPr>
           <a:xfrm>
-            <a:off x="2209800" y="2867025"/>
-            <a:ext cx="1295400" cy="257175"/>
-          </a:xfrm>
-          <a:prstGeom prst="rect">
-            <a:avLst/>
-          </a:prstGeom>
-          <a:noFill/>
-          <a:ln/>
-        </p:spPr>
-        <p:txBody>
-          <a:bodyPr wrap="square" lIns="0" tIns="0" rIns="0" bIns="0" anchor="ctr"/>
-          <a:lstStyle/>
-          <a:p>
-            <a:pPr/>
-            <a:r>
-              <a:rPr sz="1450">
-                <a:solidFill>
-                  <a:srgbClr val="4A5270"/>
-                </a:solidFill>
-                <a:latin typeface="Noto Sans JP"/>
-                <a:ea typeface="Noto Sans JP"/>
-              </a:rPr>
-              <a:t>1本の映画</a:t>
+            <a:off x="3162300" y="3486150"/>
+            <a:ext cx="2362200" cy="571500"/>
+          </a:xfrm>
+          <a:prstGeom prst="rect">
+            <a:avLst/>
+          </a:prstGeom>
+          <a:noFill/>
+          <a:ln/>
+        </p:spPr>
+        <p:txBody>
+          <a:bodyPr wrap="square" lIns="0" tIns="0" rIns="0" bIns="0" anchor="ctr"/>
+          <a:lstStyle/>
+          <a:p>
+            <a:pPr/>
+            <a:r>
+              <a:rPr sz="3450" b="1">
+                <a:solidFill>
+                  <a:srgbClr val="1C2340"/>
+                </a:solidFill>
+                <a:latin typeface="DM Sans"/>
+                <a:ea typeface="DM Sans"/>
+              </a:rPr>
+              <a:t>I bought</a:t>
             </a:r>
           </a:p>
         </p:txBody>
@@ -11582,33 +12184,75 @@
         </p:nvSpPr>
         <p:spPr>
           <a:xfrm>
-            <a:off x="971550" y="3400425"/>
-            <a:ext cx="4714875" cy="857250"/>
+            <a:off x="5067300" y="3409950"/>
+            <a:ext cx="1333500" cy="723900"/>
           </a:xfrm>
           <a:prstGeom prst="roundRect">
             <a:avLst>
-              <a:gd name="adj" fmla="val 17778"/>
+              <a:gd name="adj" fmla="val 21053"/>
             </a:avLst>
           </a:prstGeom>
           <a:solidFill>
-            <a:srgbClr val="FFFFFF"/>
+            <a:srgbClr val="FFF8F5"/>
           </a:solidFill>
-          <a:ln/>
+          <a:ln w="28575">
+            <a:solidFill>
+              <a:srgbClr val="F3A88F"/>
+            </a:solidFill>
+            <a:prstDash val="dash"/>
+          </a:ln>
         </p:spPr>
       </p:sp>
       <p:sp>
         <p:nvSpPr>
           <p:cNvPr id="11" name=""/>
+          <p:cNvSpPr txBox="1"/>
+          <p:nvPr/>
+        </p:nvSpPr>
+        <p:spPr>
+          <a:xfrm>
+            <a:off x="6553200" y="3486150"/>
+            <a:ext cx="4257675" cy="571500"/>
+          </a:xfrm>
+          <a:prstGeom prst="rect">
+            <a:avLst/>
+          </a:prstGeom>
+          <a:noFill/>
+          <a:ln/>
+        </p:spPr>
+        <p:txBody>
+          <a:bodyPr wrap="square" lIns="0" tIns="0" rIns="0" bIns="0" anchor="ctr"/>
+          <a:lstStyle/>
+          <a:p>
+            <a:pPr/>
+            <a:r>
+              <a:rPr sz="3450" b="1">
+                <a:solidFill>
+                  <a:srgbClr val="1C2340"/>
+                </a:solidFill>
+                <a:latin typeface="DM Sans"/>
+                <a:ea typeface="DM Sans"/>
+              </a:rPr>
+              <a:t>furniture online.</a:t>
+            </a:r>
+          </a:p>
+        </p:txBody>
+      </p:sp>
+      <p:sp>
+        <p:nvSpPr>
+          <p:cNvPr id="12" name=""/>
           <p:cNvSpPr/>
           <p:nvPr/>
         </p:nvSpPr>
         <p:spPr>
           <a:xfrm>
-            <a:off x="1143000" y="3638550"/>
-            <a:ext cx="381000" cy="381000"/>
-          </a:xfrm>
-          <a:prstGeom prst="ellipse">
-            <a:avLst/>
+            <a:off x="685800" y="5314950"/>
+            <a:ext cx="914400" cy="914400"/>
+          </a:xfrm>
+          <a:prstGeom prst="roundRect">
+            <a:avLst>
+              <a:gd name="adj" fmla="val 22917"/>
+            </a:avLst>
           </a:prstGeom>
           <a:solidFill>
             <a:srgbClr val="E8461E"/>
@@ -11618,14 +12262,14 @@
       </p:sp>
       <p:sp>
         <p:nvSpPr>
-          <p:cNvPr id="12" name=""/>
-          <p:cNvSpPr txBox="1"/>
-          <p:nvPr/>
-        </p:nvSpPr>
-        <p:spPr>
-          <a:xfrm>
-            <a:off x="1095375" y="3676650"/>
-            <a:ext cx="485775" cy="304800"/>
+          <p:cNvPr id="13" name=""/>
+          <p:cNvSpPr txBox="1"/>
+          <p:nvPr/>
+        </p:nvSpPr>
+        <p:spPr>
+          <a:xfrm>
+            <a:off x="838200" y="5514975"/>
+            <a:ext cx="619125" cy="523875"/>
           </a:xfrm>
           <a:prstGeom prst="rect">
             <a:avLst/>
@@ -11639,296 +12283,33 @@
           <a:p>
             <a:pPr algn="ctr"/>
             <a:r>
-              <a:rPr sz="1650" b="1">
+              <a:rPr sz="3150" b="1">
                 <a:solidFill>
                   <a:srgbClr val="FFFFFF"/>
                 </a:solidFill>
-                <a:latin typeface="Noto Sans JP"/>
-                <a:ea typeface="Noto Sans JP"/>
-              </a:rPr>
-              <a:t>1</a:t>
-            </a:r>
-          </a:p>
-        </p:txBody>
-      </p:sp>
-      <p:sp>
-        <p:nvSpPr>
-          <p:cNvPr id="13" name=""/>
-          <p:cNvSpPr txBox="1"/>
-          <p:nvPr/>
-        </p:nvSpPr>
-        <p:spPr>
-          <a:xfrm>
-            <a:off x="1657350" y="3495675"/>
-            <a:ext cx="2990850" cy="333375"/>
-          </a:xfrm>
-          <a:prstGeom prst="rect">
-            <a:avLst/>
-          </a:prstGeom>
-          <a:noFill/>
-          <a:ln/>
-        </p:spPr>
-        <p:txBody>
-          <a:bodyPr wrap="square" lIns="0" tIns="0" rIns="0" bIns="0" anchor="ctr"/>
-          <a:lstStyle/>
-          <a:p>
-            <a:pPr/>
-            <a:r>
-              <a:rPr sz="2050" b="1">
-                <a:solidFill>
-                  <a:srgbClr val="1C2340"/>
-                </a:solidFill>
-                <a:latin typeface="DM Sans"/>
-                <a:ea typeface="DM Sans"/>
-              </a:rPr>
-              <a:t>I watched </a:t>
-            </a:r>
-            <a:pPr/>
-            <a:r>
-              <a:rPr sz="2050" b="1">
-                <a:solidFill>
-                  <a:srgbClr val="E8461E"/>
-                </a:solidFill>
                 <a:latin typeface="DM Sans"/>
                 <a:ea typeface="DM Sans"/>
               </a:rPr>
               <a:t>a</a:t>
             </a:r>
-            <a:pPr/>
-            <a:r>
-              <a:rPr sz="2050" b="1">
-                <a:solidFill>
-                  <a:srgbClr val="1C2340"/>
-                </a:solidFill>
-                <a:latin typeface="DM Sans"/>
-                <a:ea typeface="DM Sans"/>
-              </a:rPr>
-              <a:t> movie.</a:t>
-            </a:r>
           </a:p>
         </p:txBody>
       </p:sp>
       <p:sp>
         <p:nvSpPr>
           <p:cNvPr id="14" name=""/>
-          <p:cNvSpPr txBox="1"/>
-          <p:nvPr/>
-        </p:nvSpPr>
-        <p:spPr>
-          <a:xfrm>
-            <a:off x="1657350" y="3829050"/>
-            <a:ext cx="2971800" cy="333375"/>
-          </a:xfrm>
-          <a:prstGeom prst="rect">
-            <a:avLst/>
-          </a:prstGeom>
-          <a:noFill/>
-          <a:ln/>
-        </p:spPr>
-        <p:txBody>
-          <a:bodyPr wrap="square" lIns="0" tIns="0" rIns="0" bIns="0" anchor="ctr"/>
-          <a:lstStyle/>
-          <a:p>
-            <a:pPr/>
-            <a:r>
-              <a:rPr sz="2050" b="1">
-                <a:solidFill>
-                  <a:srgbClr val="E8461E"/>
-                </a:solidFill>
-                <a:latin typeface="DM Sans"/>
-                <a:ea typeface="DM Sans"/>
-              </a:rPr>
-              <a:t>a / an</a:t>
-            </a:r>
-            <a:pPr/>
-            <a:r>
-              <a:rPr sz="1300">
-                <a:solidFill>
-                  <a:srgbClr val="4A5270"/>
-                </a:solidFill>
-                <a:latin typeface="Noto Sans JP"/>
-                <a:ea typeface="Noto Sans JP"/>
-              </a:rPr>
-              <a:t> は「1つ」のときだけ</a:t>
-            </a:r>
-          </a:p>
-        </p:txBody>
-      </p:sp>
-      <p:sp>
-        <p:nvSpPr>
-          <p:cNvPr id="15" name=""/>
           <p:cNvSpPr/>
           <p:nvPr/>
         </p:nvSpPr>
         <p:spPr>
           <a:xfrm>
-            <a:off x="6219825" y="1990725"/>
-            <a:ext cx="5286375" cy="3524250"/>
+            <a:off x="1771650" y="5314950"/>
+            <a:ext cx="914400" cy="914400"/>
           </a:xfrm>
           <a:prstGeom prst="roundRect">
             <a:avLst>
-              <a:gd name="adj" fmla="val 7568"/>
+              <a:gd name="adj" fmla="val 22917"/>
             </a:avLst>
-          </a:prstGeom>
-          <a:solidFill>
-            <a:srgbClr val="DDEFFC"/>
-          </a:solidFill>
-          <a:ln/>
-        </p:spPr>
-      </p:sp>
-      <p:pic>
-        <p:nvPicPr>
-          <p:cNvPr id="16" name="Image 1" descr="映画">    </p:cNvPr>
-          <p:cNvPicPr>
-            <a:picLocks noChangeAspect="1"/>
-          </p:cNvPicPr>
-          <p:nvPr/>
-        </p:nvPicPr>
-        <p:blipFill>
-          <a:blip r:embed="rId2"/>
-          <a:stretch>
-            <a:fillRect/>
-          </a:stretch>
-        </p:blipFill>
-        <p:spPr>
-          <a:xfrm>
-            <a:off x="6505575" y="2219325"/>
-            <a:ext cx="990600" cy="990600"/>
-          </a:xfrm>
-          <a:prstGeom prst="rect">
-            <a:avLst/>
-          </a:prstGeom>
-        </p:spPr>
-      </p:pic>
-      <p:pic>
-        <p:nvPicPr>
-          <p:cNvPr id="17" name="Image 2" descr="映画">    </p:cNvPr>
-          <p:cNvPicPr>
-            <a:picLocks noChangeAspect="1"/>
-          </p:cNvPicPr>
-          <p:nvPr/>
-        </p:nvPicPr>
-        <p:blipFill>
-          <a:blip r:embed="rId3"/>
-          <a:stretch>
-            <a:fillRect/>
-          </a:stretch>
-        </p:blipFill>
-        <p:spPr>
-          <a:xfrm>
-            <a:off x="7553325" y="2219325"/>
-            <a:ext cx="990600" cy="990600"/>
-          </a:xfrm>
-          <a:prstGeom prst="rect">
-            <a:avLst/>
-          </a:prstGeom>
-        </p:spPr>
-      </p:pic>
-      <p:sp>
-        <p:nvSpPr>
-          <p:cNvPr id="18" name=""/>
-          <p:cNvSpPr txBox="1"/>
-          <p:nvPr/>
-        </p:nvSpPr>
-        <p:spPr>
-          <a:xfrm>
-            <a:off x="8715375" y="2352675"/>
-            <a:ext cx="1724025" cy="447675"/>
-          </a:xfrm>
-          <a:prstGeom prst="rect">
-            <a:avLst/>
-          </a:prstGeom>
-          <a:noFill/>
-          <a:ln/>
-        </p:spPr>
-        <p:txBody>
-          <a:bodyPr wrap="square" lIns="0" tIns="0" rIns="0" bIns="0" anchor="ctr"/>
-          <a:lstStyle/>
-          <a:p>
-            <a:pPr/>
-            <a:r>
-              <a:rPr sz="2700" b="1">
-                <a:solidFill>
-                  <a:srgbClr val="1C2340"/>
-                </a:solidFill>
-                <a:latin typeface="DM Sans"/>
-                <a:ea typeface="DM Sans"/>
-              </a:rPr>
-              <a:t>movies</a:t>
-            </a:r>
-          </a:p>
-        </p:txBody>
-      </p:sp>
-      <p:sp>
-        <p:nvSpPr>
-          <p:cNvPr id="19" name=""/>
-          <p:cNvSpPr txBox="1"/>
-          <p:nvPr/>
-        </p:nvSpPr>
-        <p:spPr>
-          <a:xfrm>
-            <a:off x="8715375" y="2828925"/>
-            <a:ext cx="2428875" cy="257175"/>
-          </a:xfrm>
-          <a:prstGeom prst="rect">
-            <a:avLst/>
-          </a:prstGeom>
-          <a:noFill/>
-          <a:ln/>
-        </p:spPr>
-        <p:txBody>
-          <a:bodyPr wrap="square" lIns="0" tIns="0" rIns="0" bIns="0" anchor="ctr"/>
-          <a:lstStyle/>
-          <a:p>
-            <a:pPr/>
-            <a:r>
-              <a:rPr sz="1450">
-                <a:solidFill>
-                  <a:srgbClr val="4A5270"/>
-                </a:solidFill>
-                <a:latin typeface="Noto Sans JP"/>
-                <a:ea typeface="Noto Sans JP"/>
-              </a:rPr>
-              <a:t>複数の映画・映画全般</a:t>
-            </a:r>
-          </a:p>
-        </p:txBody>
-      </p:sp>
-      <p:sp>
-        <p:nvSpPr>
-          <p:cNvPr id="20" name=""/>
-          <p:cNvSpPr/>
-          <p:nvPr/>
-        </p:nvSpPr>
-        <p:spPr>
-          <a:xfrm>
-            <a:off x="6505575" y="3324225"/>
-            <a:ext cx="4714875" cy="762000"/>
-          </a:xfrm>
-          <a:prstGeom prst="roundRect">
-            <a:avLst>
-              <a:gd name="adj" fmla="val 20000"/>
-            </a:avLst>
-          </a:prstGeom>
-          <a:solidFill>
-            <a:srgbClr val="FFFFFF"/>
-          </a:solidFill>
-          <a:ln/>
-        </p:spPr>
-      </p:sp>
-      <p:sp>
-        <p:nvSpPr>
-          <p:cNvPr id="21" name=""/>
-          <p:cNvSpPr/>
-          <p:nvPr/>
-        </p:nvSpPr>
-        <p:spPr>
-          <a:xfrm>
-            <a:off x="6677025" y="3514725"/>
-            <a:ext cx="381000" cy="381000"/>
-          </a:xfrm>
-          <a:prstGeom prst="ellipse">
-            <a:avLst/>
           </a:prstGeom>
           <a:solidFill>
             <a:srgbClr val="2F86CF"/>
@@ -11938,14 +12319,14 @@
       </p:sp>
       <p:sp>
         <p:nvSpPr>
-          <p:cNvPr id="22" name=""/>
-          <p:cNvSpPr txBox="1"/>
-          <p:nvPr/>
-        </p:nvSpPr>
-        <p:spPr>
-          <a:xfrm>
-            <a:off x="6572250" y="3552825"/>
-            <a:ext cx="581025" cy="304800"/>
+          <p:cNvPr id="15" name=""/>
+          <p:cNvSpPr txBox="1"/>
+          <p:nvPr/>
+        </p:nvSpPr>
+        <p:spPr>
+          <a:xfrm>
+            <a:off x="1676400" y="5514975"/>
+            <a:ext cx="1095375" cy="523875"/>
           </a:xfrm>
           <a:prstGeom prst="rect">
             <a:avLst/>
@@ -11959,263 +12340,106 @@
           <a:p>
             <a:pPr algn="ctr"/>
             <a:r>
-              <a:rPr sz="1650" b="1">
+              <a:rPr sz="3150" b="1">
                 <a:solidFill>
                   <a:srgbClr val="FFFFFF"/>
                 </a:solidFill>
-                <a:latin typeface="Noto Sans JP"/>
-                <a:ea typeface="Noto Sans JP"/>
-              </a:rPr>
-              <a:t>○</a:t>
-            </a:r>
-          </a:p>
-        </p:txBody>
-      </p:sp>
-      <p:sp>
-        <p:nvSpPr>
-          <p:cNvPr id="23" name=""/>
-          <p:cNvSpPr txBox="1"/>
-          <p:nvPr/>
-        </p:nvSpPr>
-        <p:spPr>
-          <a:xfrm>
-            <a:off x="7191375" y="3419475"/>
-            <a:ext cx="2124075" cy="333375"/>
-          </a:xfrm>
-          <a:prstGeom prst="rect">
-            <a:avLst/>
-          </a:prstGeom>
-          <a:noFill/>
-          <a:ln/>
-        </p:spPr>
-        <p:txBody>
-          <a:bodyPr wrap="square" lIns="0" tIns="0" rIns="0" bIns="0" anchor="ctr"/>
-          <a:lstStyle/>
-          <a:p>
-            <a:pPr/>
-            <a:r>
-              <a:rPr sz="2050" b="1">
-                <a:solidFill>
-                  <a:srgbClr val="1C2340"/>
-                </a:solidFill>
-                <a:latin typeface="DM Sans"/>
-                <a:ea typeface="DM Sans"/>
-              </a:rPr>
-              <a:t>I like </a:t>
-            </a:r>
-            <a:pPr/>
-            <a:r>
-              <a:rPr sz="2050" b="1">
-                <a:solidFill>
-                  <a:srgbClr val="1C2340"/>
-                </a:solidFill>
-                <a:highlight>
-                  <a:srgbClr val="FFD9C9"/>
-                </a:highlight>
-                <a:latin typeface="DM Sans"/>
-                <a:ea typeface="DM Sans"/>
-              </a:rPr>
-              <a:t>movies</a:t>
-            </a:r>
-            <a:pPr/>
-            <a:r>
-              <a:rPr sz="2050" b="1">
-                <a:solidFill>
-                  <a:srgbClr val="1C2340"/>
-                </a:solidFill>
-                <a:latin typeface="DM Sans"/>
-                <a:ea typeface="DM Sans"/>
-              </a:rPr>
-              <a:t>.</a:t>
-            </a:r>
-          </a:p>
-        </p:txBody>
-      </p:sp>
-      <p:sp>
-        <p:nvSpPr>
-          <p:cNvPr id="24" name=""/>
-          <p:cNvSpPr txBox="1"/>
-          <p:nvPr/>
-        </p:nvSpPr>
-        <p:spPr>
-          <a:xfrm>
-            <a:off x="7191375" y="3752850"/>
-            <a:ext cx="2181225" cy="238125"/>
-          </a:xfrm>
-          <a:prstGeom prst="rect">
-            <a:avLst/>
-          </a:prstGeom>
-          <a:noFill/>
-          <a:ln/>
-        </p:spPr>
-        <p:txBody>
-          <a:bodyPr wrap="square" lIns="0" tIns="0" rIns="0" bIns="0" anchor="ctr"/>
-          <a:lstStyle/>
-          <a:p>
-            <a:pPr/>
-            <a:r>
-              <a:rPr sz="1300">
-                <a:solidFill>
-                  <a:srgbClr val="4A5270"/>
-                </a:solidFill>
-                <a:latin typeface="Noto Sans JP"/>
-                <a:ea typeface="Noto Sans JP"/>
-              </a:rPr>
-              <a:t>私は映画が好きです。</a:t>
-            </a:r>
-          </a:p>
-        </p:txBody>
-      </p:sp>
-      <p:sp>
-        <p:nvSpPr>
-          <p:cNvPr id="25" name=""/>
+                <a:latin typeface="DM Sans"/>
+                <a:ea typeface="DM Sans"/>
+              </a:rPr>
+              <a:t>the</a:t>
+            </a:r>
+          </a:p>
+        </p:txBody>
+      </p:sp>
+      <p:sp>
+        <p:nvSpPr>
+          <p:cNvPr id="16" name=""/>
           <p:cNvSpPr/>
           <p:nvPr/>
         </p:nvSpPr>
         <p:spPr>
           <a:xfrm>
-            <a:off x="685800" y="5724525"/>
-            <a:ext cx="10820400" cy="714375"/>
+            <a:off x="2857500" y="5314950"/>
+            <a:ext cx="914400" cy="914400"/>
           </a:xfrm>
           <a:prstGeom prst="roundRect">
             <a:avLst>
-              <a:gd name="adj" fmla="val 26667"/>
+              <a:gd name="adj" fmla="val 22917"/>
             </a:avLst>
           </a:prstGeom>
           <a:solidFill>
-            <a:srgbClr val="FFFFFF"/>
+            <a:srgbClr val="9AA1B6"/>
           </a:solidFill>
           <a:ln/>
-          <a:effectLst>
-            <a:outerShdw sx="100000" sy="100000" kx="0" ky="0" algn="bl" rotWithShape="0" blurRad="152400" dist="50800" dir="5400000">
-              <a:srgbClr val="22304A">
-                <a:alpha val="10000"/>
-              </a:srgbClr>
-            </a:outerShdw>
-          </a:effectLst>
-        </p:spPr>
-      </p:sp>
-      <p:sp>
-        <p:nvSpPr>
-          <p:cNvPr id="26" name=""/>
-          <p:cNvSpPr/>
-          <p:nvPr/>
-        </p:nvSpPr>
-        <p:spPr>
-          <a:xfrm>
-            <a:off x="933450" y="5895975"/>
-            <a:ext cx="1028700" cy="371475"/>
-          </a:xfrm>
-          <a:prstGeom prst="roundRect">
-            <a:avLst>
-              <a:gd name="adj" fmla="val 50000"/>
-            </a:avLst>
-          </a:prstGeom>
-          <a:solidFill>
-            <a:srgbClr val="FFE3D8"/>
-          </a:solidFill>
-          <a:ln/>
-        </p:spPr>
-      </p:sp>
-      <p:sp>
-        <p:nvSpPr>
-          <p:cNvPr id="27" name=""/>
-          <p:cNvSpPr txBox="1"/>
-          <p:nvPr/>
-        </p:nvSpPr>
-        <p:spPr>
-          <a:xfrm>
-            <a:off x="1104900" y="5953125"/>
-            <a:ext cx="1133475" cy="247650"/>
-          </a:xfrm>
-          <a:prstGeom prst="rect">
-            <a:avLst/>
-          </a:prstGeom>
-          <a:noFill/>
-          <a:ln/>
-        </p:spPr>
-        <p:txBody>
-          <a:bodyPr wrap="square" lIns="0" tIns="0" rIns="0" bIns="0" anchor="ctr"/>
-          <a:lstStyle/>
-          <a:p>
-            <a:pPr/>
-            <a:r>
-              <a:rPr sz="1350" b="1">
-                <a:solidFill>
-                  <a:srgbClr val="C8401A"/>
-                </a:solidFill>
-                <a:latin typeface="Noto Sans JP"/>
-                <a:ea typeface="Noto Sans JP"/>
-              </a:rPr>
-              <a:t>ポイント</a:t>
-            </a:r>
-          </a:p>
-        </p:txBody>
-      </p:sp>
-      <p:sp>
-        <p:nvSpPr>
-          <p:cNvPr id="28" name=""/>
-          <p:cNvSpPr txBox="1"/>
-          <p:nvPr/>
-        </p:nvSpPr>
-        <p:spPr>
-          <a:xfrm>
-            <a:off x="2114550" y="5924550"/>
-            <a:ext cx="5295900" cy="314325"/>
-          </a:xfrm>
-          <a:prstGeom prst="rect">
-            <a:avLst/>
-          </a:prstGeom>
-          <a:noFill/>
-          <a:ln/>
-        </p:spPr>
-        <p:txBody>
-          <a:bodyPr wrap="square" lIns="0" tIns="0" rIns="0" bIns="0" anchor="ctr"/>
-          <a:lstStyle/>
-          <a:p>
-            <a:pPr/>
-            <a:r>
-              <a:rPr sz="1650" b="1">
-                <a:solidFill>
-                  <a:srgbClr val="1C2340"/>
-                </a:solidFill>
-                <a:latin typeface="DM Sans"/>
-                <a:ea typeface="DM Sans"/>
-              </a:rPr>
-              <a:t>movies</a:t>
-            </a:r>
-            <a:pPr/>
-            <a:r>
-              <a:rPr sz="1650">
-                <a:solidFill>
-                  <a:srgbClr val="1C2340"/>
-                </a:solidFill>
-                <a:latin typeface="Noto Sans JP"/>
-                <a:ea typeface="Noto Sans JP"/>
-              </a:rPr>
-              <a:t> は複数名詞なので、</a:t>
-            </a:r>
-            <a:pPr/>
-            <a:r>
-              <a:rPr sz="1650" b="1">
-                <a:solidFill>
-                  <a:srgbClr val="E8461E"/>
-                </a:solidFill>
-                <a:latin typeface="DM Sans"/>
-                <a:ea typeface="DM Sans"/>
-              </a:rPr>
-              <a:t>a / an</a:t>
-            </a:r>
-            <a:pPr/>
-            <a:r>
-              <a:rPr sz="1650">
-                <a:solidFill>
-                  <a:srgbClr val="1C2340"/>
-                </a:solidFill>
-                <a:latin typeface="Noto Sans JP"/>
-                <a:ea typeface="Noto Sans JP"/>
-              </a:rPr>
-              <a:t> は使わない</a:t>
+        </p:spPr>
+      </p:sp>
+      <p:sp>
+        <p:nvSpPr>
+          <p:cNvPr id="17" name=""/>
+          <p:cNvSpPr txBox="1"/>
+          <p:nvPr/>
+        </p:nvSpPr>
+        <p:spPr>
+          <a:xfrm>
+            <a:off x="2838450" y="5581650"/>
+            <a:ext cx="952500" cy="381000"/>
+          </a:xfrm>
+          <a:prstGeom prst="rect">
+            <a:avLst/>
+          </a:prstGeom>
+          <a:noFill/>
+          <a:ln/>
+        </p:spPr>
+        <p:txBody>
+          <a:bodyPr wrap="square" lIns="0" tIns="0" rIns="0" bIns="0" anchor="ctr"/>
+          <a:lstStyle/>
+          <a:p>
+            <a:pPr algn="ctr"/>
+            <a:r>
+              <a:rPr sz="2100" b="1">
+                <a:solidFill>
+                  <a:srgbClr val="FFFFFF"/>
+                </a:solidFill>
+                <a:latin typeface="Noto Sans JP"/>
+                <a:ea typeface="Noto Sans JP"/>
+              </a:rPr>
+              <a:t>なし</a:t>
+            </a:r>
+          </a:p>
+        </p:txBody>
+      </p:sp>
+      <p:sp>
+        <p:nvSpPr>
+          <p:cNvPr id="18" name=""/>
+          <p:cNvSpPr txBox="1"/>
+          <p:nvPr/>
+        </p:nvSpPr>
+        <p:spPr>
+          <a:xfrm>
+            <a:off x="4076700" y="5581650"/>
+            <a:ext cx="4991100" cy="381000"/>
+          </a:xfrm>
+          <a:prstGeom prst="rect">
+            <a:avLst/>
+          </a:prstGeom>
+          <a:noFill/>
+          <a:ln/>
+        </p:spPr>
+        <p:txBody>
+          <a:bodyPr wrap="square" lIns="0" tIns="0" rIns="0" bIns="0" anchor="ctr"/>
+          <a:lstStyle/>
+          <a:p>
+            <a:pPr/>
+            <a:r>
+              <a:rPr sz="2100" b="1">
+                <a:solidFill>
+                  <a:srgbClr val="1C2340"/>
+                </a:solidFill>
+                <a:latin typeface="Noto Sans JP"/>
+                <a:ea typeface="Noto Sans JP"/>
+              </a:rPr>
+              <a:t>どれ？ 声に出して答えてみよう！</a:t>
             </a:r>
           </a:p>
         </p:txBody>
@@ -12318,8 +12542,8 @@
         </p:nvSpPr>
         <p:spPr>
           <a:xfrm>
-            <a:off x="685800" y="952500"/>
-            <a:ext cx="876300" cy="200025"/>
+            <a:off x="685800" y="981075"/>
+            <a:ext cx="3467100" cy="200025"/>
           </a:xfrm>
           <a:prstGeom prst="rect">
             <a:avLst/>
@@ -12340,7 +12564,51 @@
                 <a:latin typeface="DM Sans"/>
                 <a:ea typeface="DM Sans"/>
               </a:rPr>
-              <a:t>QUIZ</a:t>
+              <a:t>NO ARTICLE </a:t>
+            </a:r>
+            <a:pPr/>
+            <a:r>
+              <a:rPr sz="1200" b="1">
+                <a:solidFill>
+                  <a:srgbClr val="E8461E"/>
+                </a:solidFill>
+                <a:latin typeface="Noto Sans JP"/>
+                <a:ea typeface="Noto Sans JP"/>
+              </a:rPr>
+              <a:t>・</a:t>
+            </a:r>
+            <a:pPr/>
+            <a:r>
+              <a:rPr sz="1200" b="1">
+                <a:solidFill>
+                  <a:srgbClr val="E8461E"/>
+                </a:solidFill>
+                <a:latin typeface="DM Sans"/>
+                <a:ea typeface="DM Sans"/>
+              </a:rPr>
+              <a:t> 2 </a:t>
+            </a:r>
+            <a:pPr/>
+            <a:r>
+              <a:rPr sz="1200" b="1">
+                <a:solidFill>
+                  <a:srgbClr val="E8461E"/>
+                </a:solidFill>
+                <a:latin typeface="Noto Sans JP"/>
+                <a:ea typeface="Noto Sans JP"/>
+              </a:rPr>
+              <a:t>・</a:t>
+            </a:r>
+            <a:pPr/>
+            <a:r>
+              <a:rPr sz="1200" b="1">
+                <a:solidFill>
+                  <a:srgbClr val="E8461E"/>
+                </a:solidFill>
+                <a:latin typeface="DM Sans"/>
+                <a:ea typeface="DM Sans"/>
+              </a:rPr>
+              <a:t> ANSWER</a:t>
             </a:r>
           </a:p>
         </p:txBody>
@@ -12353,7 +12621,7 @@
         </p:nvSpPr>
         <p:spPr>
           <a:xfrm>
-            <a:off x="685800" y="1171575"/>
+            <a:off x="685800" y="1200150"/>
             <a:ext cx="3714750" cy="609600"/>
           </a:xfrm>
           <a:prstGeom prst="rect">
@@ -12388,7 +12656,7 @@
         </p:nvSpPr>
         <p:spPr>
           <a:xfrm>
-            <a:off x="685800" y="1962150"/>
+            <a:off x="685800" y="1990725"/>
             <a:ext cx="10820400" cy="2857500"/>
           </a:xfrm>
           <a:prstGeom prst="roundRect">
@@ -12425,7 +12693,7 @@
         </p:blipFill>
         <p:spPr>
           <a:xfrm>
-            <a:off x="971550" y="2438400"/>
+            <a:off x="971550" y="2466975"/>
             <a:ext cx="1905000" cy="1905000"/>
           </a:xfrm>
           <a:prstGeom prst="rect">
@@ -12441,7 +12709,7 @@
         </p:nvSpPr>
         <p:spPr>
           <a:xfrm>
-            <a:off x="3162300" y="2638425"/>
+            <a:off x="3162300" y="2667000"/>
             <a:ext cx="5600700" cy="419100"/>
           </a:xfrm>
           <a:prstGeom prst="rect">
@@ -12476,7 +12744,7 @@
         </p:nvSpPr>
         <p:spPr>
           <a:xfrm>
-            <a:off x="3162300" y="3457575"/>
+            <a:off x="3162300" y="3486150"/>
             <a:ext cx="2362200" cy="571500"/>
           </a:xfrm>
           <a:prstGeom prst="rect">
@@ -12511,7 +12779,7 @@
         </p:nvSpPr>
         <p:spPr>
           <a:xfrm>
-            <a:off x="5067300" y="3381375"/>
+            <a:off x="5067300" y="3409950"/>
             <a:ext cx="1333500" cy="723900"/>
           </a:xfrm>
           <a:prstGeom prst="roundRect">
@@ -12520,14 +12788,9 @@
             </a:avLst>
           </a:prstGeom>
           <a:solidFill>
-            <a:srgbClr val="FFF8F5"/>
+            <a:srgbClr val="9AA1B6"/>
           </a:solidFill>
-          <a:ln w="28575">
-            <a:solidFill>
-              <a:srgbClr val="F3A88F"/>
-            </a:solidFill>
-            <a:prstDash val="dash"/>
-          </a:ln>
+          <a:ln/>
         </p:spPr>
       </p:sp>
       <p:sp>
@@ -12538,7 +12801,42 @@
         </p:nvSpPr>
         <p:spPr>
           <a:xfrm>
-            <a:off x="6553200" y="3457575"/>
+            <a:off x="5238750" y="3562350"/>
+            <a:ext cx="1000125" cy="419100"/>
+          </a:xfrm>
+          <a:prstGeom prst="rect">
+            <a:avLst/>
+          </a:prstGeom>
+          <a:noFill/>
+          <a:ln/>
+        </p:spPr>
+        <p:txBody>
+          <a:bodyPr wrap="square" lIns="0" tIns="0" rIns="0" bIns="0" anchor="ctr"/>
+          <a:lstStyle/>
+          <a:p>
+            <a:pPr algn="ctr"/>
+            <a:r>
+              <a:rPr sz="2250" b="1">
+                <a:solidFill>
+                  <a:srgbClr val="FFFFFF"/>
+                </a:solidFill>
+                <a:latin typeface="Noto Sans JP"/>
+                <a:ea typeface="Noto Sans JP"/>
+              </a:rPr>
+              <a:t>なし</a:t>
+            </a:r>
+          </a:p>
+        </p:txBody>
+      </p:sp>
+      <p:sp>
+        <p:nvSpPr>
+          <p:cNvPr id="12" name=""/>
+          <p:cNvSpPr txBox="1"/>
+          <p:nvPr/>
+        </p:nvSpPr>
+        <p:spPr>
+          <a:xfrm>
+            <a:off x="6553200" y="3486150"/>
             <a:ext cx="4257675" cy="571500"/>
           </a:xfrm>
           <a:prstGeom prst="rect">
@@ -12567,60 +12865,32 @@
       </p:sp>
       <p:sp>
         <p:nvSpPr>
-          <p:cNvPr id="12" name=""/>
+          <p:cNvPr id="13" name=""/>
           <p:cNvSpPr/>
           <p:nvPr/>
         </p:nvSpPr>
         <p:spPr>
           <a:xfrm>
-            <a:off x="685800" y="5286375"/>
-            <a:ext cx="914400" cy="914400"/>
+            <a:off x="685800" y="5057775"/>
+            <a:ext cx="10820400" cy="1428750"/>
           </a:xfrm>
           <a:prstGeom prst="roundRect">
             <a:avLst>
-              <a:gd name="adj" fmla="val 22917"/>
+              <a:gd name="adj" fmla="val 18667"/>
             </a:avLst>
           </a:prstGeom>
           <a:solidFill>
-            <a:srgbClr val="E8461E"/>
+            <a:srgbClr val="FFFFFF"/>
           </a:solidFill>
           <a:ln/>
-        </p:spPr>
-      </p:sp>
-      <p:sp>
-        <p:nvSpPr>
-          <p:cNvPr id="13" name=""/>
-          <p:cNvSpPr txBox="1"/>
-          <p:nvPr/>
-        </p:nvSpPr>
-        <p:spPr>
-          <a:xfrm>
-            <a:off x="838200" y="5486400"/>
-            <a:ext cx="619125" cy="523875"/>
-          </a:xfrm>
-          <a:prstGeom prst="rect">
-            <a:avLst/>
-          </a:prstGeom>
-          <a:noFill/>
-          <a:ln/>
-        </p:spPr>
-        <p:txBody>
-          <a:bodyPr wrap="square" lIns="0" tIns="0" rIns="0" bIns="0" anchor="ctr"/>
-          <a:lstStyle/>
-          <a:p>
-            <a:pPr algn="ctr"/>
-            <a:r>
-              <a:rPr sz="3150" b="1">
-                <a:solidFill>
-                  <a:srgbClr val="FFFFFF"/>
-                </a:solidFill>
-                <a:latin typeface="DM Sans"/>
-                <a:ea typeface="DM Sans"/>
-              </a:rPr>
-              <a:t>a</a:t>
-            </a:r>
-          </a:p>
-        </p:txBody>
+          <a:effectLst>
+            <a:outerShdw sx="100000" sy="100000" kx="0" ky="0" algn="bl" rotWithShape="0" blurRad="152400" dist="50800" dir="5400000">
+              <a:srgbClr val="22304A">
+                <a:alpha val="10000"/>
+              </a:srgbClr>
+            </a:outerShdw>
+          </a:effectLst>
+        </p:spPr>
       </p:sp>
       <p:sp>
         <p:nvSpPr>
@@ -12630,16 +12900,16 @@
         </p:nvSpPr>
         <p:spPr>
           <a:xfrm>
-            <a:off x="1771650" y="5286375"/>
-            <a:ext cx="914400" cy="914400"/>
+            <a:off x="990600" y="5353050"/>
+            <a:ext cx="685800" cy="371475"/>
           </a:xfrm>
           <a:prstGeom prst="roundRect">
             <a:avLst>
-              <a:gd name="adj" fmla="val 22917"/>
+              <a:gd name="adj" fmla="val 50000"/>
             </a:avLst>
           </a:prstGeom>
           <a:solidFill>
-            <a:srgbClr val="2F86CF"/>
+            <a:srgbClr val="FFE3D8"/>
           </a:solidFill>
           <a:ln/>
         </p:spPr>
@@ -12652,29 +12922,29 @@
         </p:nvSpPr>
         <p:spPr>
           <a:xfrm>
-            <a:off x="1676400" y="5486400"/>
-            <a:ext cx="1095375" cy="523875"/>
-          </a:xfrm>
-          <a:prstGeom prst="rect">
-            <a:avLst/>
-          </a:prstGeom>
-          <a:noFill/>
-          <a:ln/>
-        </p:spPr>
-        <p:txBody>
-          <a:bodyPr wrap="square" lIns="0" tIns="0" rIns="0" bIns="0" anchor="ctr"/>
-          <a:lstStyle/>
-          <a:p>
-            <a:pPr algn="ctr"/>
-            <a:r>
-              <a:rPr sz="3150" b="1">
-                <a:solidFill>
-                  <a:srgbClr val="FFFFFF"/>
-                </a:solidFill>
-                <a:latin typeface="DM Sans"/>
-                <a:ea typeface="DM Sans"/>
-              </a:rPr>
-              <a:t>the</a:t>
+            <a:off x="1162050" y="5410200"/>
+            <a:ext cx="733425" cy="247650"/>
+          </a:xfrm>
+          <a:prstGeom prst="rect">
+            <a:avLst/>
+          </a:prstGeom>
+          <a:noFill/>
+          <a:ln/>
+        </p:spPr>
+        <p:txBody>
+          <a:bodyPr wrap="square" lIns="0" tIns="0" rIns="0" bIns="0" anchor="ctr"/>
+          <a:lstStyle/>
+          <a:p>
+            <a:pPr/>
+            <a:r>
+              <a:rPr sz="1350" b="1">
+                <a:solidFill>
+                  <a:srgbClr val="C8401A"/>
+                </a:solidFill>
+                <a:latin typeface="Noto Sans JP"/>
+                <a:ea typeface="Noto Sans JP"/>
+              </a:rPr>
+              <a:t>答え</a:t>
             </a:r>
           </a:p>
         </p:txBody>
@@ -12682,91 +12952,137 @@
       <p:sp>
         <p:nvSpPr>
           <p:cNvPr id="16" name=""/>
+          <p:cNvSpPr txBox="1"/>
+          <p:nvPr/>
+        </p:nvSpPr>
+        <p:spPr>
+          <a:xfrm>
+            <a:off x="1809750" y="5391150"/>
+            <a:ext cx="3571875" cy="295275"/>
+          </a:xfrm>
+          <a:prstGeom prst="rect">
+            <a:avLst/>
+          </a:prstGeom>
+          <a:noFill/>
+          <a:ln/>
+        </p:spPr>
+        <p:txBody>
+          <a:bodyPr wrap="square" lIns="0" tIns="0" rIns="0" bIns="0" anchor="ctr"/>
+          <a:lstStyle/>
+          <a:p>
+            <a:pPr/>
+            <a:r>
+              <a:rPr sz="1800" b="1">
+                <a:solidFill>
+                  <a:srgbClr val="1C2340"/>
+                </a:solidFill>
+                <a:latin typeface="DM Sans"/>
+                <a:ea typeface="DM Sans"/>
+              </a:rPr>
+              <a:t>I bought furniture online.</a:t>
+            </a:r>
+          </a:p>
+        </p:txBody>
+      </p:sp>
+      <p:sp>
+        <p:nvSpPr>
+          <p:cNvPr id="17" name=""/>
           <p:cNvSpPr/>
           <p:nvPr/>
         </p:nvSpPr>
         <p:spPr>
           <a:xfrm>
-            <a:off x="2857500" y="5286375"/>
-            <a:ext cx="914400" cy="914400"/>
+            <a:off x="990600" y="5819775"/>
+            <a:ext cx="685800" cy="371475"/>
           </a:xfrm>
           <a:prstGeom prst="roundRect">
             <a:avLst>
-              <a:gd name="adj" fmla="val 22917"/>
+              <a:gd name="adj" fmla="val 50000"/>
             </a:avLst>
           </a:prstGeom>
           <a:solidFill>
-            <a:srgbClr val="9AA1B6"/>
+            <a:srgbClr val="DCEFFC"/>
           </a:solidFill>
           <a:ln/>
         </p:spPr>
       </p:sp>
       <p:sp>
         <p:nvSpPr>
-          <p:cNvPr id="17" name=""/>
-          <p:cNvSpPr txBox="1"/>
-          <p:nvPr/>
-        </p:nvSpPr>
-        <p:spPr>
-          <a:xfrm>
-            <a:off x="2838450" y="5553075"/>
-            <a:ext cx="952500" cy="381000"/>
-          </a:xfrm>
-          <a:prstGeom prst="rect">
-            <a:avLst/>
-          </a:prstGeom>
-          <a:noFill/>
-          <a:ln/>
-        </p:spPr>
-        <p:txBody>
-          <a:bodyPr wrap="square" lIns="0" tIns="0" rIns="0" bIns="0" anchor="ctr"/>
-          <a:lstStyle/>
-          <a:p>
-            <a:pPr algn="ctr"/>
-            <a:r>
-              <a:rPr sz="2100" b="1">
-                <a:solidFill>
-                  <a:srgbClr val="FFFFFF"/>
-                </a:solidFill>
-                <a:latin typeface="Noto Sans JP"/>
-                <a:ea typeface="Noto Sans JP"/>
-              </a:rPr>
-              <a:t>なし</a:t>
-            </a:r>
-          </a:p>
-        </p:txBody>
-      </p:sp>
-      <p:sp>
-        <p:nvSpPr>
           <p:cNvPr id="18" name=""/>
           <p:cNvSpPr txBox="1"/>
           <p:nvPr/>
         </p:nvSpPr>
         <p:spPr>
           <a:xfrm>
-            <a:off x="4076700" y="5553075"/>
-            <a:ext cx="4991100" cy="381000"/>
-          </a:xfrm>
-          <a:prstGeom prst="rect">
-            <a:avLst/>
-          </a:prstGeom>
-          <a:noFill/>
-          <a:ln/>
-        </p:spPr>
-        <p:txBody>
-          <a:bodyPr wrap="square" lIns="0" tIns="0" rIns="0" bIns="0" anchor="ctr"/>
-          <a:lstStyle/>
-          <a:p>
-            <a:pPr/>
-            <a:r>
-              <a:rPr sz="2100" b="1">
-                <a:solidFill>
-                  <a:srgbClr val="1C2340"/>
-                </a:solidFill>
-                <a:latin typeface="Noto Sans JP"/>
-                <a:ea typeface="Noto Sans JP"/>
-              </a:rPr>
-              <a:t>どれ？ 声に出して答えてみよう！</a:t>
+            <a:off x="1162050" y="5876925"/>
+            <a:ext cx="733425" cy="247650"/>
+          </a:xfrm>
+          <a:prstGeom prst="rect">
+            <a:avLst/>
+          </a:prstGeom>
+          <a:noFill/>
+          <a:ln/>
+        </p:spPr>
+        <p:txBody>
+          <a:bodyPr wrap="square" lIns="0" tIns="0" rIns="0" bIns="0" anchor="ctr"/>
+          <a:lstStyle/>
+          <a:p>
+            <a:pPr/>
+            <a:r>
+              <a:rPr sz="1350" b="1">
+                <a:solidFill>
+                  <a:srgbClr val="1F6FB2"/>
+                </a:solidFill>
+                <a:latin typeface="Noto Sans JP"/>
+                <a:ea typeface="Noto Sans JP"/>
+              </a:rPr>
+              <a:t>理由</a:t>
+            </a:r>
+          </a:p>
+        </p:txBody>
+      </p:sp>
+      <p:sp>
+        <p:nvSpPr>
+          <p:cNvPr id="19" name=""/>
+          <p:cNvSpPr txBox="1"/>
+          <p:nvPr/>
+        </p:nvSpPr>
+        <p:spPr>
+          <a:xfrm>
+            <a:off x="1809750" y="5838825"/>
+            <a:ext cx="8696325" cy="333375"/>
+          </a:xfrm>
+          <a:prstGeom prst="rect">
+            <a:avLst/>
+          </a:prstGeom>
+          <a:noFill/>
+          <a:ln/>
+        </p:spPr>
+        <p:txBody>
+          <a:bodyPr wrap="square" lIns="0" tIns="0" rIns="0" bIns="0" anchor="ctr"/>
+          <a:lstStyle/>
+          <a:p>
+            <a:pPr/>
+            <a:r>
+              <a:rPr sz="1800">
+                <a:solidFill>
+                  <a:srgbClr val="1C2340"/>
+                </a:solidFill>
+                <a:latin typeface="Noto Sans JP"/>
+                <a:ea typeface="Noto Sans JP"/>
+              </a:rPr>
+              <a:t>家具は1つとは限らない（一発では分からない）→ 不特定なので</a:t>
+            </a:r>
+            <a:pPr/>
+            <a:r>
+              <a:rPr sz="1800" b="1">
+                <a:solidFill>
+                  <a:srgbClr val="1C2340"/>
+                </a:solidFill>
+                <a:latin typeface="Noto Sans JP"/>
+                <a:ea typeface="Noto Sans JP"/>
+              </a:rPr>
+              <a:t>無冠詞</a:t>
             </a:r>
           </a:p>
         </p:txBody>
@@ -12870,7 +13186,7 @@
         <p:spPr>
           <a:xfrm>
             <a:off x="685800" y="981075"/>
-            <a:ext cx="2162175" cy="200025"/>
+            <a:ext cx="3228975" cy="200025"/>
           </a:xfrm>
           <a:prstGeom prst="rect">
             <a:avLst/>
@@ -12891,7 +13207,7 @@
                 <a:latin typeface="DM Sans"/>
                 <a:ea typeface="DM Sans"/>
               </a:rPr>
-              <a:t>QUIZ </a:t>
+              <a:t>NO ARTICLE </a:t>
             </a:r>
             <a:pPr/>
             <a:r>
@@ -12913,7 +13229,29 @@
                 <a:latin typeface="DM Sans"/>
                 <a:ea typeface="DM Sans"/>
               </a:rPr>
-              <a:t> ANSWER</a:t>
+              <a:t> 2 </a:t>
+            </a:r>
+            <a:pPr/>
+            <a:r>
+              <a:rPr sz="1200" b="1">
+                <a:solidFill>
+                  <a:srgbClr val="E8461E"/>
+                </a:solidFill>
+                <a:latin typeface="Noto Sans JP"/>
+                <a:ea typeface="Noto Sans JP"/>
+              </a:rPr>
+              <a:t>・</a:t>
+            </a:r>
+            <a:pPr/>
+            <a:r>
+              <a:rPr sz="1200" b="1">
+                <a:solidFill>
+                  <a:srgbClr val="E8461E"/>
+                </a:solidFill>
+                <a:latin typeface="DM Sans"/>
+                <a:ea typeface="DM Sans"/>
+              </a:rPr>
+              <a:t> POINT</a:t>
             </a:r>
           </a:p>
         </p:txBody>
@@ -12927,7 +13265,7 @@
         <p:spPr>
           <a:xfrm>
             <a:off x="685800" y="1200150"/>
-            <a:ext cx="3714750" cy="609600"/>
+            <a:ext cx="10982325" cy="619125"/>
           </a:xfrm>
           <a:prstGeom prst="rect">
             <a:avLst/>
@@ -12945,10 +13283,21 @@
                 <a:solidFill>
                   <a:srgbClr val="1C2340"/>
                 </a:solidFill>
-                <a:latin typeface="Noto Sans JP"/>
-                <a:ea typeface="Noto Sans JP"/>
-              </a:rPr>
-              <a:t>英語で言うと？</a:t>
+                <a:latin typeface="DM Sans"/>
+                <a:ea typeface="DM Sans"/>
+              </a:rPr>
+              <a:t>furniture</a:t>
+            </a:r>
+            <a:pPr/>
+            <a:r>
+              <a:rPr sz="3300" b="1">
+                <a:solidFill>
+                  <a:srgbClr val="1C2340"/>
+                </a:solidFill>
+                <a:latin typeface="Noto Sans JP"/>
+                <a:ea typeface="Noto Sans JP"/>
+              </a:rPr>
+              <a:t> は s がつかないけど、1つとは限らない</a:t>
             </a:r>
           </a:p>
         </p:txBody>
@@ -12962,11 +13311,11 @@
         <p:spPr>
           <a:xfrm>
             <a:off x="685800" y="1990725"/>
-            <a:ext cx="10820400" cy="2857500"/>
+            <a:ext cx="5048250" cy="4448175"/>
           </a:xfrm>
           <a:prstGeom prst="roundRect">
             <a:avLst>
-              <a:gd name="adj" fmla="val 9333"/>
+              <a:gd name="adj" fmla="val 5996"/>
             </a:avLst>
           </a:prstGeom>
           <a:solidFill>
@@ -12982,9 +13331,31 @@
           </a:effectLst>
         </p:spPr>
       </p:sp>
+      <p:sp>
+        <p:nvSpPr>
+          <p:cNvPr id="7" name=""/>
+          <p:cNvSpPr/>
+          <p:nvPr/>
+        </p:nvSpPr>
+        <p:spPr>
+          <a:xfrm>
+            <a:off x="914400" y="2514600"/>
+            <a:ext cx="2247900" cy="1400175"/>
+          </a:xfrm>
+          <a:prstGeom prst="roundRect">
+            <a:avLst>
+              <a:gd name="adj" fmla="val 12245"/>
+            </a:avLst>
+          </a:prstGeom>
+          <a:solidFill>
+            <a:srgbClr val="FFE8DC"/>
+          </a:solidFill>
+          <a:ln/>
+        </p:spPr>
+      </p:sp>
       <p:pic>
         <p:nvPicPr>
-          <p:cNvPr id="7" name="Image 0" descr="家具">    </p:cNvPr>
+          <p:cNvPr id="8" name="Image 0" descr="いす">    </p:cNvPr>
           <p:cNvPicPr>
             <a:picLocks noChangeAspect="1"/>
           </p:cNvPicPr>
@@ -12998,8 +13369,8 @@
         </p:blipFill>
         <p:spPr>
           <a:xfrm>
-            <a:off x="971550" y="2466975"/>
-            <a:ext cx="1905000" cy="1905000"/>
+            <a:off x="1543050" y="2571750"/>
+            <a:ext cx="990600" cy="990600"/>
           </a:xfrm>
           <a:prstGeom prst="rect">
             <a:avLst/>
@@ -13008,70 +13379,35 @@
       </p:pic>
       <p:sp>
         <p:nvSpPr>
-          <p:cNvPr id="8" name=""/>
-          <p:cNvSpPr txBox="1"/>
-          <p:nvPr/>
-        </p:nvSpPr>
-        <p:spPr>
-          <a:xfrm>
-            <a:off x="3162300" y="2667000"/>
-            <a:ext cx="5600700" cy="419100"/>
-          </a:xfrm>
-          <a:prstGeom prst="rect">
-            <a:avLst/>
-          </a:prstGeom>
-          <a:noFill/>
-          <a:ln/>
-        </p:spPr>
-        <p:txBody>
-          <a:bodyPr wrap="square" lIns="0" tIns="0" rIns="0" bIns="0" anchor="ctr"/>
-          <a:lstStyle/>
-          <a:p>
-            <a:pPr/>
-            <a:r>
-              <a:rPr sz="2250" b="1">
-                <a:solidFill>
-                  <a:srgbClr val="1C2340"/>
-                </a:solidFill>
-                <a:latin typeface="Noto Sans JP"/>
-                <a:ea typeface="Noto Sans JP"/>
-              </a:rPr>
-              <a:t>「オンラインで家具を買ったんだ」</a:t>
-            </a:r>
-          </a:p>
-        </p:txBody>
-      </p:sp>
-      <p:sp>
-        <p:nvSpPr>
           <p:cNvPr id="9" name=""/>
           <p:cNvSpPr txBox="1"/>
           <p:nvPr/>
         </p:nvSpPr>
         <p:spPr>
           <a:xfrm>
-            <a:off x="3162300" y="3486150"/>
-            <a:ext cx="2362200" cy="571500"/>
-          </a:xfrm>
-          <a:prstGeom prst="rect">
-            <a:avLst/>
-          </a:prstGeom>
-          <a:noFill/>
-          <a:ln/>
-        </p:spPr>
-        <p:txBody>
-          <a:bodyPr wrap="square" lIns="0" tIns="0" rIns="0" bIns="0" anchor="ctr"/>
-          <a:lstStyle/>
-          <a:p>
-            <a:pPr/>
-            <a:r>
-              <a:rPr sz="3450" b="1">
-                <a:solidFill>
-                  <a:srgbClr val="1C2340"/>
-                </a:solidFill>
-                <a:latin typeface="DM Sans"/>
-                <a:ea typeface="DM Sans"/>
-              </a:rPr>
-              <a:t>I bought</a:t>
+            <a:off x="1781175" y="3562350"/>
+            <a:ext cx="942975" cy="276225"/>
+          </a:xfrm>
+          <a:prstGeom prst="rect">
+            <a:avLst/>
+          </a:prstGeom>
+          <a:noFill/>
+          <a:ln/>
+        </p:spPr>
+        <p:txBody>
+          <a:bodyPr wrap="square" lIns="0" tIns="0" rIns="0" bIns="0" anchor="ctr"/>
+          <a:lstStyle/>
+          <a:p>
+            <a:pPr/>
+            <a:r>
+              <a:rPr sz="1650" b="1">
+                <a:solidFill>
+                  <a:srgbClr val="1C2340"/>
+                </a:solidFill>
+                <a:latin typeface="DM Sans"/>
+                <a:ea typeface="DM Sans"/>
+              </a:rPr>
+              <a:t>chair</a:t>
             </a:r>
           </a:p>
         </p:txBody>
@@ -13084,55 +13420,44 @@
         </p:nvSpPr>
         <p:spPr>
           <a:xfrm>
-            <a:off x="5067300" y="3409950"/>
-            <a:ext cx="1333500" cy="723900"/>
+            <a:off x="3257550" y="2514600"/>
+            <a:ext cx="2247900" cy="1400175"/>
           </a:xfrm>
           <a:prstGeom prst="roundRect">
             <a:avLst>
-              <a:gd name="adj" fmla="val 21053"/>
+              <a:gd name="adj" fmla="val 12245"/>
             </a:avLst>
           </a:prstGeom>
           <a:solidFill>
-            <a:srgbClr val="9AA1B6"/>
+            <a:srgbClr val="FFE8DC"/>
           </a:solidFill>
           <a:ln/>
         </p:spPr>
       </p:sp>
-      <p:sp>
-        <p:nvSpPr>
-          <p:cNvPr id="11" name=""/>
-          <p:cNvSpPr txBox="1"/>
-          <p:nvPr/>
-        </p:nvSpPr>
-        <p:spPr>
-          <a:xfrm>
-            <a:off x="5238750" y="3562350"/>
-            <a:ext cx="1000125" cy="419100"/>
-          </a:xfrm>
-          <a:prstGeom prst="rect">
-            <a:avLst/>
-          </a:prstGeom>
-          <a:noFill/>
-          <a:ln/>
-        </p:spPr>
-        <p:txBody>
-          <a:bodyPr wrap="square" lIns="0" tIns="0" rIns="0" bIns="0" anchor="ctr"/>
-          <a:lstStyle/>
-          <a:p>
-            <a:pPr algn="ctr"/>
-            <a:r>
-              <a:rPr sz="2250" b="1">
-                <a:solidFill>
-                  <a:srgbClr val="FFFFFF"/>
-                </a:solidFill>
-                <a:latin typeface="Noto Sans JP"/>
-                <a:ea typeface="Noto Sans JP"/>
-              </a:rPr>
-              <a:t>なし</a:t>
-            </a:r>
-          </a:p>
-        </p:txBody>
-      </p:sp>
+      <p:pic>
+        <p:nvPicPr>
+          <p:cNvPr id="11" name="Image 1" descr="テーブル">    </p:cNvPr>
+          <p:cNvPicPr>
+            <a:picLocks noChangeAspect="1"/>
+          </p:cNvPicPr>
+          <p:nvPr/>
+        </p:nvPicPr>
+        <p:blipFill>
+          <a:blip r:embed="rId2"/>
+          <a:stretch>
+            <a:fillRect/>
+          </a:stretch>
+        </p:blipFill>
+        <p:spPr>
+          <a:xfrm>
+            <a:off x="3886200" y="2571750"/>
+            <a:ext cx="990600" cy="990600"/>
+          </a:xfrm>
+          <a:prstGeom prst="rect">
+            <a:avLst/>
+          </a:prstGeom>
+        </p:spPr>
+      </p:pic>
       <p:sp>
         <p:nvSpPr>
           <p:cNvPr id="12" name=""/>
@@ -13141,29 +13466,29 @@
         </p:nvSpPr>
         <p:spPr>
           <a:xfrm>
-            <a:off x="6553200" y="3486150"/>
-            <a:ext cx="4257675" cy="571500"/>
-          </a:xfrm>
-          <a:prstGeom prst="rect">
-            <a:avLst/>
-          </a:prstGeom>
-          <a:noFill/>
-          <a:ln/>
-        </p:spPr>
-        <p:txBody>
-          <a:bodyPr wrap="square" lIns="0" tIns="0" rIns="0" bIns="0" anchor="ctr"/>
-          <a:lstStyle/>
-          <a:p>
-            <a:pPr/>
-            <a:r>
-              <a:rPr sz="3450" b="1">
-                <a:solidFill>
-                  <a:srgbClr val="1C2340"/>
-                </a:solidFill>
-                <a:latin typeface="DM Sans"/>
-                <a:ea typeface="DM Sans"/>
-              </a:rPr>
-              <a:t>furniture online.</a:t>
+            <a:off x="4124325" y="3562350"/>
+            <a:ext cx="942975" cy="276225"/>
+          </a:xfrm>
+          <a:prstGeom prst="rect">
+            <a:avLst/>
+          </a:prstGeom>
+          <a:noFill/>
+          <a:ln/>
+        </p:spPr>
+        <p:txBody>
+          <a:bodyPr wrap="square" lIns="0" tIns="0" rIns="0" bIns="0" anchor="ctr"/>
+          <a:lstStyle/>
+          <a:p>
+            <a:pPr/>
+            <a:r>
+              <a:rPr sz="1650" b="1">
+                <a:solidFill>
+                  <a:srgbClr val="1C2340"/>
+                </a:solidFill>
+                <a:latin typeface="DM Sans"/>
+                <a:ea typeface="DM Sans"/>
+              </a:rPr>
+              <a:t>table</a:t>
             </a:r>
           </a:p>
         </p:txBody>
@@ -13176,12 +13501,234 @@
         </p:nvSpPr>
         <p:spPr>
           <a:xfrm>
-            <a:off x="685800" y="5057775"/>
-            <a:ext cx="10820400" cy="1428750"/>
+            <a:off x="914400" y="4010025"/>
+            <a:ext cx="2247900" cy="1400175"/>
           </a:xfrm>
           <a:prstGeom prst="roundRect">
             <a:avLst>
-              <a:gd name="adj" fmla="val 18667"/>
+              <a:gd name="adj" fmla="val 12245"/>
+            </a:avLst>
+          </a:prstGeom>
+          <a:solidFill>
+            <a:srgbClr val="FFE8DC"/>
+          </a:solidFill>
+          <a:ln/>
+        </p:spPr>
+      </p:sp>
+      <p:pic>
+        <p:nvPicPr>
+          <p:cNvPr id="14" name="Image 2" descr="ベッド">    </p:cNvPr>
+          <p:cNvPicPr>
+            <a:picLocks noChangeAspect="1"/>
+          </p:cNvPicPr>
+          <p:nvPr/>
+        </p:nvPicPr>
+        <p:blipFill>
+          <a:blip r:embed="rId3"/>
+          <a:stretch>
+            <a:fillRect/>
+          </a:stretch>
+        </p:blipFill>
+        <p:spPr>
+          <a:xfrm>
+            <a:off x="1543050" y="4067175"/>
+            <a:ext cx="990600" cy="990600"/>
+          </a:xfrm>
+          <a:prstGeom prst="rect">
+            <a:avLst/>
+          </a:prstGeom>
+        </p:spPr>
+      </p:pic>
+      <p:sp>
+        <p:nvSpPr>
+          <p:cNvPr id="15" name=""/>
+          <p:cNvSpPr txBox="1"/>
+          <p:nvPr/>
+        </p:nvSpPr>
+        <p:spPr>
+          <a:xfrm>
+            <a:off x="1847850" y="5057775"/>
+            <a:ext cx="790575" cy="276225"/>
+          </a:xfrm>
+          <a:prstGeom prst="rect">
+            <a:avLst/>
+          </a:prstGeom>
+          <a:noFill/>
+          <a:ln/>
+        </p:spPr>
+        <p:txBody>
+          <a:bodyPr wrap="square" lIns="0" tIns="0" rIns="0" bIns="0" anchor="ctr"/>
+          <a:lstStyle/>
+          <a:p>
+            <a:pPr/>
+            <a:r>
+              <a:rPr sz="1650" b="1">
+                <a:solidFill>
+                  <a:srgbClr val="1C2340"/>
+                </a:solidFill>
+                <a:latin typeface="DM Sans"/>
+                <a:ea typeface="DM Sans"/>
+              </a:rPr>
+              <a:t>bed</a:t>
+            </a:r>
+          </a:p>
+        </p:txBody>
+      </p:sp>
+      <p:sp>
+        <p:nvSpPr>
+          <p:cNvPr id="16" name=""/>
+          <p:cNvSpPr/>
+          <p:nvPr/>
+        </p:nvSpPr>
+        <p:spPr>
+          <a:xfrm>
+            <a:off x="3257550" y="4010025"/>
+            <a:ext cx="2247900" cy="1400175"/>
+          </a:xfrm>
+          <a:prstGeom prst="roundRect">
+            <a:avLst>
+              <a:gd name="adj" fmla="val 12245"/>
+            </a:avLst>
+          </a:prstGeom>
+          <a:solidFill>
+            <a:srgbClr val="FFE8DC"/>
+          </a:solidFill>
+          <a:ln/>
+        </p:spPr>
+      </p:sp>
+      <p:pic>
+        <p:nvPicPr>
+          <p:cNvPr id="17" name="Image 3" descr="ソファ">    </p:cNvPr>
+          <p:cNvPicPr>
+            <a:picLocks noChangeAspect="1"/>
+          </p:cNvPicPr>
+          <p:nvPr/>
+        </p:nvPicPr>
+        <p:blipFill>
+          <a:blip r:embed="rId4"/>
+          <a:stretch>
+            <a:fillRect/>
+          </a:stretch>
+        </p:blipFill>
+        <p:spPr>
+          <a:xfrm>
+            <a:off x="3886200" y="4067175"/>
+            <a:ext cx="990600" cy="990600"/>
+          </a:xfrm>
+          <a:prstGeom prst="rect">
+            <a:avLst/>
+          </a:prstGeom>
+        </p:spPr>
+      </p:pic>
+      <p:sp>
+        <p:nvSpPr>
+          <p:cNvPr id="18" name=""/>
+          <p:cNvSpPr txBox="1"/>
+          <p:nvPr/>
+        </p:nvSpPr>
+        <p:spPr>
+          <a:xfrm>
+            <a:off x="4162425" y="5057775"/>
+            <a:ext cx="847725" cy="276225"/>
+          </a:xfrm>
+          <a:prstGeom prst="rect">
+            <a:avLst/>
+          </a:prstGeom>
+          <a:noFill/>
+          <a:ln/>
+        </p:spPr>
+        <p:txBody>
+          <a:bodyPr wrap="square" lIns="0" tIns="0" rIns="0" bIns="0" anchor="ctr"/>
+          <a:lstStyle/>
+          <a:p>
+            <a:pPr/>
+            <a:r>
+              <a:rPr sz="1650" b="1">
+                <a:solidFill>
+                  <a:srgbClr val="1C2340"/>
+                </a:solidFill>
+                <a:latin typeface="DM Sans"/>
+                <a:ea typeface="DM Sans"/>
+              </a:rPr>
+              <a:t>sofa</a:t>
+            </a:r>
+          </a:p>
+        </p:txBody>
+      </p:sp>
+      <p:sp>
+        <p:nvSpPr>
+          <p:cNvPr id="19" name=""/>
+          <p:cNvSpPr txBox="1"/>
+          <p:nvPr/>
+        </p:nvSpPr>
+        <p:spPr>
+          <a:xfrm>
+            <a:off x="1152525" y="5543550"/>
+            <a:ext cx="4124325" cy="371475"/>
+          </a:xfrm>
+          <a:prstGeom prst="rect">
+            <a:avLst/>
+          </a:prstGeom>
+          <a:noFill/>
+          <a:ln/>
+        </p:spPr>
+        <p:txBody>
+          <a:bodyPr wrap="square" lIns="0" tIns="0" rIns="0" bIns="0" anchor="ctr"/>
+          <a:lstStyle/>
+          <a:p>
+            <a:pPr algn="ctr"/>
+            <a:r>
+              <a:rPr sz="1950" b="1">
+                <a:solidFill>
+                  <a:srgbClr val="1C2340"/>
+                </a:solidFill>
+                <a:latin typeface="Noto Sans JP"/>
+                <a:ea typeface="Noto Sans JP"/>
+              </a:rPr>
+              <a:t>まとめて </a:t>
+            </a:r>
+            <a:pPr algn="ctr"/>
+            <a:r>
+              <a:rPr sz="2250" b="1">
+                <a:solidFill>
+                  <a:srgbClr val="1C2340"/>
+                </a:solidFill>
+                <a:highlight>
+                  <a:srgbClr val="FFD9C9"/>
+                </a:highlight>
+                <a:latin typeface="DM Sans"/>
+                <a:ea typeface="DM Sans"/>
+              </a:rPr>
+              <a:t>furniture</a:t>
+            </a:r>
+            <a:pPr algn="ctr"/>
+            <a:r>
+              <a:rPr sz="1950" b="1">
+                <a:solidFill>
+                  <a:srgbClr val="1C2340"/>
+                </a:solidFill>
+                <a:latin typeface="Noto Sans JP"/>
+                <a:ea typeface="Noto Sans JP"/>
+              </a:rPr>
+              <a:t>（家具）</a:t>
+            </a:r>
+          </a:p>
+        </p:txBody>
+      </p:sp>
+      <p:sp>
+        <p:nvSpPr>
+          <p:cNvPr id="20" name=""/>
+          <p:cNvSpPr/>
+          <p:nvPr/>
+        </p:nvSpPr>
+        <p:spPr>
+          <a:xfrm>
+            <a:off x="5943600" y="1990725"/>
+            <a:ext cx="5562600" cy="1028700"/>
+          </a:xfrm>
+          <a:prstGeom prst="roundRect">
+            <a:avLst>
+              <a:gd name="adj" fmla="val 25926"/>
             </a:avLst>
           </a:prstGeom>
           <a:solidFill>
@@ -13199,195 +13746,700 @@
       </p:sp>
       <p:sp>
         <p:nvSpPr>
-          <p:cNvPr id="14" name=""/>
+          <p:cNvPr id="21" name=""/>
           <p:cNvSpPr/>
           <p:nvPr/>
         </p:nvSpPr>
         <p:spPr>
           <a:xfrm>
-            <a:off x="990600" y="5353050"/>
-            <a:ext cx="685800" cy="371475"/>
+            <a:off x="6153150" y="2324100"/>
+            <a:ext cx="361950" cy="361950"/>
+          </a:xfrm>
+          <a:prstGeom prst="ellipse">
+            <a:avLst/>
+          </a:prstGeom>
+          <a:solidFill>
+            <a:srgbClr val="E8461E"/>
+          </a:solidFill>
+          <a:ln/>
+        </p:spPr>
+      </p:sp>
+      <p:sp>
+        <p:nvSpPr>
+          <p:cNvPr id="22" name=""/>
+          <p:cNvSpPr txBox="1"/>
+          <p:nvPr/>
+        </p:nvSpPr>
+        <p:spPr>
+          <a:xfrm>
+            <a:off x="6124575" y="2381250"/>
+            <a:ext cx="419100" cy="238125"/>
+          </a:xfrm>
+          <a:prstGeom prst="rect">
+            <a:avLst/>
+          </a:prstGeom>
+          <a:noFill/>
+          <a:ln/>
+        </p:spPr>
+        <p:txBody>
+          <a:bodyPr wrap="square" lIns="0" tIns="0" rIns="0" bIns="0" anchor="ctr"/>
+          <a:lstStyle/>
+          <a:p>
+            <a:pPr algn="ctr"/>
+            <a:r>
+              <a:rPr sz="1450" b="1">
+                <a:solidFill>
+                  <a:srgbClr val="FFFFFF"/>
+                </a:solidFill>
+                <a:latin typeface="DM Sans"/>
+                <a:ea typeface="DM Sans"/>
+              </a:rPr>
+              <a:t>1</a:t>
+            </a:r>
+          </a:p>
+        </p:txBody>
+      </p:sp>
+      <p:sp>
+        <p:nvSpPr>
+          <p:cNvPr id="23" name=""/>
+          <p:cNvSpPr txBox="1"/>
+          <p:nvPr/>
+        </p:nvSpPr>
+        <p:spPr>
+          <a:xfrm>
+            <a:off x="6648450" y="2219325"/>
+            <a:ext cx="2971800" cy="276225"/>
+          </a:xfrm>
+          <a:prstGeom prst="rect">
+            <a:avLst/>
+          </a:prstGeom>
+          <a:noFill/>
+          <a:ln/>
+        </p:spPr>
+        <p:txBody>
+          <a:bodyPr wrap="square" lIns="0" tIns="0" rIns="0" bIns="0" anchor="ctr"/>
+          <a:lstStyle/>
+          <a:p>
+            <a:pPr/>
+            <a:r>
+              <a:rPr sz="1500">
+                <a:solidFill>
+                  <a:srgbClr val="1C2340"/>
+                </a:solidFill>
+                <a:latin typeface="Noto Sans JP"/>
+                <a:ea typeface="Noto Sans JP"/>
+              </a:rPr>
+              <a:t>家具を</a:t>
+            </a:r>
+            <a:pPr/>
+            <a:r>
+              <a:rPr sz="1500" b="1">
+                <a:solidFill>
+                  <a:srgbClr val="1C2340"/>
+                </a:solidFill>
+                <a:latin typeface="Noto Sans JP"/>
+                <a:ea typeface="Noto Sans JP"/>
+              </a:rPr>
+              <a:t>まとめて指す</a:t>
+            </a:r>
+            <a:pPr/>
+            <a:r>
+              <a:rPr sz="1500">
+                <a:solidFill>
+                  <a:srgbClr val="1C2340"/>
+                </a:solidFill>
+                <a:latin typeface="Noto Sans JP"/>
+                <a:ea typeface="Noto Sans JP"/>
+              </a:rPr>
+              <a:t>言葉。</a:t>
+            </a:r>
+          </a:p>
+        </p:txBody>
+      </p:sp>
+      <p:sp>
+        <p:nvSpPr>
+          <p:cNvPr id="24" name=""/>
+          <p:cNvSpPr txBox="1"/>
+          <p:nvPr/>
+        </p:nvSpPr>
+        <p:spPr>
+          <a:xfrm>
+            <a:off x="6648450" y="2505075"/>
+            <a:ext cx="5095875" cy="276225"/>
+          </a:xfrm>
+          <a:prstGeom prst="rect">
+            <a:avLst/>
+          </a:prstGeom>
+          <a:noFill/>
+          <a:ln/>
+        </p:spPr>
+        <p:txBody>
+          <a:bodyPr wrap="square" lIns="0" tIns="0" rIns="0" bIns="0" anchor="ctr"/>
+          <a:lstStyle/>
+          <a:p>
+            <a:pPr/>
+            <a:r>
+              <a:rPr sz="1500">
+                <a:solidFill>
+                  <a:srgbClr val="1C2340"/>
+                </a:solidFill>
+                <a:latin typeface="Noto Sans JP"/>
+                <a:ea typeface="Noto Sans JP"/>
+              </a:rPr>
+              <a:t>s はつかないけど、いくつかの家具のこともある</a:t>
+            </a:r>
+          </a:p>
+        </p:txBody>
+      </p:sp>
+      <p:sp>
+        <p:nvSpPr>
+          <p:cNvPr id="25" name=""/>
+          <p:cNvSpPr/>
+          <p:nvPr/>
+        </p:nvSpPr>
+        <p:spPr>
+          <a:xfrm>
+            <a:off x="5943600" y="3133725"/>
+            <a:ext cx="5562600" cy="1028700"/>
           </a:xfrm>
           <a:prstGeom prst="roundRect">
             <a:avLst>
-              <a:gd name="adj" fmla="val 50000"/>
+              <a:gd name="adj" fmla="val 25926"/>
             </a:avLst>
           </a:prstGeom>
           <a:solidFill>
-            <a:srgbClr val="FFE3D8"/>
+            <a:srgbClr val="FFFFFF"/>
           </a:solidFill>
           <a:ln/>
-        </p:spPr>
-      </p:sp>
-      <p:sp>
-        <p:nvSpPr>
-          <p:cNvPr id="15" name=""/>
-          <p:cNvSpPr txBox="1"/>
-          <p:nvPr/>
-        </p:nvSpPr>
-        <p:spPr>
-          <a:xfrm>
-            <a:off x="1162050" y="5410200"/>
-            <a:ext cx="733425" cy="247650"/>
-          </a:xfrm>
-          <a:prstGeom prst="rect">
-            <a:avLst/>
-          </a:prstGeom>
-          <a:noFill/>
-          <a:ln/>
-        </p:spPr>
-        <p:txBody>
-          <a:bodyPr wrap="square" lIns="0" tIns="0" rIns="0" bIns="0" anchor="ctr"/>
-          <a:lstStyle/>
-          <a:p>
-            <a:pPr/>
-            <a:r>
-              <a:rPr sz="1350" b="1">
-                <a:solidFill>
-                  <a:srgbClr val="C8401A"/>
-                </a:solidFill>
-                <a:latin typeface="Noto Sans JP"/>
-                <a:ea typeface="Noto Sans JP"/>
-              </a:rPr>
-              <a:t>答え</a:t>
-            </a:r>
-          </a:p>
-        </p:txBody>
-      </p:sp>
-      <p:sp>
-        <p:nvSpPr>
-          <p:cNvPr id="16" name=""/>
-          <p:cNvSpPr txBox="1"/>
-          <p:nvPr/>
-        </p:nvSpPr>
-        <p:spPr>
-          <a:xfrm>
-            <a:off x="1809750" y="5391150"/>
-            <a:ext cx="3571875" cy="295275"/>
-          </a:xfrm>
-          <a:prstGeom prst="rect">
-            <a:avLst/>
-          </a:prstGeom>
-          <a:noFill/>
-          <a:ln/>
-        </p:spPr>
-        <p:txBody>
-          <a:bodyPr wrap="square" lIns="0" tIns="0" rIns="0" bIns="0" anchor="ctr"/>
-          <a:lstStyle/>
-          <a:p>
-            <a:pPr/>
-            <a:r>
-              <a:rPr sz="1800" b="1">
-                <a:solidFill>
-                  <a:srgbClr val="1C2340"/>
-                </a:solidFill>
-                <a:latin typeface="DM Sans"/>
-                <a:ea typeface="DM Sans"/>
-              </a:rPr>
-              <a:t>I bought furniture online.</a:t>
-            </a:r>
-          </a:p>
-        </p:txBody>
-      </p:sp>
-      <p:sp>
-        <p:nvSpPr>
-          <p:cNvPr id="17" name=""/>
+          <a:effectLst>
+            <a:outerShdw sx="100000" sy="100000" kx="0" ky="0" algn="bl" rotWithShape="0" blurRad="152400" dist="50800" dir="5400000">
+              <a:srgbClr val="22304A">
+                <a:alpha val="10000"/>
+              </a:srgbClr>
+            </a:outerShdw>
+          </a:effectLst>
+        </p:spPr>
+      </p:sp>
+      <p:sp>
+        <p:nvSpPr>
+          <p:cNvPr id="26" name=""/>
           <p:cNvSpPr/>
           <p:nvPr/>
         </p:nvSpPr>
         <p:spPr>
           <a:xfrm>
-            <a:off x="990600" y="5819775"/>
-            <a:ext cx="685800" cy="371475"/>
+            <a:off x="6153150" y="3467100"/>
+            <a:ext cx="361950" cy="361950"/>
+          </a:xfrm>
+          <a:prstGeom prst="ellipse">
+            <a:avLst/>
+          </a:prstGeom>
+          <a:solidFill>
+            <a:srgbClr val="E8461E"/>
+          </a:solidFill>
+          <a:ln/>
+        </p:spPr>
+      </p:sp>
+      <p:sp>
+        <p:nvSpPr>
+          <p:cNvPr id="27" name=""/>
+          <p:cNvSpPr txBox="1"/>
+          <p:nvPr/>
+        </p:nvSpPr>
+        <p:spPr>
+          <a:xfrm>
+            <a:off x="6105525" y="3514725"/>
+            <a:ext cx="466725" cy="238125"/>
+          </a:xfrm>
+          <a:prstGeom prst="rect">
+            <a:avLst/>
+          </a:prstGeom>
+          <a:noFill/>
+          <a:ln/>
+        </p:spPr>
+        <p:txBody>
+          <a:bodyPr wrap="square" lIns="0" tIns="0" rIns="0" bIns="0" anchor="ctr"/>
+          <a:lstStyle/>
+          <a:p>
+            <a:pPr algn="ctr"/>
+            <a:r>
+              <a:rPr sz="1450" b="1">
+                <a:solidFill>
+                  <a:srgbClr val="FFFFFF"/>
+                </a:solidFill>
+                <a:latin typeface="DM Sans"/>
+                <a:ea typeface="DM Sans"/>
+              </a:rPr>
+              <a:t>2</a:t>
+            </a:r>
+          </a:p>
+        </p:txBody>
+      </p:sp>
+      <p:sp>
+        <p:nvSpPr>
+          <p:cNvPr id="28" name=""/>
+          <p:cNvSpPr txBox="1"/>
+          <p:nvPr/>
+        </p:nvSpPr>
+        <p:spPr>
+          <a:xfrm>
+            <a:off x="6648450" y="3352800"/>
+            <a:ext cx="4676775" cy="276225"/>
+          </a:xfrm>
+          <a:prstGeom prst="rect">
+            <a:avLst/>
+          </a:prstGeom>
+          <a:noFill/>
+          <a:ln/>
+        </p:spPr>
+        <p:txBody>
+          <a:bodyPr wrap="square" lIns="0" tIns="0" rIns="0" bIns="0" anchor="ctr"/>
+          <a:lstStyle/>
+          <a:p>
+            <a:pPr/>
+            <a:r>
+              <a:rPr sz="1500">
+                <a:solidFill>
+                  <a:srgbClr val="1C2340"/>
+                </a:solidFill>
+                <a:latin typeface="Noto Sans JP"/>
+                <a:ea typeface="Noto Sans JP"/>
+              </a:rPr>
+              <a:t>数えられない名詞なので、</a:t>
+            </a:r>
+            <a:pPr/>
+            <a:r>
+              <a:rPr sz="1500" b="1">
+                <a:solidFill>
+                  <a:srgbClr val="1C2340"/>
+                </a:solidFill>
+                <a:latin typeface="DM Sans"/>
+                <a:ea typeface="DM Sans"/>
+              </a:rPr>
+              <a:t>a</a:t>
+            </a:r>
+            <a:pPr/>
+            <a:r>
+              <a:rPr sz="1500" b="1">
+                <a:solidFill>
+                  <a:srgbClr val="1C2340"/>
+                </a:solidFill>
+                <a:latin typeface="Noto Sans JP"/>
+                <a:ea typeface="Noto Sans JP"/>
+              </a:rPr>
+              <a:t> も </a:t>
+            </a:r>
+            <a:pPr/>
+            <a:r>
+              <a:rPr sz="1500" b="1">
+                <a:solidFill>
+                  <a:srgbClr val="1C2340"/>
+                </a:solidFill>
+                <a:latin typeface="DM Sans"/>
+                <a:ea typeface="DM Sans"/>
+              </a:rPr>
+              <a:t>s</a:t>
+            </a:r>
+            <a:pPr/>
+            <a:r>
+              <a:rPr sz="1500" b="1">
+                <a:solidFill>
+                  <a:srgbClr val="1C2340"/>
+                </a:solidFill>
+                <a:latin typeface="Noto Sans JP"/>
+                <a:ea typeface="Noto Sans JP"/>
+              </a:rPr>
+              <a:t> もつけない</a:t>
+            </a:r>
+          </a:p>
+        </p:txBody>
+      </p:sp>
+      <p:sp>
+        <p:nvSpPr>
+          <p:cNvPr id="29" name=""/>
+          <p:cNvSpPr txBox="1"/>
+          <p:nvPr/>
+        </p:nvSpPr>
+        <p:spPr>
+          <a:xfrm>
+            <a:off x="6648450" y="3676650"/>
+            <a:ext cx="3105150" cy="247650"/>
+          </a:xfrm>
+          <a:prstGeom prst="rect">
+            <a:avLst/>
+          </a:prstGeom>
+          <a:noFill/>
+          <a:ln/>
+        </p:spPr>
+        <p:txBody>
+          <a:bodyPr wrap="square" lIns="0" tIns="0" rIns="0" bIns="0" anchor="ctr"/>
+          <a:lstStyle/>
+          <a:p>
+            <a:pPr/>
+            <a:r>
+              <a:rPr sz="1500" b="1">
+                <a:solidFill>
+                  <a:srgbClr val="8A90A8"/>
+                </a:solidFill>
+                <a:latin typeface="DM Sans"/>
+                <a:ea typeface="DM Sans"/>
+              </a:rPr>
+              <a:t>× a furniture × furnitures</a:t>
+            </a:r>
+          </a:p>
+        </p:txBody>
+      </p:sp>
+      <p:sp>
+        <p:nvSpPr>
+          <p:cNvPr id="30" name=""/>
+          <p:cNvSpPr/>
+          <p:nvPr/>
+        </p:nvSpPr>
+        <p:spPr>
+          <a:xfrm>
+            <a:off x="5943600" y="4276725"/>
+            <a:ext cx="5562600" cy="1028700"/>
           </a:xfrm>
           <a:prstGeom prst="roundRect">
             <a:avLst>
-              <a:gd name="adj" fmla="val 50000"/>
+              <a:gd name="adj" fmla="val 25926"/>
             </a:avLst>
           </a:prstGeom>
           <a:solidFill>
-            <a:srgbClr val="DCEFFC"/>
+            <a:srgbClr val="FFFFFF"/>
           </a:solidFill>
           <a:ln/>
-        </p:spPr>
-      </p:sp>
-      <p:sp>
-        <p:nvSpPr>
-          <p:cNvPr id="18" name=""/>
-          <p:cNvSpPr txBox="1"/>
-          <p:nvPr/>
-        </p:nvSpPr>
-        <p:spPr>
-          <a:xfrm>
-            <a:off x="1162050" y="5876925"/>
-            <a:ext cx="733425" cy="247650"/>
-          </a:xfrm>
-          <a:prstGeom prst="rect">
-            <a:avLst/>
-          </a:prstGeom>
-          <a:noFill/>
-          <a:ln/>
-        </p:spPr>
-        <p:txBody>
-          <a:bodyPr wrap="square" lIns="0" tIns="0" rIns="0" bIns="0" anchor="ctr"/>
-          <a:lstStyle/>
-          <a:p>
-            <a:pPr/>
-            <a:r>
-              <a:rPr sz="1350" b="1">
-                <a:solidFill>
-                  <a:srgbClr val="1F6FB2"/>
-                </a:solidFill>
-                <a:latin typeface="Noto Sans JP"/>
-                <a:ea typeface="Noto Sans JP"/>
-              </a:rPr>
-              <a:t>理由</a:t>
-            </a:r>
-          </a:p>
-        </p:txBody>
-      </p:sp>
-      <p:sp>
-        <p:nvSpPr>
-          <p:cNvPr id="19" name=""/>
-          <p:cNvSpPr txBox="1"/>
-          <p:nvPr/>
-        </p:nvSpPr>
-        <p:spPr>
-          <a:xfrm>
-            <a:off x="1809750" y="5838825"/>
-            <a:ext cx="8696325" cy="333375"/>
-          </a:xfrm>
-          <a:prstGeom prst="rect">
-            <a:avLst/>
-          </a:prstGeom>
-          <a:noFill/>
-          <a:ln/>
-        </p:spPr>
-        <p:txBody>
-          <a:bodyPr wrap="square" lIns="0" tIns="0" rIns="0" bIns="0" anchor="ctr"/>
-          <a:lstStyle/>
-          <a:p>
-            <a:pPr/>
-            <a:r>
-              <a:rPr sz="1800">
-                <a:solidFill>
-                  <a:srgbClr val="1C2340"/>
-                </a:solidFill>
-                <a:latin typeface="Noto Sans JP"/>
-                <a:ea typeface="Noto Sans JP"/>
-              </a:rPr>
-              <a:t>家具は1つとは限らない（一発では分からない）→ 不特定なので</a:t>
-            </a:r>
-            <a:pPr/>
-            <a:r>
-              <a:rPr sz="1800" b="1">
-                <a:solidFill>
-                  <a:srgbClr val="1C2340"/>
-                </a:solidFill>
-                <a:latin typeface="Noto Sans JP"/>
-                <a:ea typeface="Noto Sans JP"/>
-              </a:rPr>
-              <a:t>無冠詞</a:t>
+          <a:effectLst>
+            <a:outerShdw sx="100000" sy="100000" kx="0" ky="0" algn="bl" rotWithShape="0" blurRad="152400" dist="50800" dir="5400000">
+              <a:srgbClr val="22304A">
+                <a:alpha val="10000"/>
+              </a:srgbClr>
+            </a:outerShdw>
+          </a:effectLst>
+        </p:spPr>
+      </p:sp>
+      <p:sp>
+        <p:nvSpPr>
+          <p:cNvPr id="31" name=""/>
+          <p:cNvSpPr/>
+          <p:nvPr/>
+        </p:nvSpPr>
+        <p:spPr>
+          <a:xfrm>
+            <a:off x="6153150" y="4600575"/>
+            <a:ext cx="361950" cy="361950"/>
+          </a:xfrm>
+          <a:prstGeom prst="ellipse">
+            <a:avLst/>
+          </a:prstGeom>
+          <a:solidFill>
+            <a:srgbClr val="E8461E"/>
+          </a:solidFill>
+          <a:ln/>
+        </p:spPr>
+      </p:sp>
+      <p:sp>
+        <p:nvSpPr>
+          <p:cNvPr id="32" name=""/>
+          <p:cNvSpPr txBox="1"/>
+          <p:nvPr/>
+        </p:nvSpPr>
+        <p:spPr>
+          <a:xfrm>
+            <a:off x="6105525" y="4657725"/>
+            <a:ext cx="466725" cy="238125"/>
+          </a:xfrm>
+          <a:prstGeom prst="rect">
+            <a:avLst/>
+          </a:prstGeom>
+          <a:noFill/>
+          <a:ln/>
+        </p:spPr>
+        <p:txBody>
+          <a:bodyPr wrap="square" lIns="0" tIns="0" rIns="0" bIns="0" anchor="ctr"/>
+          <a:lstStyle/>
+          <a:p>
+            <a:pPr algn="ctr"/>
+            <a:r>
+              <a:rPr sz="1450" b="1">
+                <a:solidFill>
+                  <a:srgbClr val="FFFFFF"/>
+                </a:solidFill>
+                <a:latin typeface="DM Sans"/>
+                <a:ea typeface="DM Sans"/>
+              </a:rPr>
+              <a:t>3</a:t>
+            </a:r>
+          </a:p>
+        </p:txBody>
+      </p:sp>
+      <p:sp>
+        <p:nvSpPr>
+          <p:cNvPr id="33" name=""/>
+          <p:cNvSpPr txBox="1"/>
+          <p:nvPr/>
+        </p:nvSpPr>
+        <p:spPr>
+          <a:xfrm>
+            <a:off x="6648450" y="4495800"/>
+            <a:ext cx="2657475" cy="276225"/>
+          </a:xfrm>
+          <a:prstGeom prst="rect">
+            <a:avLst/>
+          </a:prstGeom>
+          <a:noFill/>
+          <a:ln/>
+        </p:spPr>
+        <p:txBody>
+          <a:bodyPr wrap="square" lIns="0" tIns="0" rIns="0" bIns="0" anchor="ctr"/>
+          <a:lstStyle/>
+          <a:p>
+            <a:pPr/>
+            <a:r>
+              <a:rPr sz="1500">
+                <a:solidFill>
+                  <a:srgbClr val="1C2340"/>
+                </a:solidFill>
+                <a:latin typeface="Noto Sans JP"/>
+                <a:ea typeface="Noto Sans JP"/>
+              </a:rPr>
+              <a:t>1点だけ言いたいときは</a:t>
+            </a:r>
+          </a:p>
+        </p:txBody>
+      </p:sp>
+      <p:sp>
+        <p:nvSpPr>
+          <p:cNvPr id="34" name=""/>
+          <p:cNvSpPr txBox="1"/>
+          <p:nvPr/>
+        </p:nvSpPr>
+        <p:spPr>
+          <a:xfrm>
+            <a:off x="6648450" y="4781550"/>
+            <a:ext cx="3581400" cy="276225"/>
+          </a:xfrm>
+          <a:prstGeom prst="rect">
+            <a:avLst/>
+          </a:prstGeom>
+          <a:noFill/>
+          <a:ln/>
+        </p:spPr>
+        <p:txBody>
+          <a:bodyPr wrap="square" lIns="0" tIns="0" rIns="0" bIns="0" anchor="ctr"/>
+          <a:lstStyle/>
+          <a:p>
+            <a:pPr/>
+            <a:r>
+              <a:rPr sz="1500" b="1">
+                <a:solidFill>
+                  <a:srgbClr val="1C2340"/>
+                </a:solidFill>
+                <a:latin typeface="DM Sans"/>
+                <a:ea typeface="DM Sans"/>
+              </a:rPr>
+              <a:t>a piece of furniture</a:t>
+            </a:r>
+            <a:pPr/>
+            <a:r>
+              <a:rPr sz="1500">
+                <a:solidFill>
+                  <a:srgbClr val="1C2340"/>
+                </a:solidFill>
+                <a:latin typeface="Noto Sans JP"/>
+                <a:ea typeface="Noto Sans JP"/>
+              </a:rPr>
+              <a:t>（家具1点）</a:t>
+            </a:r>
+          </a:p>
+        </p:txBody>
+      </p:sp>
+      <p:sp>
+        <p:nvSpPr>
+          <p:cNvPr id="35" name=""/>
+          <p:cNvSpPr/>
+          <p:nvPr/>
+        </p:nvSpPr>
+        <p:spPr>
+          <a:xfrm>
+            <a:off x="5943600" y="5410200"/>
+            <a:ext cx="5562600" cy="1028700"/>
+          </a:xfrm>
+          <a:prstGeom prst="roundRect">
+            <a:avLst>
+              <a:gd name="adj" fmla="val 25926"/>
+            </a:avLst>
+          </a:prstGeom>
+          <a:solidFill>
+            <a:srgbClr val="FFFFFF"/>
+          </a:solidFill>
+          <a:ln/>
+          <a:effectLst>
+            <a:outerShdw sx="100000" sy="100000" kx="0" ky="0" algn="bl" rotWithShape="0" blurRad="152400" dist="50800" dir="5400000">
+              <a:srgbClr val="22304A">
+                <a:alpha val="10000"/>
+              </a:srgbClr>
+            </a:outerShdw>
+          </a:effectLst>
+        </p:spPr>
+      </p:sp>
+      <p:sp>
+        <p:nvSpPr>
+          <p:cNvPr id="36" name=""/>
+          <p:cNvSpPr/>
+          <p:nvPr/>
+        </p:nvSpPr>
+        <p:spPr>
+          <a:xfrm>
+            <a:off x="6153150" y="5743575"/>
+            <a:ext cx="361950" cy="361950"/>
+          </a:xfrm>
+          <a:prstGeom prst="ellipse">
+            <a:avLst/>
+          </a:prstGeom>
+          <a:solidFill>
+            <a:srgbClr val="E8461E"/>
+          </a:solidFill>
+          <a:ln/>
+        </p:spPr>
+      </p:sp>
+      <p:sp>
+        <p:nvSpPr>
+          <p:cNvPr id="37" name=""/>
+          <p:cNvSpPr txBox="1"/>
+          <p:nvPr/>
+        </p:nvSpPr>
+        <p:spPr>
+          <a:xfrm>
+            <a:off x="6105525" y="5800725"/>
+            <a:ext cx="476250" cy="238125"/>
+          </a:xfrm>
+          <a:prstGeom prst="rect">
+            <a:avLst/>
+          </a:prstGeom>
+          <a:noFill/>
+          <a:ln/>
+        </p:spPr>
+        <p:txBody>
+          <a:bodyPr wrap="square" lIns="0" tIns="0" rIns="0" bIns="0" anchor="ctr"/>
+          <a:lstStyle/>
+          <a:p>
+            <a:pPr algn="ctr"/>
+            <a:r>
+              <a:rPr sz="1450" b="1">
+                <a:solidFill>
+                  <a:srgbClr val="FFFFFF"/>
+                </a:solidFill>
+                <a:latin typeface="DM Sans"/>
+                <a:ea typeface="DM Sans"/>
+              </a:rPr>
+              <a:t>4</a:t>
+            </a:r>
+          </a:p>
+        </p:txBody>
+      </p:sp>
+      <p:sp>
+        <p:nvSpPr>
+          <p:cNvPr id="38" name=""/>
+          <p:cNvSpPr txBox="1"/>
+          <p:nvPr/>
+        </p:nvSpPr>
+        <p:spPr>
+          <a:xfrm>
+            <a:off x="6648450" y="5638800"/>
+            <a:ext cx="2314575" cy="276225"/>
+          </a:xfrm>
+          <a:prstGeom prst="rect">
+            <a:avLst/>
+          </a:prstGeom>
+          <a:noFill/>
+          <a:ln/>
+        </p:spPr>
+        <p:txBody>
+          <a:bodyPr wrap="square" lIns="0" tIns="0" rIns="0" bIns="0" anchor="ctr"/>
+          <a:lstStyle/>
+          <a:p>
+            <a:pPr/>
+            <a:r>
+              <a:rPr sz="1500">
+                <a:solidFill>
+                  <a:srgbClr val="1C2340"/>
+                </a:solidFill>
+                <a:latin typeface="Noto Sans JP"/>
+                <a:ea typeface="Noto Sans JP"/>
+              </a:rPr>
+              <a:t>動詞は単数あつかい</a:t>
+            </a:r>
+          </a:p>
+        </p:txBody>
+      </p:sp>
+      <p:sp>
+        <p:nvSpPr>
+          <p:cNvPr id="39" name=""/>
+          <p:cNvSpPr txBox="1"/>
+          <p:nvPr/>
+        </p:nvSpPr>
+        <p:spPr>
+          <a:xfrm>
+            <a:off x="6648450" y="5924550"/>
+            <a:ext cx="4695825" cy="276225"/>
+          </a:xfrm>
+          <a:prstGeom prst="rect">
+            <a:avLst/>
+          </a:prstGeom>
+          <a:noFill/>
+          <a:ln/>
+        </p:spPr>
+        <p:txBody>
+          <a:bodyPr wrap="square" lIns="0" tIns="0" rIns="0" bIns="0" anchor="ctr"/>
+          <a:lstStyle/>
+          <a:p>
+            <a:pPr/>
+            <a:r>
+              <a:rPr sz="1500" b="1">
+                <a:solidFill>
+                  <a:srgbClr val="1C2340"/>
+                </a:solidFill>
+                <a:latin typeface="DM Sans"/>
+                <a:ea typeface="DM Sans"/>
+              </a:rPr>
+              <a:t>The furniture </a:t>
+            </a:r>
+            <a:pPr/>
+            <a:r>
+              <a:rPr sz="1500" b="1">
+                <a:solidFill>
+                  <a:srgbClr val="1C2340"/>
+                </a:solidFill>
+                <a:highlight>
+                  <a:srgbClr val="FFD9C9"/>
+                </a:highlight>
+                <a:latin typeface="DM Sans"/>
+                <a:ea typeface="DM Sans"/>
+              </a:rPr>
+              <a:t>is</a:t>
+            </a:r>
+            <a:pPr/>
+            <a:r>
+              <a:rPr sz="1500" b="1">
+                <a:solidFill>
+                  <a:srgbClr val="1C2340"/>
+                </a:solidFill>
+                <a:latin typeface="DM Sans"/>
+                <a:ea typeface="DM Sans"/>
+              </a:rPr>
+              <a:t> new.</a:t>
+            </a:r>
+            <a:pPr/>
+            <a:r>
+              <a:rPr sz="1500">
+                <a:solidFill>
+                  <a:srgbClr val="1C2340"/>
+                </a:solidFill>
+                <a:latin typeface="Noto Sans JP"/>
+                <a:ea typeface="Noto Sans JP"/>
+              </a:rPr>
+              <a:t>（その家具は新しい）</a:t>
             </a:r>
           </a:p>
         </p:txBody>
@@ -13490,8 +14542,8 @@
         </p:nvSpPr>
         <p:spPr>
           <a:xfrm>
-            <a:off x="685800" y="952500"/>
-            <a:ext cx="1038225" cy="200025"/>
+            <a:off x="685800" y="981075"/>
+            <a:ext cx="3228975" cy="200025"/>
           </a:xfrm>
           <a:prstGeom prst="rect">
             <a:avLst/>
@@ -13512,7 +14564,51 @@
                 <a:latin typeface="DM Sans"/>
                 <a:ea typeface="DM Sans"/>
               </a:rPr>
-              <a:t>POINT</a:t>
+              <a:t>NO ARTICLE </a:t>
+            </a:r>
+            <a:pPr/>
+            <a:r>
+              <a:rPr sz="1200" b="1">
+                <a:solidFill>
+                  <a:srgbClr val="E8461E"/>
+                </a:solidFill>
+                <a:latin typeface="Noto Sans JP"/>
+                <a:ea typeface="Noto Sans JP"/>
+              </a:rPr>
+              <a:t>・</a:t>
+            </a:r>
+            <a:pPr/>
+            <a:r>
+              <a:rPr sz="1200" b="1">
+                <a:solidFill>
+                  <a:srgbClr val="E8461E"/>
+                </a:solidFill>
+                <a:latin typeface="DM Sans"/>
+                <a:ea typeface="DM Sans"/>
+              </a:rPr>
+              <a:t> 2 </a:t>
+            </a:r>
+            <a:pPr/>
+            <a:r>
+              <a:rPr sz="1200" b="1">
+                <a:solidFill>
+                  <a:srgbClr val="E8461E"/>
+                </a:solidFill>
+                <a:latin typeface="Noto Sans JP"/>
+                <a:ea typeface="Noto Sans JP"/>
+              </a:rPr>
+              <a:t>・</a:t>
+            </a:r>
+            <a:pPr/>
+            <a:r>
+              <a:rPr sz="1200" b="1">
+                <a:solidFill>
+                  <a:srgbClr val="E8461E"/>
+                </a:solidFill>
+                <a:latin typeface="DM Sans"/>
+                <a:ea typeface="DM Sans"/>
+              </a:rPr>
+              <a:t> POINT</a:t>
             </a:r>
           </a:p>
         </p:txBody>
@@ -13525,7 +14621,7 @@
         </p:nvSpPr>
         <p:spPr>
           <a:xfrm>
-            <a:off x="685800" y="1171575"/>
+            <a:off x="685800" y="1200150"/>
             <a:ext cx="7058025" cy="609600"/>
           </a:xfrm>
           <a:prstGeom prst="rect">
@@ -13560,12 +14656,12 @@
         </p:nvSpPr>
         <p:spPr>
           <a:xfrm>
-            <a:off x="685800" y="1962150"/>
-            <a:ext cx="10820400" cy="1390650"/>
+            <a:off x="685800" y="1990725"/>
+            <a:ext cx="10820400" cy="1381125"/>
           </a:xfrm>
           <a:prstGeom prst="roundRect">
             <a:avLst>
-              <a:gd name="adj" fmla="val 19178"/>
+              <a:gd name="adj" fmla="val 19310"/>
             </a:avLst>
           </a:prstGeom>
           <a:solidFill>
@@ -13597,7 +14693,7 @@
         </p:blipFill>
         <p:spPr>
           <a:xfrm>
-            <a:off x="895350" y="2066925"/>
+            <a:off x="895350" y="2095500"/>
             <a:ext cx="1181100" cy="1181100"/>
           </a:xfrm>
           <a:prstGeom prst="rect">
@@ -13613,7 +14709,7 @@
         </p:nvSpPr>
         <p:spPr>
           <a:xfrm>
-            <a:off x="2324100" y="2266950"/>
+            <a:off x="2324100" y="2295525"/>
             <a:ext cx="5067300" cy="447675"/>
           </a:xfrm>
           <a:prstGeom prst="rect">
@@ -13673,7 +14769,7 @@
         </p:nvSpPr>
         <p:spPr>
           <a:xfrm>
-            <a:off x="2324100" y="2771775"/>
+            <a:off x="2324100" y="2800350"/>
             <a:ext cx="3190875" cy="276225"/>
           </a:xfrm>
           <a:prstGeom prst="rect">
@@ -13708,7 +14804,7 @@
         </p:nvSpPr>
         <p:spPr>
           <a:xfrm>
-            <a:off x="7981950" y="2247900"/>
+            <a:off x="7981950" y="2266950"/>
             <a:ext cx="3238500" cy="828675"/>
           </a:xfrm>
           <a:prstGeom prst="roundRect">
@@ -13730,7 +14826,7 @@
         </p:nvSpPr>
         <p:spPr>
           <a:xfrm>
-            <a:off x="8172450" y="2390775"/>
+            <a:off x="8172450" y="2409825"/>
             <a:ext cx="1590675" cy="257175"/>
           </a:xfrm>
           <a:prstGeom prst="rect">
@@ -13765,7 +14861,7 @@
         </p:nvSpPr>
         <p:spPr>
           <a:xfrm>
-            <a:off x="8172450" y="2667000"/>
+            <a:off x="8172450" y="2695575"/>
             <a:ext cx="2333625" cy="257175"/>
           </a:xfrm>
           <a:prstGeom prst="rect">
@@ -13800,12 +14896,12 @@
         </p:nvSpPr>
         <p:spPr>
           <a:xfrm>
-            <a:off x="685800" y="3505200"/>
-            <a:ext cx="10820400" cy="1390650"/>
+            <a:off x="685800" y="3524250"/>
+            <a:ext cx="10820400" cy="1381125"/>
           </a:xfrm>
           <a:prstGeom prst="roundRect">
             <a:avLst>
-              <a:gd name="adj" fmla="val 19178"/>
+              <a:gd name="adj" fmla="val 19310"/>
             </a:avLst>
           </a:prstGeom>
           <a:solidFill>
@@ -13837,7 +14933,7 @@
         </p:blipFill>
         <p:spPr>
           <a:xfrm>
-            <a:off x="895350" y="3609975"/>
+            <a:off x="895350" y="3629025"/>
             <a:ext cx="1181100" cy="1181100"/>
           </a:xfrm>
           <a:prstGeom prst="rect">
@@ -13853,7 +14949,7 @@
         </p:nvSpPr>
         <p:spPr>
           <a:xfrm>
-            <a:off x="2324100" y="3810000"/>
+            <a:off x="2324100" y="3829050"/>
             <a:ext cx="5800725" cy="447675"/>
           </a:xfrm>
           <a:prstGeom prst="rect">
@@ -13910,7 +15006,7 @@
         </p:nvSpPr>
         <p:spPr>
           <a:xfrm>
-            <a:off x="2324100" y="4314825"/>
+            <a:off x="2324100" y="4333875"/>
             <a:ext cx="3629025" cy="276225"/>
           </a:xfrm>
           <a:prstGeom prst="rect">
@@ -13945,7 +15041,7 @@
         </p:nvSpPr>
         <p:spPr>
           <a:xfrm>
-            <a:off x="7981950" y="3790950"/>
+            <a:off x="7981950" y="3800475"/>
             <a:ext cx="3238500" cy="828675"/>
           </a:xfrm>
           <a:prstGeom prst="roundRect">
@@ -13967,7 +15063,7 @@
         </p:nvSpPr>
         <p:spPr>
           <a:xfrm>
-            <a:off x="8172450" y="3933825"/>
+            <a:off x="8172450" y="3943350"/>
             <a:ext cx="2628900" cy="257175"/>
           </a:xfrm>
           <a:prstGeom prst="rect">
@@ -14002,7 +15098,7 @@
         </p:nvSpPr>
         <p:spPr>
           <a:xfrm>
-            <a:off x="8172450" y="4210050"/>
+            <a:off x="8172450" y="4229100"/>
             <a:ext cx="1381125" cy="257175"/>
           </a:xfrm>
           <a:prstGeom prst="rect">
@@ -14037,12 +15133,12 @@
         </p:nvSpPr>
         <p:spPr>
           <a:xfrm>
-            <a:off x="685800" y="5048250"/>
-            <a:ext cx="10820400" cy="1390650"/>
+            <a:off x="685800" y="5057775"/>
+            <a:ext cx="10820400" cy="1381125"/>
           </a:xfrm>
           <a:prstGeom prst="roundRect">
             <a:avLst>
-              <a:gd name="adj" fmla="val 19178"/>
+              <a:gd name="adj" fmla="val 19310"/>
             </a:avLst>
           </a:prstGeom>
           <a:solidFill>
@@ -14074,7 +15170,7 @@
         </p:blipFill>
         <p:spPr>
           <a:xfrm>
-            <a:off x="895350" y="5153025"/>
+            <a:off x="895350" y="5162550"/>
             <a:ext cx="1181100" cy="1181100"/>
           </a:xfrm>
           <a:prstGeom prst="rect">
@@ -14090,7 +15186,7 @@
         </p:nvSpPr>
         <p:spPr>
           <a:xfrm>
-            <a:off x="2324100" y="5353050"/>
+            <a:off x="2324100" y="5362575"/>
             <a:ext cx="5695950" cy="447675"/>
           </a:xfrm>
           <a:prstGeom prst="rect">
@@ -14147,7 +15243,7 @@
         </p:nvSpPr>
         <p:spPr>
           <a:xfrm>
-            <a:off x="2324100" y="5857875"/>
+            <a:off x="2324100" y="5867400"/>
             <a:ext cx="4419600" cy="276225"/>
           </a:xfrm>
           <a:prstGeom prst="rect">
@@ -14261,7 +15357,7 @@
         </p:nvSpPr>
         <p:spPr>
           <a:xfrm>
-            <a:off x="8172450" y="5753100"/>
+            <a:off x="8172450" y="5762625"/>
             <a:ext cx="2628900" cy="257175"/>
           </a:xfrm>
           <a:prstGeom prst="rect">
@@ -14387,7 +15483,7 @@
         <p:spPr>
           <a:xfrm>
             <a:off x="685800" y="981075"/>
-            <a:ext cx="3781425" cy="200025"/>
+            <a:ext cx="2190750" cy="200025"/>
           </a:xfrm>
           <a:prstGeom prst="rect">
             <a:avLst/>
@@ -14430,7 +15526,7 @@
                 <a:latin typeface="DM Sans"/>
                 <a:ea typeface="DM Sans"/>
               </a:rPr>
-              <a:t> PROPER NOUNS</a:t>
+              <a:t> 3</a:t>
             </a:r>
           </a:p>
         </p:txBody>
@@ -14444,7 +15540,7 @@
         <p:spPr>
           <a:xfrm>
             <a:off x="685800" y="1200150"/>
-            <a:ext cx="7572375" cy="609600"/>
+            <a:ext cx="8124825" cy="609600"/>
           </a:xfrm>
           <a:prstGeom prst="rect">
             <a:avLst/>
@@ -14465,7 +15561,7 @@
                 <a:latin typeface="Noto Sans JP"/>
                 <a:ea typeface="Noto Sans JP"/>
               </a:rPr>
-              <a:t>固有名詞（人・都市・国・施設）</a:t>
+              <a:t>3. 固有名詞（人・都市・国・施設）</a:t>
             </a:r>
           </a:p>
         </p:txBody>
@@ -15396,8 +16492,8 @@
         </p:nvSpPr>
         <p:spPr>
           <a:xfrm>
-            <a:off x="685800" y="952500"/>
-            <a:ext cx="1038225" cy="200025"/>
+            <a:off x="685800" y="981075"/>
+            <a:ext cx="3238500" cy="200025"/>
           </a:xfrm>
           <a:prstGeom prst="rect">
             <a:avLst/>
@@ -15418,7 +16514,51 @@
                 <a:latin typeface="DM Sans"/>
                 <a:ea typeface="DM Sans"/>
               </a:rPr>
-              <a:t>POINT</a:t>
+              <a:t>NO ARTICLE </a:t>
+            </a:r>
+            <a:pPr/>
+            <a:r>
+              <a:rPr sz="1200" b="1">
+                <a:solidFill>
+                  <a:srgbClr val="E8461E"/>
+                </a:solidFill>
+                <a:latin typeface="Noto Sans JP"/>
+                <a:ea typeface="Noto Sans JP"/>
+              </a:rPr>
+              <a:t>・</a:t>
+            </a:r>
+            <a:pPr/>
+            <a:r>
+              <a:rPr sz="1200" b="1">
+                <a:solidFill>
+                  <a:srgbClr val="E8461E"/>
+                </a:solidFill>
+                <a:latin typeface="DM Sans"/>
+                <a:ea typeface="DM Sans"/>
+              </a:rPr>
+              <a:t> 3 </a:t>
+            </a:r>
+            <a:pPr/>
+            <a:r>
+              <a:rPr sz="1200" b="1">
+                <a:solidFill>
+                  <a:srgbClr val="E8461E"/>
+                </a:solidFill>
+                <a:latin typeface="Noto Sans JP"/>
+                <a:ea typeface="Noto Sans JP"/>
+              </a:rPr>
+              <a:t>・</a:t>
+            </a:r>
+            <a:pPr/>
+            <a:r>
+              <a:rPr sz="1200" b="1">
+                <a:solidFill>
+                  <a:srgbClr val="E8461E"/>
+                </a:solidFill>
+                <a:latin typeface="DM Sans"/>
+                <a:ea typeface="DM Sans"/>
+              </a:rPr>
+              <a:t> POINT</a:t>
             </a:r>
           </a:p>
         </p:txBody>
@@ -15431,7 +16571,7 @@
         </p:nvSpPr>
         <p:spPr>
           <a:xfrm>
-            <a:off x="685800" y="1171575"/>
+            <a:off x="685800" y="1200150"/>
             <a:ext cx="11353800" cy="619125"/>
           </a:xfrm>
           <a:prstGeom prst="rect">
@@ -15488,7 +16628,7 @@
         </p:nvSpPr>
         <p:spPr>
           <a:xfrm>
-            <a:off x="685800" y="1924050"/>
+            <a:off x="685800" y="1952625"/>
             <a:ext cx="2752725" cy="304800"/>
           </a:xfrm>
           <a:prstGeom prst="rect">
@@ -15523,8 +16663,8 @@
         </p:nvSpPr>
         <p:spPr>
           <a:xfrm>
-            <a:off x="685800" y="2400300"/>
-            <a:ext cx="2581275" cy="4038600"/>
+            <a:off x="685800" y="2428875"/>
+            <a:ext cx="2581275" cy="4010025"/>
           </a:xfrm>
           <a:prstGeom prst="roundRect">
             <a:avLst>
@@ -15552,8 +16692,8 @@
         </p:nvSpPr>
         <p:spPr>
           <a:xfrm>
-            <a:off x="819150" y="2533650"/>
-            <a:ext cx="2314575" cy="2638425"/>
+            <a:off x="819150" y="2562225"/>
+            <a:ext cx="2314575" cy="2609850"/>
           </a:xfrm>
           <a:prstGeom prst="roundRect">
             <a:avLst>
@@ -15582,7 +16722,7 @@
         </p:blipFill>
         <p:spPr>
           <a:xfrm>
-            <a:off x="1162050" y="3048000"/>
+            <a:off x="1162050" y="3057525"/>
             <a:ext cx="1619250" cy="1619250"/>
           </a:xfrm>
           <a:prstGeom prst="rect">
@@ -15714,8 +16854,8 @@
         </p:nvSpPr>
         <p:spPr>
           <a:xfrm>
-            <a:off x="3438525" y="2400300"/>
-            <a:ext cx="2581275" cy="4038600"/>
+            <a:off x="3438525" y="2428875"/>
+            <a:ext cx="2581275" cy="4010025"/>
           </a:xfrm>
           <a:prstGeom prst="roundRect">
             <a:avLst>
@@ -15743,8 +16883,8 @@
         </p:nvSpPr>
         <p:spPr>
           <a:xfrm>
-            <a:off x="3571875" y="2533650"/>
-            <a:ext cx="2314575" cy="2638425"/>
+            <a:off x="3571875" y="2562225"/>
+            <a:ext cx="2314575" cy="2609850"/>
           </a:xfrm>
           <a:prstGeom prst="roundRect">
             <a:avLst>
@@ -15773,7 +16913,7 @@
         </p:blipFill>
         <p:spPr>
           <a:xfrm>
-            <a:off x="3914775" y="3048000"/>
+            <a:off x="3914775" y="3057525"/>
             <a:ext cx="1619250" cy="1619250"/>
           </a:xfrm>
           <a:prstGeom prst="rect">
@@ -15905,8 +17045,8 @@
         </p:nvSpPr>
         <p:spPr>
           <a:xfrm>
-            <a:off x="6181725" y="2400300"/>
-            <a:ext cx="2581275" cy="4038600"/>
+            <a:off x="6181725" y="2428875"/>
+            <a:ext cx="2581275" cy="4010025"/>
           </a:xfrm>
           <a:prstGeom prst="roundRect">
             <a:avLst>
@@ -15934,8 +17074,8 @@
         </p:nvSpPr>
         <p:spPr>
           <a:xfrm>
-            <a:off x="6315075" y="2533650"/>
-            <a:ext cx="2314575" cy="2638425"/>
+            <a:off x="6315075" y="2562225"/>
+            <a:ext cx="2314575" cy="2609850"/>
           </a:xfrm>
           <a:prstGeom prst="roundRect">
             <a:avLst>
@@ -15964,7 +17104,7 @@
         </p:blipFill>
         <p:spPr>
           <a:xfrm>
-            <a:off x="6657975" y="3048000"/>
+            <a:off x="6657975" y="3057525"/>
             <a:ext cx="1619250" cy="1619250"/>
           </a:xfrm>
           <a:prstGeom prst="rect">
@@ -16096,8 +17236,8 @@
         </p:nvSpPr>
         <p:spPr>
           <a:xfrm>
-            <a:off x="8934450" y="2400300"/>
-            <a:ext cx="2581275" cy="4038600"/>
+            <a:off x="8934450" y="2428875"/>
+            <a:ext cx="2581275" cy="4010025"/>
           </a:xfrm>
           <a:prstGeom prst="roundRect">
             <a:avLst>
@@ -16125,8 +17265,8 @@
         </p:nvSpPr>
         <p:spPr>
           <a:xfrm>
-            <a:off x="9067800" y="2533650"/>
-            <a:ext cx="2314575" cy="2638425"/>
+            <a:off x="9067800" y="2562225"/>
+            <a:ext cx="2314575" cy="2609850"/>
           </a:xfrm>
           <a:prstGeom prst="roundRect">
             <a:avLst>
@@ -16155,7 +17295,7 @@
         </p:blipFill>
         <p:spPr>
           <a:xfrm>
-            <a:off x="9410700" y="3048000"/>
+            <a:off x="9410700" y="3057525"/>
             <a:ext cx="1619250" cy="1619250"/>
           </a:xfrm>
           <a:prstGeom prst="rect">
@@ -16378,7 +17518,7 @@
         <p:spPr>
           <a:xfrm>
             <a:off x="685800" y="981075"/>
-            <a:ext cx="3381375" cy="200025"/>
+            <a:ext cx="2190750" cy="200025"/>
           </a:xfrm>
           <a:prstGeom prst="rect">
             <a:avLst/>
@@ -16421,7 +17561,7 @@
                 <a:latin typeface="DM Sans"/>
                 <a:ea typeface="DM Sans"/>
               </a:rPr>
-              <a:t> LANGUAGES</a:t>
+              <a:t> 4</a:t>
             </a:r>
           </a:p>
         </p:txBody>
@@ -16435,7 +17575,7 @@
         <p:spPr>
           <a:xfrm>
             <a:off x="685800" y="1200150"/>
-            <a:ext cx="6667500" cy="619125"/>
+            <a:ext cx="7210425" cy="619125"/>
           </a:xfrm>
           <a:prstGeom prst="rect">
             <a:avLst/>
@@ -16456,7 +17596,7 @@
                 <a:latin typeface="Noto Sans JP"/>
                 <a:ea typeface="Noto Sans JP"/>
               </a:rPr>
-              <a:t>言語（</a:t>
+              <a:t>4. 言語（</a:t>
             </a:r>
             <a:pPr/>
             <a:r>
@@ -17043,7 +18183,7 @@
         <p:spPr>
           <a:xfrm>
             <a:off x="685800" y="981075"/>
-            <a:ext cx="2781300" cy="200025"/>
+            <a:ext cx="2190750" cy="200025"/>
           </a:xfrm>
           <a:prstGeom prst="rect">
             <a:avLst/>
@@ -17086,7 +18226,7 @@
                 <a:latin typeface="DM Sans"/>
                 <a:ea typeface="DM Sans"/>
               </a:rPr>
-              <a:t> MEALS</a:t>
+              <a:t> 5</a:t>
             </a:r>
           </a:p>
         </p:txBody>
@@ -17100,7 +18240,7 @@
         <p:spPr>
           <a:xfrm>
             <a:off x="685800" y="1200150"/>
-            <a:ext cx="8058150" cy="609600"/>
+            <a:ext cx="8801100" cy="619125"/>
           </a:xfrm>
           <a:prstGeom prst="rect">
             <a:avLst/>
@@ -17121,7 +18261,29 @@
                 <a:latin typeface="Noto Sans JP"/>
                 <a:ea typeface="Noto Sans JP"/>
               </a:rPr>
-              <a:t>朝食・昼食・夕食は、基本は無冠詞</a:t>
+              <a:t>5. 食事（</a:t>
+            </a:r>
+            <a:pPr/>
+            <a:r>
+              <a:rPr sz="3300" b="1">
+                <a:solidFill>
+                  <a:srgbClr val="1C2340"/>
+                </a:solidFill>
+                <a:latin typeface="DM Sans"/>
+                <a:ea typeface="DM Sans"/>
+              </a:rPr>
+              <a:t>breakfast / lunch / dinner</a:t>
+            </a:r>
+            <a:pPr/>
+            <a:r>
+              <a:rPr sz="3300" b="1">
+                <a:solidFill>
+                  <a:srgbClr val="1C2340"/>
+                </a:solidFill>
+                <a:latin typeface="Noto Sans JP"/>
+                <a:ea typeface="Noto Sans JP"/>
+              </a:rPr>
+              <a:t>）</a:t>
             </a:r>
           </a:p>
         </p:txBody>
@@ -17134,12 +18296,12 @@
         </p:nvSpPr>
         <p:spPr>
           <a:xfrm>
-            <a:off x="685800" y="1990725"/>
-            <a:ext cx="10820400" cy="1076325"/>
+            <a:off x="685800" y="2028825"/>
+            <a:ext cx="10820400" cy="1057275"/>
           </a:xfrm>
           <a:prstGeom prst="roundRect">
             <a:avLst>
-              <a:gd name="adj" fmla="val 24779"/>
+              <a:gd name="adj" fmla="val 25225"/>
             </a:avLst>
           </a:prstGeom>
           <a:solidFill>
@@ -17171,7 +18333,7 @@
         </p:blipFill>
         <p:spPr>
           <a:xfrm>
-            <a:off x="895350" y="2047875"/>
+            <a:off x="895350" y="2085975"/>
             <a:ext cx="952500" cy="952500"/>
           </a:xfrm>
           <a:prstGeom prst="rect">
@@ -17187,7 +18349,7 @@
         </p:nvSpPr>
         <p:spPr>
           <a:xfrm>
-            <a:off x="2095500" y="2133600"/>
+            <a:off x="2095500" y="2171700"/>
             <a:ext cx="5000625" cy="447675"/>
           </a:xfrm>
           <a:prstGeom prst="rect">
@@ -17247,7 +18409,7 @@
         </p:nvSpPr>
         <p:spPr>
           <a:xfrm>
-            <a:off x="2095500" y="2638425"/>
+            <a:off x="2095500" y="2676525"/>
             <a:ext cx="3314700" cy="276225"/>
           </a:xfrm>
           <a:prstGeom prst="rect">
@@ -17282,12 +18444,12 @@
         </p:nvSpPr>
         <p:spPr>
           <a:xfrm>
-            <a:off x="685800" y="3219450"/>
-            <a:ext cx="10820400" cy="1076325"/>
+            <a:off x="685800" y="3238500"/>
+            <a:ext cx="10820400" cy="1057275"/>
           </a:xfrm>
           <a:prstGeom prst="roundRect">
             <a:avLst>
-              <a:gd name="adj" fmla="val 24779"/>
+              <a:gd name="adj" fmla="val 25225"/>
             </a:avLst>
           </a:prstGeom>
           <a:solidFill>
@@ -17319,7 +18481,7 @@
         </p:blipFill>
         <p:spPr>
           <a:xfrm>
-            <a:off x="895350" y="3276600"/>
+            <a:off x="895350" y="3295650"/>
             <a:ext cx="952500" cy="952500"/>
           </a:xfrm>
           <a:prstGeom prst="rect">
@@ -17335,7 +18497,7 @@
         </p:nvSpPr>
         <p:spPr>
           <a:xfrm>
-            <a:off x="2095500" y="3362325"/>
+            <a:off x="2095500" y="3381375"/>
             <a:ext cx="5229225" cy="447675"/>
           </a:xfrm>
           <a:prstGeom prst="rect">
@@ -17395,7 +18557,7 @@
         </p:nvSpPr>
         <p:spPr>
           <a:xfrm>
-            <a:off x="2095500" y="3867150"/>
+            <a:off x="2095500" y="3886200"/>
             <a:ext cx="3400425" cy="276225"/>
           </a:xfrm>
           <a:prstGeom prst="rect">
@@ -17430,12 +18592,12 @@
         </p:nvSpPr>
         <p:spPr>
           <a:xfrm>
-            <a:off x="685800" y="4438650"/>
-            <a:ext cx="10820400" cy="1076325"/>
+            <a:off x="685800" y="4457700"/>
+            <a:ext cx="10820400" cy="1057275"/>
           </a:xfrm>
           <a:prstGeom prst="roundRect">
             <a:avLst>
-              <a:gd name="adj" fmla="val 24779"/>
+              <a:gd name="adj" fmla="val 25225"/>
             </a:avLst>
           </a:prstGeom>
           <a:solidFill>
@@ -17664,29 +18826,29 @@
         </p:nvSpPr>
         <p:spPr>
           <a:xfrm>
-            <a:off x="2438400" y="5943600"/>
-            <a:ext cx="3343275" cy="276225"/>
-          </a:xfrm>
-          <a:prstGeom prst="rect">
-            <a:avLst/>
-          </a:prstGeom>
-          <a:noFill/>
-          <a:ln/>
-        </p:spPr>
-        <p:txBody>
-          <a:bodyPr wrap="square" lIns="0" tIns="0" rIns="0" bIns="0" anchor="ctr"/>
-          <a:lstStyle/>
-          <a:p>
-            <a:pPr/>
-            <a:r>
-              <a:rPr sz="1650" b="1">
-                <a:solidFill>
-                  <a:srgbClr val="1C2340"/>
-                </a:solidFill>
-                <a:latin typeface="DM Sans"/>
-                <a:ea typeface="DM Sans"/>
-              </a:rPr>
-              <a:t>breakfast / lunch / dinner</a:t>
+            <a:off x="2438400" y="5934075"/>
+            <a:ext cx="4200525" cy="304800"/>
+          </a:xfrm>
+          <a:prstGeom prst="rect">
+            <a:avLst/>
+          </a:prstGeom>
+          <a:noFill/>
+          <a:ln/>
+        </p:spPr>
+        <p:txBody>
+          <a:bodyPr wrap="square" lIns="0" tIns="0" rIns="0" bIns="0" anchor="ctr"/>
+          <a:lstStyle/>
+          <a:p>
+            <a:pPr/>
+            <a:r>
+              <a:rPr sz="1650">
+                <a:solidFill>
+                  <a:srgbClr val="1C2340"/>
+                </a:solidFill>
+                <a:latin typeface="Noto Sans JP"/>
+                <a:ea typeface="Noto Sans JP"/>
+              </a:rPr>
+              <a:t>朝食・昼食・夕食は、基本は無冠詞</a:t>
             </a:r>
           </a:p>
         </p:txBody>
@@ -17790,7 +18952,7 @@
         <p:spPr>
           <a:xfrm>
             <a:off x="685800" y="981075"/>
-            <a:ext cx="3133725" cy="200025"/>
+            <a:ext cx="2190750" cy="200025"/>
           </a:xfrm>
           <a:prstGeom prst="rect">
             <a:avLst/>
@@ -17833,7 +18995,7 @@
                 <a:latin typeface="DM Sans"/>
                 <a:ea typeface="DM Sans"/>
               </a:rPr>
-              <a:t> HOLIDAYS</a:t>
+              <a:t> 6</a:t>
             </a:r>
           </a:p>
         </p:txBody>
@@ -17847,7 +19009,7 @@
         <p:spPr>
           <a:xfrm>
             <a:off x="685800" y="1200150"/>
-            <a:ext cx="3714750" cy="609600"/>
+            <a:ext cx="4267200" cy="609600"/>
           </a:xfrm>
           <a:prstGeom prst="rect">
             <a:avLst/>
@@ -17868,7 +19030,7 @@
                 <a:latin typeface="Noto Sans JP"/>
                 <a:ea typeface="Noto Sans JP"/>
               </a:rPr>
-              <a:t>祝日・ホリデー</a:t>
+              <a:t>6. 祝日・ホリデー</a:t>
             </a:r>
           </a:p>
         </p:txBody>

--- a/matome/articles-2/articles-2-slides.pptx
+++ b/matome/articles-2/articles-2-slides.pptx
@@ -13724,11 +13724,11 @@
         <p:spPr>
           <a:xfrm>
             <a:off x="5943600" y="1990725"/>
-            <a:ext cx="5562600" cy="1028700"/>
+            <a:ext cx="5562600" cy="1409700"/>
           </a:xfrm>
           <a:prstGeom prst="roundRect">
             <a:avLst>
-              <a:gd name="adj" fmla="val 25926"/>
+              <a:gd name="adj" fmla="val 18919"/>
             </a:avLst>
           </a:prstGeom>
           <a:solidFill>
@@ -13752,7 +13752,7 @@
         </p:nvSpPr>
         <p:spPr>
           <a:xfrm>
-            <a:off x="6153150" y="2324100"/>
+            <a:off x="6153150" y="2514600"/>
             <a:ext cx="361950" cy="361950"/>
           </a:xfrm>
           <a:prstGeom prst="ellipse">
@@ -13772,7 +13772,7 @@
         </p:nvSpPr>
         <p:spPr>
           <a:xfrm>
-            <a:off x="6124575" y="2381250"/>
+            <a:off x="6124575" y="2571750"/>
             <a:ext cx="419100" cy="238125"/>
           </a:xfrm>
           <a:prstGeom prst="rect">
@@ -13807,7 +13807,7 @@
         </p:nvSpPr>
         <p:spPr>
           <a:xfrm>
-            <a:off x="6648450" y="2219325"/>
+            <a:off x="6648450" y="2409825"/>
             <a:ext cx="2971800" cy="276225"/>
           </a:xfrm>
           <a:prstGeom prst="rect">
@@ -13864,7 +13864,7 @@
         </p:nvSpPr>
         <p:spPr>
           <a:xfrm>
-            <a:off x="6648450" y="2505075"/>
+            <a:off x="6648450" y="2695575"/>
             <a:ext cx="5095875" cy="276225"/>
           </a:xfrm>
           <a:prstGeom prst="rect">
@@ -13899,12 +13899,12 @@
         </p:nvSpPr>
         <p:spPr>
           <a:xfrm>
-            <a:off x="5943600" y="3133725"/>
-            <a:ext cx="5562600" cy="1028700"/>
+            <a:off x="5943600" y="3514725"/>
+            <a:ext cx="5562600" cy="1409700"/>
           </a:xfrm>
           <a:prstGeom prst="roundRect">
             <a:avLst>
-              <a:gd name="adj" fmla="val 25926"/>
+              <a:gd name="adj" fmla="val 18919"/>
             </a:avLst>
           </a:prstGeom>
           <a:solidFill>
@@ -13928,7 +13928,7 @@
         </p:nvSpPr>
         <p:spPr>
           <a:xfrm>
-            <a:off x="6153150" y="3467100"/>
+            <a:off x="6153150" y="4038600"/>
             <a:ext cx="361950" cy="361950"/>
           </a:xfrm>
           <a:prstGeom prst="ellipse">
@@ -13948,7 +13948,7 @@
         </p:nvSpPr>
         <p:spPr>
           <a:xfrm>
-            <a:off x="6105525" y="3514725"/>
+            <a:off x="6105525" y="4086225"/>
             <a:ext cx="466725" cy="238125"/>
           </a:xfrm>
           <a:prstGeom prst="rect">
@@ -13983,7 +13983,7 @@
         </p:nvSpPr>
         <p:spPr>
           <a:xfrm>
-            <a:off x="6648450" y="3352800"/>
+            <a:off x="6648450" y="3924300"/>
             <a:ext cx="4676775" cy="276225"/>
           </a:xfrm>
           <a:prstGeom prst="rect">
@@ -14062,7 +14062,7 @@
         </p:nvSpPr>
         <p:spPr>
           <a:xfrm>
-            <a:off x="6648450" y="3676650"/>
+            <a:off x="6648450" y="4248150"/>
             <a:ext cx="3105150" cy="247650"/>
           </a:xfrm>
           <a:prstGeom prst="rect">
@@ -14097,12 +14097,12 @@
         </p:nvSpPr>
         <p:spPr>
           <a:xfrm>
-            <a:off x="5943600" y="4276725"/>
-            <a:ext cx="5562600" cy="1028700"/>
+            <a:off x="5943600" y="5029200"/>
+            <a:ext cx="5562600" cy="1409700"/>
           </a:xfrm>
           <a:prstGeom prst="roundRect">
             <a:avLst>
-              <a:gd name="adj" fmla="val 25926"/>
+              <a:gd name="adj" fmla="val 18919"/>
             </a:avLst>
           </a:prstGeom>
           <a:solidFill>
@@ -14126,7 +14126,7 @@
         </p:nvSpPr>
         <p:spPr>
           <a:xfrm>
-            <a:off x="6153150" y="4600575"/>
+            <a:off x="6153150" y="5553075"/>
             <a:ext cx="361950" cy="361950"/>
           </a:xfrm>
           <a:prstGeom prst="ellipse">
@@ -14146,7 +14146,7 @@
         </p:nvSpPr>
         <p:spPr>
           <a:xfrm>
-            <a:off x="6105525" y="4657725"/>
+            <a:off x="6105525" y="5610225"/>
             <a:ext cx="466725" cy="238125"/>
           </a:xfrm>
           <a:prstGeom prst="rect">
@@ -14181,7 +14181,7 @@
         </p:nvSpPr>
         <p:spPr>
           <a:xfrm>
-            <a:off x="6648450" y="4495800"/>
+            <a:off x="6648450" y="5448300"/>
             <a:ext cx="2657475" cy="276225"/>
           </a:xfrm>
           <a:prstGeom prst="rect">
@@ -14216,7 +14216,7 @@
         </p:nvSpPr>
         <p:spPr>
           <a:xfrm>
-            <a:off x="6648450" y="4781550"/>
+            <a:off x="6648450" y="5734050"/>
             <a:ext cx="3581400" cy="276225"/>
           </a:xfrm>
           <a:prstGeom prst="rect">
@@ -14250,196 +14250,6 @@
                 <a:ea typeface="Noto Sans JP"/>
               </a:rPr>
               <a:t>（家具1点）</a:t>
-            </a:r>
-          </a:p>
-        </p:txBody>
-      </p:sp>
-      <p:sp>
-        <p:nvSpPr>
-          <p:cNvPr id="35" name=""/>
-          <p:cNvSpPr/>
-          <p:nvPr/>
-        </p:nvSpPr>
-        <p:spPr>
-          <a:xfrm>
-            <a:off x="5943600" y="5410200"/>
-            <a:ext cx="5562600" cy="1028700"/>
-          </a:xfrm>
-          <a:prstGeom prst="roundRect">
-            <a:avLst>
-              <a:gd name="adj" fmla="val 25926"/>
-            </a:avLst>
-          </a:prstGeom>
-          <a:solidFill>
-            <a:srgbClr val="FFFFFF"/>
-          </a:solidFill>
-          <a:ln/>
-          <a:effectLst>
-            <a:outerShdw sx="100000" sy="100000" kx="0" ky="0" algn="bl" rotWithShape="0" blurRad="152400" dist="50800" dir="5400000">
-              <a:srgbClr val="22304A">
-                <a:alpha val="10000"/>
-              </a:srgbClr>
-            </a:outerShdw>
-          </a:effectLst>
-        </p:spPr>
-      </p:sp>
-      <p:sp>
-        <p:nvSpPr>
-          <p:cNvPr id="36" name=""/>
-          <p:cNvSpPr/>
-          <p:nvPr/>
-        </p:nvSpPr>
-        <p:spPr>
-          <a:xfrm>
-            <a:off x="6153150" y="5743575"/>
-            <a:ext cx="361950" cy="361950"/>
-          </a:xfrm>
-          <a:prstGeom prst="ellipse">
-            <a:avLst/>
-          </a:prstGeom>
-          <a:solidFill>
-            <a:srgbClr val="E8461E"/>
-          </a:solidFill>
-          <a:ln/>
-        </p:spPr>
-      </p:sp>
-      <p:sp>
-        <p:nvSpPr>
-          <p:cNvPr id="37" name=""/>
-          <p:cNvSpPr txBox="1"/>
-          <p:nvPr/>
-        </p:nvSpPr>
-        <p:spPr>
-          <a:xfrm>
-            <a:off x="6105525" y="5800725"/>
-            <a:ext cx="476250" cy="238125"/>
-          </a:xfrm>
-          <a:prstGeom prst="rect">
-            <a:avLst/>
-          </a:prstGeom>
-          <a:noFill/>
-          <a:ln/>
-        </p:spPr>
-        <p:txBody>
-          <a:bodyPr wrap="square" lIns="0" tIns="0" rIns="0" bIns="0" anchor="ctr"/>
-          <a:lstStyle/>
-          <a:p>
-            <a:pPr algn="ctr"/>
-            <a:r>
-              <a:rPr sz="1450" b="1">
-                <a:solidFill>
-                  <a:srgbClr val="FFFFFF"/>
-                </a:solidFill>
-                <a:latin typeface="DM Sans"/>
-                <a:ea typeface="DM Sans"/>
-              </a:rPr>
-              <a:t>4</a:t>
-            </a:r>
-          </a:p>
-        </p:txBody>
-      </p:sp>
-      <p:sp>
-        <p:nvSpPr>
-          <p:cNvPr id="38" name=""/>
-          <p:cNvSpPr txBox="1"/>
-          <p:nvPr/>
-        </p:nvSpPr>
-        <p:spPr>
-          <a:xfrm>
-            <a:off x="6648450" y="5638800"/>
-            <a:ext cx="2314575" cy="276225"/>
-          </a:xfrm>
-          <a:prstGeom prst="rect">
-            <a:avLst/>
-          </a:prstGeom>
-          <a:noFill/>
-          <a:ln/>
-        </p:spPr>
-        <p:txBody>
-          <a:bodyPr wrap="square" lIns="0" tIns="0" rIns="0" bIns="0" anchor="ctr"/>
-          <a:lstStyle/>
-          <a:p>
-            <a:pPr/>
-            <a:r>
-              <a:rPr sz="1500">
-                <a:solidFill>
-                  <a:srgbClr val="1C2340"/>
-                </a:solidFill>
-                <a:latin typeface="Noto Sans JP"/>
-                <a:ea typeface="Noto Sans JP"/>
-              </a:rPr>
-              <a:t>動詞は単数あつかい</a:t>
-            </a:r>
-          </a:p>
-        </p:txBody>
-      </p:sp>
-      <p:sp>
-        <p:nvSpPr>
-          <p:cNvPr id="39" name=""/>
-          <p:cNvSpPr txBox="1"/>
-          <p:nvPr/>
-        </p:nvSpPr>
-        <p:spPr>
-          <a:xfrm>
-            <a:off x="6648450" y="5924550"/>
-            <a:ext cx="4695825" cy="276225"/>
-          </a:xfrm>
-          <a:prstGeom prst="rect">
-            <a:avLst/>
-          </a:prstGeom>
-          <a:noFill/>
-          <a:ln/>
-        </p:spPr>
-        <p:txBody>
-          <a:bodyPr wrap="square" lIns="0" tIns="0" rIns="0" bIns="0" anchor="ctr"/>
-          <a:lstStyle/>
-          <a:p>
-            <a:pPr/>
-            <a:r>
-              <a:rPr sz="1500" b="1">
-                <a:solidFill>
-                  <a:srgbClr val="1C2340"/>
-                </a:solidFill>
-                <a:latin typeface="DM Sans"/>
-                <a:ea typeface="DM Sans"/>
-              </a:rPr>
-              <a:t>The furniture </a:t>
-            </a:r>
-            <a:pPr/>
-            <a:r>
-              <a:rPr sz="1500" b="1">
-                <a:solidFill>
-                  <a:srgbClr val="1C2340"/>
-                </a:solidFill>
-                <a:highlight>
-                  <a:srgbClr val="FFD9C9"/>
-                </a:highlight>
-                <a:latin typeface="DM Sans"/>
-                <a:ea typeface="DM Sans"/>
-              </a:rPr>
-              <a:t>is</a:t>
-            </a:r>
-            <a:pPr/>
-            <a:r>
-              <a:rPr sz="1500" b="1">
-                <a:solidFill>
-                  <a:srgbClr val="1C2340"/>
-                </a:solidFill>
-                <a:latin typeface="DM Sans"/>
-                <a:ea typeface="DM Sans"/>
-              </a:rPr>
-              <a:t> new.</a:t>
-            </a:r>
-            <a:pPr/>
-            <a:r>
-              <a:rPr sz="1500">
-                <a:solidFill>
-                  <a:srgbClr val="1C2340"/>
-                </a:solidFill>
-                <a:latin typeface="Noto Sans JP"/>
-                <a:ea typeface="Noto Sans JP"/>
-              </a:rPr>
-              <a:t>（その家具は新しい）</a:t>
             </a:r>
           </a:p>
         </p:txBody>
